--- a/docs/KIDO_Presentation.pptx
+++ b/docs/KIDO_Presentation.pptx
@@ -515,7 +515,7 @@
           <a:p>
             <a:r>
               <a:rPr lang="en-US" dirty="0"/>
-              <a:t/>
+              <a:t>Welcome. We are Team KIDO. KIDO is a safe, AI-powered learning ecosystem for children under 15 — and it is already live and deployed. Today we'll cover the problem, our solution, the agentic AI that powers it, safety, and a live demo.</a:t>
             </a:r>
             <a:endParaRPr lang="en-US" dirty="0"/>
           </a:p>
@@ -603,7 +603,7 @@
           <a:p>
             <a:r>
               <a:rPr lang="en-US" dirty="0"/>
-              <a:t/>
+              <a:t>We followed an Agile 8-week cycle from problem formulation to deployment, with continuous integration and clear weekly milestones.</a:t>
             </a:r>
             <a:endParaRPr lang="en-US" dirty="0"/>
           </a:p>
@@ -691,7 +691,7 @@
           <a:p>
             <a:r>
               <a:rPr lang="en-US" dirty="0"/>
-              <a:t/>
+              <a:t>Four members. Farhan led AI and architecture; Zubair built the UI; Syed handled research and documentation; Saboor owned testing, QA and deployment.</a:t>
             </a:r>
             <a:endParaRPr lang="en-US" dirty="0"/>
           </a:p>
@@ -779,7 +779,7 @@
           <a:p>
             <a:r>
               <a:rPr lang="en-US" dirty="0"/>
-              <a:t/>
+              <a:t>KIDO's impact: personalized, engaging, safe learning with real oversight — and a genuine startup opportunity in the regional EdTech market.</a:t>
             </a:r>
             <a:endParaRPr lang="en-US" dirty="0"/>
           </a:p>
@@ -867,7 +867,7 @@
           <a:p>
             <a:r>
               <a:rPr lang="en-US" dirty="0"/>
-              <a:t/>
+              <a:t>To conclude: KIDO synthesizes everything into one safe, intelligent, deployed product. Our closing message: it is not just a project — it is a deployable EdTech product for every child. Thank you — we'll take your questions.</a:t>
             </a:r>
             <a:endParaRPr lang="en-US" dirty="0"/>
           </a:p>
@@ -955,7 +955,7 @@
           <a:p>
             <a:r>
               <a:rPr lang="en-US" dirty="0"/>
-              <a:t/>
+              <a:t>Thank you. Open for questions.</a:t>
             </a:r>
             <a:endParaRPr lang="en-US" dirty="0"/>
           </a:p>
@@ -1043,7 +1043,7 @@
           <a:p>
             <a:r>
               <a:rPr lang="en-US" dirty="0"/>
-              <a:t/>
+              <a:t>Pakistan's education system struggles with personalization, engagement, feedback speed, and child safety online. Existing apps are foreign-made and not parent-centric. These five gaps are exactly what KIDO targets.</a:t>
             </a:r>
             <a:endParaRPr lang="en-US" dirty="0"/>
           </a:p>
@@ -1131,7 +1131,7 @@
           <a:p>
             <a:r>
               <a:rPr lang="en-US" dirty="0"/>
-              <a:t/>
+              <a:t>KIDO is multi-layered. Five pillars: adaptive AI, gamification, parent control, teacher tools, and our agentic AI. Each directly answers a problem from the previous slide.</a:t>
             </a:r>
             <a:endParaRPr lang="en-US" dirty="0"/>
           </a:p>
@@ -1219,7 +1219,7 @@
           <a:p>
             <a:r>
               <a:rPr lang="en-US" dirty="0"/>
-              <a:t/>
+              <a:t>Six core features cover learning, tutoring, play, video, safe social, and analytics — a complete ecosystem, not a single tool.</a:t>
             </a:r>
             <a:endParaRPr lang="en-US" dirty="0"/>
           </a:p>
@@ -1307,7 +1307,7 @@
           <a:p>
             <a:r>
               <a:rPr lang="en-US" dirty="0"/>
-              <a:t/>
+              <a:t>This is our most distinguishing feature. Agents observe the child's state, analyze, decide, act, and learn from outcomes — and we have specialized agents for learning, engagement, safety, behavior, parent insights, and moderation.</a:t>
             </a:r>
             <a:endParaRPr lang="en-US" dirty="0"/>
           </a:p>
@@ -1395,7 +1395,7 @@
           <a:p>
             <a:r>
               <a:rPr lang="en-US" dirty="0"/>
-              <a:t/>
+              <a:t>A clean layered architecture: presentation, API gateway, business logic, AI engine, and data. Each layer is independently scalable and feeds the continuous learning loop.</a:t>
             </a:r>
             <a:endParaRPr lang="en-US" dirty="0"/>
           </a:p>
@@ -1483,7 +1483,7 @@
           <a:p>
             <a:r>
               <a:rPr lang="en-US" dirty="0"/>
-              <a:t/>
+              <a:t>Industry-standard stack: cross-platform frontend, REST backend, PostgreSQL plus Redis, JWT auth, and an LLM-plus-ML AI layer — all containerized and deployed with CI/CD.</a:t>
             </a:r>
             <a:endParaRPr lang="en-US" dirty="0"/>
           </a:p>
@@ -1571,7 +1571,7 @@
           <a:p>
             <a:r>
               <a:rPr lang="en-US" dirty="0"/>
-              <a:t/>
+              <a:t>Safety is built-in, not bolted on. Verifiable parental consent, age-gating, content moderation, data minimization, COPPA alignment, and strict role-based access control.</a:t>
             </a:r>
             <a:endParaRPr lang="en-US" dirty="0"/>
           </a:p>
@@ -1659,7 +1659,7 @@
           <a:p>
             <a:r>
               <a:rPr lang="en-US" dirty="0"/>
-              <a:t/>
+              <a:t>Crucially, KIDO is not a mockup — it is deployed and working. We will now switch to the live site and show the child dashboard, AI tutor, a quiz, the video library, and the parent approval flow.</a:t>
             </a:r>
             <a:endParaRPr lang="en-US" dirty="0"/>
           </a:p>
@@ -2315,6 +2315,9 @@
   <p:clrMapOvr>
     <a:masterClrMapping/>
   </p:clrMapOvr>
+  <p:transition xmlns:p="http://schemas.openxmlformats.org/presentationml/2006/main" spd="med">
+    <p:fade/>
+  </p:transition>
 </p:sld>
 </file>
 
@@ -2451,7 +2454,7 @@
         <p:spPr>
           <a:xfrm>
             <a:off x="1298448" y="1097280"/>
-            <a:ext cx="2011680" cy="54864"/>
+            <a:ext cx="1828800" cy="45720"/>
           </a:xfrm>
           <a:prstGeom prst="rect">
             <a:avLst/>
@@ -2470,7 +2473,7 @@
         </p:nvSpPr>
         <p:spPr>
           <a:xfrm>
-            <a:off x="548640" y="1325880"/>
+            <a:off x="548640" y="1280160"/>
             <a:ext cx="10972800" cy="365760"/>
           </a:xfrm>
           <a:prstGeom prst="rect">
@@ -2509,7 +2512,7 @@
         </p:nvSpPr>
         <p:spPr>
           <a:xfrm>
-            <a:off x="548640" y="1920240"/>
+            <a:off x="548640" y="1828800"/>
             <a:ext cx="2651760" cy="1554480"/>
           </a:xfrm>
           <a:prstGeom prst="roundRect">
@@ -2536,7 +2539,7 @@
         </p:nvSpPr>
         <p:spPr>
           <a:xfrm>
-            <a:off x="548640" y="1920240"/>
+            <a:off x="548640" y="1828800"/>
             <a:ext cx="73152" cy="1554480"/>
           </a:xfrm>
           <a:prstGeom prst="rect">
@@ -2556,8 +2559,8 @@
         </p:nvSpPr>
         <p:spPr>
           <a:xfrm>
-            <a:off x="731520" y="2029968"/>
-            <a:ext cx="2377440" cy="365760"/>
+            <a:off x="749808" y="1920240"/>
+            <a:ext cx="2322576" cy="1371600"/>
           </a:xfrm>
           <a:prstGeom prst="rect">
             <a:avLst/>
@@ -2570,10 +2573,13 @@
           <a:lstStyle/>
           <a:p>
             <a:pPr indent="0" marL="0">
-              <a:buNone/>
-            </a:pPr>
-            <a:r>
-              <a:rPr lang="en-US" sz="1400" b="1" dirty="0">
+              <a:lnSpc>
+                <a:spcPct val="105000"/>
+              </a:lnSpc>
+              <a:buNone/>
+            </a:pPr>
+            <a:r>
+              <a:rPr lang="en-US" sz="1350" b="1" dirty="0">
                 <a:solidFill>
                   <a:srgbClr val="6C63FF"/>
                 </a:solidFill>
@@ -2581,34 +2587,16 @@
                 <a:ea typeface="Segoe UI" pitchFamily="34" charset="-122"/>
                 <a:cs typeface="Segoe UI" pitchFamily="34" charset="-120"/>
               </a:rPr>
-              <a:t>W1 Problem</a:t>
-            </a:r>
-            <a:endParaRPr lang="en-US" sz="1400" dirty="0"/>
-          </a:p>
-        </p:txBody>
-      </p:sp>
-      <p:sp>
-        <p:nvSpPr>
-          <p:cNvPr id="10" name="Text 8"/>
-          <p:cNvSpPr/>
-          <p:nvPr/>
-        </p:nvSpPr>
-        <p:spPr>
-          <a:xfrm>
-            <a:off x="731520" y="2423160"/>
-            <a:ext cx="2331720" cy="960120"/>
-          </a:xfrm>
-          <a:prstGeom prst="rect">
-            <a:avLst/>
-          </a:prstGeom>
-          <a:noFill/>
-          <a:ln/>
-        </p:spPr>
-        <p:txBody>
-          <a:bodyPr wrap="square" rtlCol="0" anchor="t"/>
-          <a:lstStyle/>
+              <a:t>W1 Problem
+</a:t>
+            </a:r>
+            <a:endParaRPr lang="en-US" sz="1350" dirty="0"/>
+          </a:p>
           <a:p>
             <a:pPr indent="0" marL="0">
+              <a:lnSpc>
+                <a:spcPct val="105000"/>
+              </a:lnSpc>
               <a:buNone/>
             </a:pPr>
             <a:r>
@@ -2620,21 +2608,21 @@
                 <a:ea typeface="Segoe UI" pitchFamily="34" charset="-122"/>
                 <a:cs typeface="Segoe UI" pitchFamily="34" charset="-120"/>
               </a:rPr>
-              <a:t>PEAS · state/action/goal · tasks</a:t>
-            </a:r>
-            <a:endParaRPr lang="en-US" sz="1150" dirty="0"/>
-          </a:p>
-        </p:txBody>
-      </p:sp>
-      <p:sp>
-        <p:nvSpPr>
-          <p:cNvPr id="11" name="Shape 9"/>
-          <p:cNvSpPr/>
-          <p:nvPr/>
-        </p:nvSpPr>
-        <p:spPr>
-          <a:xfrm>
-            <a:off x="3364992" y="1920240"/>
+              <a:t>PEAS · state/action/goal</a:t>
+            </a:r>
+            <a:endParaRPr lang="en-US" sz="1350" dirty="0"/>
+          </a:p>
+        </p:txBody>
+      </p:sp>
+      <p:sp>
+        <p:nvSpPr>
+          <p:cNvPr id="10" name="Shape 8"/>
+          <p:cNvSpPr/>
+          <p:nvPr/>
+        </p:nvSpPr>
+        <p:spPr>
+          <a:xfrm>
+            <a:off x="3364992" y="1828800"/>
             <a:ext cx="2651760" cy="1554480"/>
           </a:xfrm>
           <a:prstGeom prst="roundRect">
@@ -2655,13 +2643,13 @@
       </p:sp>
       <p:sp>
         <p:nvSpPr>
-          <p:cNvPr id="12" name="Shape 10"/>
-          <p:cNvSpPr/>
-          <p:nvPr/>
-        </p:nvSpPr>
-        <p:spPr>
-          <a:xfrm>
-            <a:off x="3364992" y="1920240"/>
+          <p:cNvPr id="11" name="Shape 9"/>
+          <p:cNvSpPr/>
+          <p:nvPr/>
+        </p:nvSpPr>
+        <p:spPr>
+          <a:xfrm>
+            <a:off x="3364992" y="1828800"/>
             <a:ext cx="73152" cy="1554480"/>
           </a:xfrm>
           <a:prstGeom prst="rect">
@@ -2675,14 +2663,14 @@
       </p:sp>
       <p:sp>
         <p:nvSpPr>
-          <p:cNvPr id="13" name="Text 11"/>
-          <p:cNvSpPr/>
-          <p:nvPr/>
-        </p:nvSpPr>
-        <p:spPr>
-          <a:xfrm>
-            <a:off x="3547872" y="2029968"/>
-            <a:ext cx="2377440" cy="365760"/>
+          <p:cNvPr id="12" name="Text 10"/>
+          <p:cNvSpPr/>
+          <p:nvPr/>
+        </p:nvSpPr>
+        <p:spPr>
+          <a:xfrm>
+            <a:off x="3566160" y="1920240"/>
+            <a:ext cx="2322576" cy="1371600"/>
           </a:xfrm>
           <a:prstGeom prst="rect">
             <a:avLst/>
@@ -2695,10 +2683,13 @@
           <a:lstStyle/>
           <a:p>
             <a:pPr indent="0" marL="0">
-              <a:buNone/>
-            </a:pPr>
-            <a:r>
-              <a:rPr lang="en-US" sz="1400" b="1" dirty="0">
+              <a:lnSpc>
+                <a:spcPct val="105000"/>
+              </a:lnSpc>
+              <a:buNone/>
+            </a:pPr>
+            <a:r>
+              <a:rPr lang="en-US" sz="1350" b="1" dirty="0">
                 <a:solidFill>
                   <a:srgbClr val="3F3D9E"/>
                 </a:solidFill>
@@ -2706,34 +2697,16 @@
                 <a:ea typeface="Segoe UI" pitchFamily="34" charset="-122"/>
                 <a:cs typeface="Segoe UI" pitchFamily="34" charset="-120"/>
               </a:rPr>
-              <a:t>W2 Research</a:t>
-            </a:r>
-            <a:endParaRPr lang="en-US" sz="1400" dirty="0"/>
-          </a:p>
-        </p:txBody>
-      </p:sp>
-      <p:sp>
-        <p:nvSpPr>
-          <p:cNvPr id="14" name="Text 12"/>
-          <p:cNvSpPr/>
-          <p:nvPr/>
-        </p:nvSpPr>
-        <p:spPr>
-          <a:xfrm>
-            <a:off x="3547872" y="2423160"/>
-            <a:ext cx="2331720" cy="960120"/>
-          </a:xfrm>
-          <a:prstGeom prst="rect">
-            <a:avLst/>
-          </a:prstGeom>
-          <a:noFill/>
-          <a:ln/>
-        </p:spPr>
-        <p:txBody>
-          <a:bodyPr wrap="square" rtlCol="0" anchor="t"/>
-          <a:lstStyle/>
+              <a:t>W2 Research
+</a:t>
+            </a:r>
+            <a:endParaRPr lang="en-US" sz="1350" dirty="0"/>
+          </a:p>
           <a:p>
             <a:pPr indent="0" marL="0">
+              <a:lnSpc>
+                <a:spcPct val="105000"/>
+              </a:lnSpc>
               <a:buNone/>
             </a:pPr>
             <a:r>
@@ -2747,19 +2720,19 @@
               </a:rPr>
               <a:t>Child-safety (COPPA) · context</a:t>
             </a:r>
-            <a:endParaRPr lang="en-US" sz="1150" dirty="0"/>
-          </a:p>
-        </p:txBody>
-      </p:sp>
-      <p:sp>
-        <p:nvSpPr>
-          <p:cNvPr id="15" name="Shape 13"/>
-          <p:cNvSpPr/>
-          <p:nvPr/>
-        </p:nvSpPr>
-        <p:spPr>
-          <a:xfrm>
-            <a:off x="6181344" y="1920240"/>
+            <a:endParaRPr lang="en-US" sz="1350" dirty="0"/>
+          </a:p>
+        </p:txBody>
+      </p:sp>
+      <p:sp>
+        <p:nvSpPr>
+          <p:cNvPr id="13" name="Shape 11"/>
+          <p:cNvSpPr/>
+          <p:nvPr/>
+        </p:nvSpPr>
+        <p:spPr>
+          <a:xfrm>
+            <a:off x="6181344" y="1828800"/>
             <a:ext cx="2651760" cy="1554480"/>
           </a:xfrm>
           <a:prstGeom prst="roundRect">
@@ -2780,111 +2753,96 @@
       </p:sp>
       <p:sp>
         <p:nvSpPr>
+          <p:cNvPr id="14" name="Shape 12"/>
+          <p:cNvSpPr/>
+          <p:nvPr/>
+        </p:nvSpPr>
+        <p:spPr>
+          <a:xfrm>
+            <a:off x="6181344" y="1828800"/>
+            <a:ext cx="73152" cy="1554480"/>
+          </a:xfrm>
+          <a:prstGeom prst="rect">
+            <a:avLst/>
+          </a:prstGeom>
+          <a:solidFill>
+            <a:srgbClr val="6C63FF"/>
+          </a:solidFill>
+          <a:ln/>
+        </p:spPr>
+      </p:sp>
+      <p:sp>
+        <p:nvSpPr>
+          <p:cNvPr id="15" name="Text 13"/>
+          <p:cNvSpPr/>
+          <p:nvPr/>
+        </p:nvSpPr>
+        <p:spPr>
+          <a:xfrm>
+            <a:off x="6382512" y="1920240"/>
+            <a:ext cx="2322576" cy="1371600"/>
+          </a:xfrm>
+          <a:prstGeom prst="rect">
+            <a:avLst/>
+          </a:prstGeom>
+          <a:noFill/>
+          <a:ln/>
+        </p:spPr>
+        <p:txBody>
+          <a:bodyPr wrap="square" rtlCol="0" anchor="ctr"/>
+          <a:lstStyle/>
+          <a:p>
+            <a:pPr indent="0" marL="0">
+              <a:lnSpc>
+                <a:spcPct val="105000"/>
+              </a:lnSpc>
+              <a:buNone/>
+            </a:pPr>
+            <a:r>
+              <a:rPr lang="en-US" sz="1350" b="1" dirty="0">
+                <a:solidFill>
+                  <a:srgbClr val="6C63FF"/>
+                </a:solidFill>
+                <a:latin typeface="Segoe UI" pitchFamily="34" charset="0"/>
+                <a:ea typeface="Segoe UI" pitchFamily="34" charset="-122"/>
+                <a:cs typeface="Segoe UI" pitchFamily="34" charset="-120"/>
+              </a:rPr>
+              <a:t>W3 Architecture
+</a:t>
+            </a:r>
+            <a:endParaRPr lang="en-US" sz="1350" dirty="0"/>
+          </a:p>
+          <a:p>
+            <a:pPr indent="0" marL="0">
+              <a:lnSpc>
+                <a:spcPct val="105000"/>
+              </a:lnSpc>
+              <a:buNone/>
+            </a:pPr>
+            <a:r>
+              <a:rPr lang="en-US" sz="1150" dirty="0">
+                <a:solidFill>
+                  <a:srgbClr val="1A1A2E"/>
+                </a:solidFill>
+                <a:latin typeface="Segoe UI" pitchFamily="34" charset="0"/>
+                <a:ea typeface="Segoe UI" pitchFamily="34" charset="-122"/>
+                <a:cs typeface="Segoe UI" pitchFamily="34" charset="-120"/>
+              </a:rPr>
+              <a:t>Agentic workflow · data model</a:t>
+            </a:r>
+            <a:endParaRPr lang="en-US" sz="1350" dirty="0"/>
+          </a:p>
+        </p:txBody>
+      </p:sp>
+      <p:sp>
+        <p:nvSpPr>
           <p:cNvPr id="16" name="Shape 14"/>
           <p:cNvSpPr/>
           <p:nvPr/>
         </p:nvSpPr>
         <p:spPr>
           <a:xfrm>
-            <a:off x="6181344" y="1920240"/>
-            <a:ext cx="73152" cy="1554480"/>
-          </a:xfrm>
-          <a:prstGeom prst="rect">
-            <a:avLst/>
-          </a:prstGeom>
-          <a:solidFill>
-            <a:srgbClr val="6C63FF"/>
-          </a:solidFill>
-          <a:ln/>
-        </p:spPr>
-      </p:sp>
-      <p:sp>
-        <p:nvSpPr>
-          <p:cNvPr id="17" name="Text 15"/>
-          <p:cNvSpPr/>
-          <p:nvPr/>
-        </p:nvSpPr>
-        <p:spPr>
-          <a:xfrm>
-            <a:off x="6364224" y="2029968"/>
-            <a:ext cx="2377440" cy="365760"/>
-          </a:xfrm>
-          <a:prstGeom prst="rect">
-            <a:avLst/>
-          </a:prstGeom>
-          <a:noFill/>
-          <a:ln/>
-        </p:spPr>
-        <p:txBody>
-          <a:bodyPr wrap="square" rtlCol="0" anchor="ctr"/>
-          <a:lstStyle/>
-          <a:p>
-            <a:pPr indent="0" marL="0">
-              <a:buNone/>
-            </a:pPr>
-            <a:r>
-              <a:rPr lang="en-US" sz="1400" b="1" dirty="0">
-                <a:solidFill>
-                  <a:srgbClr val="6C63FF"/>
-                </a:solidFill>
-                <a:latin typeface="Segoe UI" pitchFamily="34" charset="0"/>
-                <a:ea typeface="Segoe UI" pitchFamily="34" charset="-122"/>
-                <a:cs typeface="Segoe UI" pitchFamily="34" charset="-120"/>
-              </a:rPr>
-              <a:t>W3 Architecture</a:t>
-            </a:r>
-            <a:endParaRPr lang="en-US" sz="1400" dirty="0"/>
-          </a:p>
-        </p:txBody>
-      </p:sp>
-      <p:sp>
-        <p:nvSpPr>
-          <p:cNvPr id="18" name="Text 16"/>
-          <p:cNvSpPr/>
-          <p:nvPr/>
-        </p:nvSpPr>
-        <p:spPr>
-          <a:xfrm>
-            <a:off x="6364224" y="2423160"/>
-            <a:ext cx="2331720" cy="960120"/>
-          </a:xfrm>
-          <a:prstGeom prst="rect">
-            <a:avLst/>
-          </a:prstGeom>
-          <a:noFill/>
-          <a:ln/>
-        </p:spPr>
-        <p:txBody>
-          <a:bodyPr wrap="square" rtlCol="0" anchor="t"/>
-          <a:lstStyle/>
-          <a:p>
-            <a:pPr indent="0" marL="0">
-              <a:buNone/>
-            </a:pPr>
-            <a:r>
-              <a:rPr lang="en-US" sz="1150" dirty="0">
-                <a:solidFill>
-                  <a:srgbClr val="1A1A2E"/>
-                </a:solidFill>
-                <a:latin typeface="Segoe UI" pitchFamily="34" charset="0"/>
-                <a:ea typeface="Segoe UI" pitchFamily="34" charset="-122"/>
-                <a:cs typeface="Segoe UI" pitchFamily="34" charset="-120"/>
-              </a:rPr>
-              <a:t>Agentic workflow · data model</a:t>
-            </a:r>
-            <a:endParaRPr lang="en-US" sz="1150" dirty="0"/>
-          </a:p>
-        </p:txBody>
-      </p:sp>
-      <p:sp>
-        <p:nvSpPr>
-          <p:cNvPr id="19" name="Shape 17"/>
-          <p:cNvSpPr/>
-          <p:nvPr/>
-        </p:nvSpPr>
-        <p:spPr>
-          <a:xfrm>
-            <a:off x="8997696" y="1920240"/>
+            <a:off x="8997696" y="1828800"/>
             <a:ext cx="2651760" cy="1554480"/>
           </a:xfrm>
           <a:prstGeom prst="roundRect">
@@ -2905,13 +2863,13 @@
       </p:sp>
       <p:sp>
         <p:nvSpPr>
-          <p:cNvPr id="20" name="Shape 18"/>
-          <p:cNvSpPr/>
-          <p:nvPr/>
-        </p:nvSpPr>
-        <p:spPr>
-          <a:xfrm>
-            <a:off x="8997696" y="1920240"/>
+          <p:cNvPr id="17" name="Shape 15"/>
+          <p:cNvSpPr/>
+          <p:nvPr/>
+        </p:nvSpPr>
+        <p:spPr>
+          <a:xfrm>
+            <a:off x="8997696" y="1828800"/>
             <a:ext cx="73152" cy="1554480"/>
           </a:xfrm>
           <a:prstGeom prst="rect">
@@ -2925,14 +2883,14 @@
       </p:sp>
       <p:sp>
         <p:nvSpPr>
-          <p:cNvPr id="21" name="Text 19"/>
-          <p:cNvSpPr/>
-          <p:nvPr/>
-        </p:nvSpPr>
-        <p:spPr>
-          <a:xfrm>
-            <a:off x="9180576" y="2029968"/>
-            <a:ext cx="2377440" cy="365760"/>
+          <p:cNvPr id="18" name="Text 16"/>
+          <p:cNvSpPr/>
+          <p:nvPr/>
+        </p:nvSpPr>
+        <p:spPr>
+          <a:xfrm>
+            <a:off x="9198864" y="1920240"/>
+            <a:ext cx="2322576" cy="1371600"/>
           </a:xfrm>
           <a:prstGeom prst="rect">
             <a:avLst/>
@@ -2945,10 +2903,13 @@
           <a:lstStyle/>
           <a:p>
             <a:pPr indent="0" marL="0">
-              <a:buNone/>
-            </a:pPr>
-            <a:r>
-              <a:rPr lang="en-US" sz="1400" b="1" dirty="0">
+              <a:lnSpc>
+                <a:spcPct val="105000"/>
+              </a:lnSpc>
+              <a:buNone/>
+            </a:pPr>
+            <a:r>
+              <a:rPr lang="en-US" sz="1350" b="1" dirty="0">
                 <a:solidFill>
                   <a:srgbClr val="3F3D9E"/>
                 </a:solidFill>
@@ -2956,34 +2917,16 @@
                 <a:ea typeface="Segoe UI" pitchFamily="34" charset="-122"/>
                 <a:cs typeface="Segoe UI" pitchFamily="34" charset="-120"/>
               </a:rPr>
-              <a:t>W4 Backend</a:t>
-            </a:r>
-            <a:endParaRPr lang="en-US" sz="1400" dirty="0"/>
-          </a:p>
-        </p:txBody>
-      </p:sp>
-      <p:sp>
-        <p:nvSpPr>
-          <p:cNvPr id="22" name="Text 20"/>
-          <p:cNvSpPr/>
-          <p:nvPr/>
-        </p:nvSpPr>
-        <p:spPr>
-          <a:xfrm>
-            <a:off x="9180576" y="2423160"/>
-            <a:ext cx="2331720" cy="960120"/>
-          </a:xfrm>
-          <a:prstGeom prst="rect">
-            <a:avLst/>
-          </a:prstGeom>
-          <a:noFill/>
-          <a:ln/>
-        </p:spPr>
-        <p:txBody>
-          <a:bodyPr wrap="square" rtlCol="0" anchor="t"/>
-          <a:lstStyle/>
+              <a:t>W4 Backend
+</a:t>
+            </a:r>
+            <a:endParaRPr lang="en-US" sz="1350" dirty="0"/>
+          </a:p>
           <a:p>
             <a:pPr indent="0" marL="0">
+              <a:lnSpc>
+                <a:spcPct val="105000"/>
+              </a:lnSpc>
               <a:buNone/>
             </a:pPr>
             <a:r>
@@ -2997,19 +2940,19 @@
               </a:rPr>
               <a:t>Schema · APIs · auth guard</a:t>
             </a:r>
-            <a:endParaRPr lang="en-US" sz="1150" dirty="0"/>
-          </a:p>
-        </p:txBody>
-      </p:sp>
-      <p:sp>
-        <p:nvSpPr>
-          <p:cNvPr id="23" name="Shape 21"/>
-          <p:cNvSpPr/>
-          <p:nvPr/>
-        </p:nvSpPr>
-        <p:spPr>
-          <a:xfrm>
-            <a:off x="548640" y="3657600"/>
+            <a:endParaRPr lang="en-US" sz="1350" dirty="0"/>
+          </a:p>
+        </p:txBody>
+      </p:sp>
+      <p:sp>
+        <p:nvSpPr>
+          <p:cNvPr id="19" name="Shape 17"/>
+          <p:cNvSpPr/>
+          <p:nvPr/>
+        </p:nvSpPr>
+        <p:spPr>
+          <a:xfrm>
+            <a:off x="548640" y="3611880"/>
             <a:ext cx="2651760" cy="1554480"/>
           </a:xfrm>
           <a:prstGeom prst="roundRect">
@@ -3030,13 +2973,13 @@
       </p:sp>
       <p:sp>
         <p:nvSpPr>
-          <p:cNvPr id="24" name="Shape 22"/>
-          <p:cNvSpPr/>
-          <p:nvPr/>
-        </p:nvSpPr>
-        <p:spPr>
-          <a:xfrm>
-            <a:off x="548640" y="3657600"/>
+          <p:cNvPr id="20" name="Shape 18"/>
+          <p:cNvSpPr/>
+          <p:nvPr/>
+        </p:nvSpPr>
+        <p:spPr>
+          <a:xfrm>
+            <a:off x="548640" y="3611880"/>
             <a:ext cx="73152" cy="1554480"/>
           </a:xfrm>
           <a:prstGeom prst="rect">
@@ -3050,14 +2993,14 @@
       </p:sp>
       <p:sp>
         <p:nvSpPr>
-          <p:cNvPr id="25" name="Text 23"/>
-          <p:cNvSpPr/>
-          <p:nvPr/>
-        </p:nvSpPr>
-        <p:spPr>
-          <a:xfrm>
-            <a:off x="731520" y="3767328"/>
-            <a:ext cx="2377440" cy="365760"/>
+          <p:cNvPr id="21" name="Text 19"/>
+          <p:cNvSpPr/>
+          <p:nvPr/>
+        </p:nvSpPr>
+        <p:spPr>
+          <a:xfrm>
+            <a:off x="749808" y="3703320"/>
+            <a:ext cx="2322576" cy="1371600"/>
           </a:xfrm>
           <a:prstGeom prst="rect">
             <a:avLst/>
@@ -3070,10 +3013,13 @@
           <a:lstStyle/>
           <a:p>
             <a:pPr indent="0" marL="0">
-              <a:buNone/>
-            </a:pPr>
-            <a:r>
-              <a:rPr lang="en-US" sz="1400" b="1" dirty="0">
+              <a:lnSpc>
+                <a:spcPct val="105000"/>
+              </a:lnSpc>
+              <a:buNone/>
+            </a:pPr>
+            <a:r>
+              <a:rPr lang="en-US" sz="1350" b="1" dirty="0">
                 <a:solidFill>
                   <a:srgbClr val="6C63FF"/>
                 </a:solidFill>
@@ -3081,34 +3027,16 @@
                 <a:ea typeface="Segoe UI" pitchFamily="34" charset="-122"/>
                 <a:cs typeface="Segoe UI" pitchFamily="34" charset="-120"/>
               </a:rPr>
-              <a:t>W5 AI Integration</a:t>
-            </a:r>
-            <a:endParaRPr lang="en-US" sz="1400" dirty="0"/>
-          </a:p>
-        </p:txBody>
-      </p:sp>
-      <p:sp>
-        <p:nvSpPr>
-          <p:cNvPr id="26" name="Text 24"/>
-          <p:cNvSpPr/>
-          <p:nvPr/>
-        </p:nvSpPr>
-        <p:spPr>
-          <a:xfrm>
-            <a:off x="731520" y="4160520"/>
-            <a:ext cx="2331720" cy="960120"/>
-          </a:xfrm>
-          <a:prstGeom prst="rect">
-            <a:avLst/>
-          </a:prstGeom>
-          <a:noFill/>
-          <a:ln/>
-        </p:spPr>
-        <p:txBody>
-          <a:bodyPr wrap="square" rtlCol="0" anchor="t"/>
-          <a:lstStyle/>
+              <a:t>W5 AI Integration
+</a:t>
+            </a:r>
+            <a:endParaRPr lang="en-US" sz="1350" dirty="0"/>
+          </a:p>
           <a:p>
             <a:pPr indent="0" marL="0">
+              <a:lnSpc>
+                <a:spcPct val="105000"/>
+              </a:lnSpc>
               <a:buNone/>
             </a:pPr>
             <a:r>
@@ -3122,19 +3050,19 @@
               </a:rPr>
               <a:t>Tutor · quizzes · agent pipeline</a:t>
             </a:r>
-            <a:endParaRPr lang="en-US" sz="1150" dirty="0"/>
-          </a:p>
-        </p:txBody>
-      </p:sp>
-      <p:sp>
-        <p:nvSpPr>
-          <p:cNvPr id="27" name="Shape 25"/>
-          <p:cNvSpPr/>
-          <p:nvPr/>
-        </p:nvSpPr>
-        <p:spPr>
-          <a:xfrm>
-            <a:off x="3364992" y="3657600"/>
+            <a:endParaRPr lang="en-US" sz="1350" dirty="0"/>
+          </a:p>
+        </p:txBody>
+      </p:sp>
+      <p:sp>
+        <p:nvSpPr>
+          <p:cNvPr id="22" name="Shape 20"/>
+          <p:cNvSpPr/>
+          <p:nvPr/>
+        </p:nvSpPr>
+        <p:spPr>
+          <a:xfrm>
+            <a:off x="3364992" y="3611880"/>
             <a:ext cx="2651760" cy="1554480"/>
           </a:xfrm>
           <a:prstGeom prst="roundRect">
@@ -3155,13 +3083,13 @@
       </p:sp>
       <p:sp>
         <p:nvSpPr>
-          <p:cNvPr id="28" name="Shape 26"/>
-          <p:cNvSpPr/>
-          <p:nvPr/>
-        </p:nvSpPr>
-        <p:spPr>
-          <a:xfrm>
-            <a:off x="3364992" y="3657600"/>
+          <p:cNvPr id="23" name="Shape 21"/>
+          <p:cNvSpPr/>
+          <p:nvPr/>
+        </p:nvSpPr>
+        <p:spPr>
+          <a:xfrm>
+            <a:off x="3364992" y="3611880"/>
             <a:ext cx="73152" cy="1554480"/>
           </a:xfrm>
           <a:prstGeom prst="rect">
@@ -3175,14 +3103,14 @@
       </p:sp>
       <p:sp>
         <p:nvSpPr>
-          <p:cNvPr id="29" name="Text 27"/>
-          <p:cNvSpPr/>
-          <p:nvPr/>
-        </p:nvSpPr>
-        <p:spPr>
-          <a:xfrm>
-            <a:off x="3547872" y="3767328"/>
-            <a:ext cx="2377440" cy="365760"/>
+          <p:cNvPr id="24" name="Text 22"/>
+          <p:cNvSpPr/>
+          <p:nvPr/>
+        </p:nvSpPr>
+        <p:spPr>
+          <a:xfrm>
+            <a:off x="3566160" y="3703320"/>
+            <a:ext cx="2322576" cy="1371600"/>
           </a:xfrm>
           <a:prstGeom prst="rect">
             <a:avLst/>
@@ -3195,10 +3123,13 @@
           <a:lstStyle/>
           <a:p>
             <a:pPr indent="0" marL="0">
-              <a:buNone/>
-            </a:pPr>
-            <a:r>
-              <a:rPr lang="en-US" sz="1400" b="1" dirty="0">
+              <a:lnSpc>
+                <a:spcPct val="105000"/>
+              </a:lnSpc>
+              <a:buNone/>
+            </a:pPr>
+            <a:r>
+              <a:rPr lang="en-US" sz="1350" b="1" dirty="0">
                 <a:solidFill>
                   <a:srgbClr val="3F3D9E"/>
                 </a:solidFill>
@@ -3206,34 +3137,16 @@
                 <a:ea typeface="Segoe UI" pitchFamily="34" charset="-122"/>
                 <a:cs typeface="Segoe UI" pitchFamily="34" charset="-120"/>
               </a:rPr>
-              <a:t>W6 Safety</a:t>
-            </a:r>
-            <a:endParaRPr lang="en-US" sz="1400" dirty="0"/>
-          </a:p>
-        </p:txBody>
-      </p:sp>
-      <p:sp>
-        <p:nvSpPr>
-          <p:cNvPr id="30" name="Text 28"/>
-          <p:cNvSpPr/>
-          <p:nvPr/>
-        </p:nvSpPr>
-        <p:spPr>
-          <a:xfrm>
-            <a:off x="3547872" y="4160520"/>
-            <a:ext cx="2331720" cy="960120"/>
-          </a:xfrm>
-          <a:prstGeom prst="rect">
-            <a:avLst/>
-          </a:prstGeom>
-          <a:noFill/>
-          <a:ln/>
-        </p:spPr>
-        <p:txBody>
-          <a:bodyPr wrap="square" rtlCol="0" anchor="t"/>
-          <a:lstStyle/>
+              <a:t>W6 Safety
+</a:t>
+            </a:r>
+            <a:endParaRPr lang="en-US" sz="1350" dirty="0"/>
+          </a:p>
           <a:p>
             <a:pPr indent="0" marL="0">
+              <a:lnSpc>
+                <a:spcPct val="105000"/>
+              </a:lnSpc>
               <a:buNone/>
             </a:pPr>
             <a:r>
@@ -3247,19 +3160,19 @@
               </a:rPr>
               <a:t>Consent · age-gating · isolation</a:t>
             </a:r>
-            <a:endParaRPr lang="en-US" sz="1150" dirty="0"/>
-          </a:p>
-        </p:txBody>
-      </p:sp>
-      <p:sp>
-        <p:nvSpPr>
-          <p:cNvPr id="31" name="Shape 29"/>
-          <p:cNvSpPr/>
-          <p:nvPr/>
-        </p:nvSpPr>
-        <p:spPr>
-          <a:xfrm>
-            <a:off x="6181344" y="3657600"/>
+            <a:endParaRPr lang="en-US" sz="1350" dirty="0"/>
+          </a:p>
+        </p:txBody>
+      </p:sp>
+      <p:sp>
+        <p:nvSpPr>
+          <p:cNvPr id="25" name="Shape 23"/>
+          <p:cNvSpPr/>
+          <p:nvPr/>
+        </p:nvSpPr>
+        <p:spPr>
+          <a:xfrm>
+            <a:off x="6181344" y="3611880"/>
             <a:ext cx="2651760" cy="1554480"/>
           </a:xfrm>
           <a:prstGeom prst="roundRect">
@@ -3280,13 +3193,13 @@
       </p:sp>
       <p:sp>
         <p:nvSpPr>
-          <p:cNvPr id="32" name="Shape 30"/>
-          <p:cNvSpPr/>
-          <p:nvPr/>
-        </p:nvSpPr>
-        <p:spPr>
-          <a:xfrm>
-            <a:off x="6181344" y="3657600"/>
+          <p:cNvPr id="26" name="Shape 24"/>
+          <p:cNvSpPr/>
+          <p:nvPr/>
+        </p:nvSpPr>
+        <p:spPr>
+          <a:xfrm>
+            <a:off x="6181344" y="3611880"/>
             <a:ext cx="73152" cy="1554480"/>
           </a:xfrm>
           <a:prstGeom prst="rect">
@@ -3300,14 +3213,14 @@
       </p:sp>
       <p:sp>
         <p:nvSpPr>
-          <p:cNvPr id="33" name="Text 31"/>
-          <p:cNvSpPr/>
-          <p:nvPr/>
-        </p:nvSpPr>
-        <p:spPr>
-          <a:xfrm>
-            <a:off x="6364224" y="3767328"/>
-            <a:ext cx="2377440" cy="365760"/>
+          <p:cNvPr id="27" name="Text 25"/>
+          <p:cNvSpPr/>
+          <p:nvPr/>
+        </p:nvSpPr>
+        <p:spPr>
+          <a:xfrm>
+            <a:off x="6382512" y="3703320"/>
+            <a:ext cx="2322576" cy="1371600"/>
           </a:xfrm>
           <a:prstGeom prst="rect">
             <a:avLst/>
@@ -3320,10 +3233,13 @@
           <a:lstStyle/>
           <a:p>
             <a:pPr indent="0" marL="0">
-              <a:buNone/>
-            </a:pPr>
-            <a:r>
-              <a:rPr lang="en-US" sz="1400" b="1" dirty="0">
+              <a:lnSpc>
+                <a:spcPct val="105000"/>
+              </a:lnSpc>
+              <a:buNone/>
+            </a:pPr>
+            <a:r>
+              <a:rPr lang="en-US" sz="1350" b="1" dirty="0">
                 <a:solidFill>
                   <a:srgbClr val="6C63FF"/>
                 </a:solidFill>
@@ -3331,34 +3247,16 @@
                 <a:ea typeface="Segoe UI" pitchFamily="34" charset="-122"/>
                 <a:cs typeface="Segoe UI" pitchFamily="34" charset="-120"/>
               </a:rPr>
-              <a:t>W7 Testing</a:t>
-            </a:r>
-            <a:endParaRPr lang="en-US" sz="1400" dirty="0"/>
-          </a:p>
-        </p:txBody>
-      </p:sp>
-      <p:sp>
-        <p:nvSpPr>
-          <p:cNvPr id="34" name="Text 32"/>
-          <p:cNvSpPr/>
-          <p:nvPr/>
-        </p:nvSpPr>
-        <p:spPr>
-          <a:xfrm>
-            <a:off x="6364224" y="4160520"/>
-            <a:ext cx="2331720" cy="960120"/>
-          </a:xfrm>
-          <a:prstGeom prst="rect">
-            <a:avLst/>
-          </a:prstGeom>
-          <a:noFill/>
-          <a:ln/>
-        </p:spPr>
-        <p:txBody>
-          <a:bodyPr wrap="square" rtlCol="0" anchor="t"/>
-          <a:lstStyle/>
+              <a:t>W7 Testing
+</a:t>
+            </a:r>
+            <a:endParaRPr lang="en-US" sz="1350" dirty="0"/>
+          </a:p>
           <a:p>
             <a:pPr indent="0" marL="0">
+              <a:lnSpc>
+                <a:spcPct val="105000"/>
+              </a:lnSpc>
               <a:buNone/>
             </a:pPr>
             <a:r>
@@ -3370,21 +3268,21 @@
                 <a:ea typeface="Segoe UI" pitchFamily="34" charset="-122"/>
                 <a:cs typeface="Segoe UI" pitchFamily="34" charset="-120"/>
               </a:rPr>
-              <a:t>Adversarial &amp; access-control tests</a:t>
-            </a:r>
-            <a:endParaRPr lang="en-US" sz="1150" dirty="0"/>
-          </a:p>
-        </p:txBody>
-      </p:sp>
-      <p:sp>
-        <p:nvSpPr>
-          <p:cNvPr id="35" name="Shape 33"/>
-          <p:cNvSpPr/>
-          <p:nvPr/>
-        </p:nvSpPr>
-        <p:spPr>
-          <a:xfrm>
-            <a:off x="8997696" y="3657600"/>
+              <a:t>Adversarial &amp; access-control</a:t>
+            </a:r>
+            <a:endParaRPr lang="en-US" sz="1350" dirty="0"/>
+          </a:p>
+        </p:txBody>
+      </p:sp>
+      <p:sp>
+        <p:nvSpPr>
+          <p:cNvPr id="28" name="Shape 26"/>
+          <p:cNvSpPr/>
+          <p:nvPr/>
+        </p:nvSpPr>
+        <p:spPr>
+          <a:xfrm>
+            <a:off x="8997696" y="3611880"/>
             <a:ext cx="2651760" cy="1554480"/>
           </a:xfrm>
           <a:prstGeom prst="roundRect">
@@ -3405,13 +3303,13 @@
       </p:sp>
       <p:sp>
         <p:nvSpPr>
-          <p:cNvPr id="36" name="Shape 34"/>
-          <p:cNvSpPr/>
-          <p:nvPr/>
-        </p:nvSpPr>
-        <p:spPr>
-          <a:xfrm>
-            <a:off x="8997696" y="3657600"/>
+          <p:cNvPr id="29" name="Shape 27"/>
+          <p:cNvSpPr/>
+          <p:nvPr/>
+        </p:nvSpPr>
+        <p:spPr>
+          <a:xfrm>
+            <a:off x="8997696" y="3611880"/>
             <a:ext cx="73152" cy="1554480"/>
           </a:xfrm>
           <a:prstGeom prst="rect">
@@ -3425,14 +3323,14 @@
       </p:sp>
       <p:sp>
         <p:nvSpPr>
-          <p:cNvPr id="37" name="Text 35"/>
-          <p:cNvSpPr/>
-          <p:nvPr/>
-        </p:nvSpPr>
-        <p:spPr>
-          <a:xfrm>
-            <a:off x="9180576" y="3767328"/>
-            <a:ext cx="2377440" cy="365760"/>
+          <p:cNvPr id="30" name="Text 28"/>
+          <p:cNvSpPr/>
+          <p:nvPr/>
+        </p:nvSpPr>
+        <p:spPr>
+          <a:xfrm>
+            <a:off x="9198864" y="3703320"/>
+            <a:ext cx="2322576" cy="1371600"/>
           </a:xfrm>
           <a:prstGeom prst="rect">
             <a:avLst/>
@@ -3445,10 +3343,13 @@
           <a:lstStyle/>
           <a:p>
             <a:pPr indent="0" marL="0">
-              <a:buNone/>
-            </a:pPr>
-            <a:r>
-              <a:rPr lang="en-US" sz="1400" b="1" dirty="0">
+              <a:lnSpc>
+                <a:spcPct val="105000"/>
+              </a:lnSpc>
+              <a:buNone/>
+            </a:pPr>
+            <a:r>
+              <a:rPr lang="en-US" sz="1350" b="1" dirty="0">
                 <a:solidFill>
                   <a:srgbClr val="3F3D9E"/>
                 </a:solidFill>
@@ -3456,34 +3357,16 @@
                 <a:ea typeface="Segoe UI" pitchFamily="34" charset="-122"/>
                 <a:cs typeface="Segoe UI" pitchFamily="34" charset="-120"/>
               </a:rPr>
-              <a:t>W8 Submission</a:t>
-            </a:r>
-            <a:endParaRPr lang="en-US" sz="1400" dirty="0"/>
-          </a:p>
-        </p:txBody>
-      </p:sp>
-      <p:sp>
-        <p:nvSpPr>
-          <p:cNvPr id="38" name="Text 36"/>
-          <p:cNvSpPr/>
-          <p:nvPr/>
-        </p:nvSpPr>
-        <p:spPr>
-          <a:xfrm>
-            <a:off x="9180576" y="4160520"/>
-            <a:ext cx="2331720" cy="960120"/>
-          </a:xfrm>
-          <a:prstGeom prst="rect">
-            <a:avLst/>
-          </a:prstGeom>
-          <a:noFill/>
-          <a:ln/>
-        </p:spPr>
-        <p:txBody>
-          <a:bodyPr wrap="square" rtlCol="0" anchor="t"/>
-          <a:lstStyle/>
+              <a:t>W8 Submission
+</a:t>
+            </a:r>
+            <a:endParaRPr lang="en-US" sz="1350" dirty="0"/>
+          </a:p>
           <a:p>
             <a:pPr indent="0" marL="0">
+              <a:lnSpc>
+                <a:spcPct val="105000"/>
+              </a:lnSpc>
               <a:buNone/>
             </a:pPr>
             <a:r>
@@ -3497,13 +3380,13 @@
               </a:rPr>
               <a:t>Deploy · PWA/APK · report</a:t>
             </a:r>
-            <a:endParaRPr lang="en-US" sz="1150" dirty="0"/>
-          </a:p>
-        </p:txBody>
-      </p:sp>
-      <p:sp>
-        <p:nvSpPr>
-          <p:cNvPr id="39" name="Text 37"/>
+            <a:endParaRPr lang="en-US" sz="1350" dirty="0"/>
+          </a:p>
+        </p:txBody>
+      </p:sp>
+      <p:sp>
+        <p:nvSpPr>
+          <p:cNvPr id="31" name="Text 29"/>
           <p:cNvSpPr/>
           <p:nvPr/>
         </p:nvSpPr>
@@ -3542,7 +3425,7 @@
       </p:sp>
       <p:sp>
         <p:nvSpPr>
-          <p:cNvPr id="40" name="Text 38"/>
+          <p:cNvPr id="32" name="Text 30"/>
           <p:cNvSpPr/>
           <p:nvPr/>
         </p:nvSpPr>
@@ -3584,6 +3467,9 @@
   <p:clrMapOvr>
     <a:masterClrMapping/>
   </p:clrMapOvr>
+  <p:transition xmlns:p="http://schemas.openxmlformats.org/presentationml/2006/main" spd="med">
+    <p:fade/>
+  </p:transition>
 </p:sld>
 </file>
 
@@ -3720,7 +3606,7 @@
         <p:spPr>
           <a:xfrm>
             <a:off x="1298448" y="1097280"/>
-            <a:ext cx="2011680" cy="54864"/>
+            <a:ext cx="1828800" cy="45720"/>
           </a:xfrm>
           <a:prstGeom prst="rect">
             <a:avLst/>
@@ -3802,7 +3688,7 @@
         </p:nvSpPr>
         <p:spPr>
           <a:xfrm>
-            <a:off x="1737360" y="1783080"/>
+            <a:off x="1737360" y="1828800"/>
             <a:ext cx="4023360" cy="365760"/>
           </a:xfrm>
           <a:prstGeom prst="rect">
@@ -3841,7 +3727,7 @@
         </p:nvSpPr>
         <p:spPr>
           <a:xfrm>
-            <a:off x="1737360" y="2194560"/>
+            <a:off x="1737360" y="2240280"/>
             <a:ext cx="4023360" cy="320040"/>
           </a:xfrm>
           <a:prstGeom prst="rect">
@@ -3880,8 +3766,8 @@
         </p:nvSpPr>
         <p:spPr>
           <a:xfrm>
-            <a:off x="1737360" y="2560320"/>
-            <a:ext cx="4023360" cy="868680"/>
+            <a:off x="1737360" y="2606040"/>
+            <a:ext cx="4023360" cy="822960"/>
           </a:xfrm>
           <a:prstGeom prst="rect">
             <a:avLst/>
@@ -3982,7 +3868,7 @@
         </p:nvSpPr>
         <p:spPr>
           <a:xfrm>
-            <a:off x="7360920" y="1783080"/>
+            <a:off x="7360920" y="1828800"/>
             <a:ext cx="4023360" cy="365760"/>
           </a:xfrm>
           <a:prstGeom prst="rect">
@@ -4021,7 +3907,7 @@
         </p:nvSpPr>
         <p:spPr>
           <a:xfrm>
-            <a:off x="7360920" y="2194560"/>
+            <a:off x="7360920" y="2240280"/>
             <a:ext cx="4023360" cy="320040"/>
           </a:xfrm>
           <a:prstGeom prst="rect">
@@ -4060,8 +3946,8 @@
         </p:nvSpPr>
         <p:spPr>
           <a:xfrm>
-            <a:off x="7360920" y="2560320"/>
-            <a:ext cx="4023360" cy="868680"/>
+            <a:off x="7360920" y="2606040"/>
+            <a:ext cx="4023360" cy="822960"/>
           </a:xfrm>
           <a:prstGeom prst="rect">
             <a:avLst/>
@@ -4162,7 +4048,7 @@
         </p:nvSpPr>
         <p:spPr>
           <a:xfrm>
-            <a:off x="1737360" y="4023360"/>
+            <a:off x="1737360" y="4069080"/>
             <a:ext cx="4023360" cy="365760"/>
           </a:xfrm>
           <a:prstGeom prst="rect">
@@ -4201,7 +4087,7 @@
         </p:nvSpPr>
         <p:spPr>
           <a:xfrm>
-            <a:off x="1737360" y="4434840"/>
+            <a:off x="1737360" y="4480560"/>
             <a:ext cx="4023360" cy="320040"/>
           </a:xfrm>
           <a:prstGeom prst="rect">
@@ -4240,8 +4126,8 @@
         </p:nvSpPr>
         <p:spPr>
           <a:xfrm>
-            <a:off x="1737360" y="4800600"/>
-            <a:ext cx="4023360" cy="868680"/>
+            <a:off x="1737360" y="4846320"/>
+            <a:ext cx="4023360" cy="822960"/>
           </a:xfrm>
           <a:prstGeom prst="rect">
             <a:avLst/>
@@ -4342,7 +4228,7 @@
         </p:nvSpPr>
         <p:spPr>
           <a:xfrm>
-            <a:off x="7360920" y="4023360"/>
+            <a:off x="7360920" y="4069080"/>
             <a:ext cx="4023360" cy="365760"/>
           </a:xfrm>
           <a:prstGeom prst="rect">
@@ -4381,7 +4267,7 @@
         </p:nvSpPr>
         <p:spPr>
           <a:xfrm>
-            <a:off x="7360920" y="4434840"/>
+            <a:off x="7360920" y="4480560"/>
             <a:ext cx="4023360" cy="320040"/>
           </a:xfrm>
           <a:prstGeom prst="rect">
@@ -4420,8 +4306,8 @@
         </p:nvSpPr>
         <p:spPr>
           <a:xfrm>
-            <a:off x="7360920" y="4800600"/>
-            <a:ext cx="4023360" cy="868680"/>
+            <a:off x="7360920" y="4846320"/>
+            <a:ext cx="4023360" cy="822960"/>
           </a:xfrm>
           <a:prstGeom prst="rect">
             <a:avLst/>
@@ -4534,6 +4420,9 @@
   <p:clrMapOvr>
     <a:masterClrMapping/>
   </p:clrMapOvr>
+  <p:transition xmlns:p="http://schemas.openxmlformats.org/presentationml/2006/main" spd="med">
+    <p:fade/>
+  </p:transition>
 </p:sld>
 </file>
 
@@ -4670,7 +4559,7 @@
         <p:spPr>
           <a:xfrm>
             <a:off x="1298448" y="1097280"/>
-            <a:ext cx="2011680" cy="54864"/>
+            <a:ext cx="1828800" cy="45720"/>
           </a:xfrm>
           <a:prstGeom prst="rect">
             <a:avLst/>
@@ -4704,7 +4593,7 @@
           <a:p>
             <a:pPr marL="342900" indent="-342900">
               <a:spcAft>
-                <a:spcPts val="800"/>
+                <a:spcPts val="1000"/>
               </a:spcAft>
               <a:buSzPct val="100000"/>
               <a:buChar char="•"/>
@@ -4725,7 +4614,7 @@
           <a:p>
             <a:pPr marL="342900" indent="-342900">
               <a:spcAft>
-                <a:spcPts val="800"/>
+                <a:spcPts val="1000"/>
               </a:spcAft>
               <a:buSzPct val="100000"/>
               <a:buChar char="•"/>
@@ -4746,7 +4635,7 @@
           <a:p>
             <a:pPr marL="342900" indent="-342900">
               <a:spcAft>
-                <a:spcPts val="800"/>
+                <a:spcPts val="1000"/>
               </a:spcAft>
               <a:buSzPct val="100000"/>
               <a:buChar char="•"/>
@@ -4767,7 +4656,7 @@
           <a:p>
             <a:pPr marL="342900" indent="-342900">
               <a:spcAft>
-                <a:spcPts val="800"/>
+                <a:spcPts val="1000"/>
               </a:spcAft>
               <a:buSzPct val="100000"/>
               <a:buChar char="•"/>
@@ -4788,7 +4677,7 @@
           <a:p>
             <a:pPr marL="342900" indent="-342900">
               <a:spcAft>
-                <a:spcPts val="800"/>
+                <a:spcPts val="1000"/>
               </a:spcAft>
               <a:buSzPct val="100000"/>
               <a:buChar char="•"/>
@@ -4891,6 +4780,9 @@
   <p:clrMapOvr>
     <a:masterClrMapping/>
   </p:clrMapOvr>
+  <p:transition xmlns:p="http://schemas.openxmlformats.org/presentationml/2006/main" spd="med">
+    <p:fade/>
+  </p:transition>
 </p:sld>
 </file>
 
@@ -5027,7 +4919,7 @@
         <p:spPr>
           <a:xfrm>
             <a:off x="1298448" y="1097280"/>
-            <a:ext cx="2011680" cy="54864"/>
+            <a:ext cx="1828800" cy="45720"/>
           </a:xfrm>
           <a:prstGeom prst="rect">
             <a:avLst/>
@@ -5040,18 +4932,60 @@
       </p:sp>
       <p:sp>
         <p:nvSpPr>
-          <p:cNvPr id="6" name="Shape 4"/>
-          <p:cNvSpPr/>
-          <p:nvPr/>
-        </p:nvSpPr>
-        <p:spPr>
-          <a:xfrm>
-            <a:off x="548640" y="1463040"/>
-            <a:ext cx="3566160" cy="2011680"/>
+          <p:cNvPr id="6" name="Text 4"/>
+          <p:cNvSpPr/>
+          <p:nvPr/>
+        </p:nvSpPr>
+        <p:spPr>
+          <a:xfrm>
+            <a:off x="548640" y="1417320"/>
+            <a:ext cx="11064240" cy="1463040"/>
+          </a:xfrm>
+          <a:prstGeom prst="rect">
+            <a:avLst/>
+          </a:prstGeom>
+          <a:noFill/>
+          <a:ln/>
+        </p:spPr>
+        <p:txBody>
+          <a:bodyPr wrap="square" rtlCol="0" anchor="ctr"/>
+          <a:lstStyle/>
+          <a:p>
+            <a:pPr indent="0" marL="0">
+              <a:lnSpc>
+                <a:spcPct val="115000"/>
+              </a:lnSpc>
+              <a:buNone/>
+            </a:pPr>
+            <a:r>
+              <a:rPr lang="en-US" sz="1600" dirty="0">
+                <a:solidFill>
+                  <a:srgbClr val="1A1A2E"/>
+                </a:solidFill>
+                <a:latin typeface="Segoe UI" pitchFamily="34" charset="0"/>
+                <a:ea typeface="Segoe UI" pitchFamily="34" charset="-122"/>
+                <a:cs typeface="Segoe UI" pitchFamily="34" charset="-120"/>
+              </a:rPr>
+              <a:t>KIDO unifies adaptive learning, gamification, parental safety, and autonomous AI into one deployed product. It directly answers Pakistan's personalization, engagement, feedback, and safety gaps — and proves an agentic AI system can be both powerful and provably safe for children.</a:t>
+            </a:r>
+            <a:endParaRPr lang="en-US" sz="1600" dirty="0"/>
+          </a:p>
+        </p:txBody>
+      </p:sp>
+      <p:sp>
+        <p:nvSpPr>
+          <p:cNvPr id="7" name="Shape 5"/>
+          <p:cNvSpPr/>
+          <p:nvPr/>
+        </p:nvSpPr>
+        <p:spPr>
+          <a:xfrm>
+            <a:off x="548640" y="3063240"/>
+            <a:ext cx="2651760" cy="731520"/>
           </a:xfrm>
           <a:prstGeom prst="roundRect">
             <a:avLst>
-              <a:gd name="adj" fmla="val 3636"/>
+              <a:gd name="adj" fmla="val 50000"/>
             </a:avLst>
           </a:prstGeom>
           <a:solidFill>
@@ -5059,7 +4993,7 @@
           </a:solidFill>
           <a:ln w="12700">
             <a:solidFill>
-              <a:srgbClr val="E3E1FF"/>
+              <a:srgbClr val="6C63FF"/>
             </a:solidFill>
             <a:prstDash val="solid"/>
           </a:ln>
@@ -5067,46 +5001,26 @@
       </p:sp>
       <p:sp>
         <p:nvSpPr>
-          <p:cNvPr id="7" name="Shape 5"/>
-          <p:cNvSpPr/>
-          <p:nvPr/>
-        </p:nvSpPr>
-        <p:spPr>
-          <a:xfrm>
-            <a:off x="548640" y="1463040"/>
-            <a:ext cx="73152" cy="2011680"/>
-          </a:xfrm>
-          <a:prstGeom prst="rect">
-            <a:avLst/>
-          </a:prstGeom>
-          <a:solidFill>
-            <a:srgbClr val="6C63FF"/>
-          </a:solidFill>
-          <a:ln/>
-        </p:spPr>
-      </p:sp>
-      <p:sp>
-        <p:nvSpPr>
           <p:cNvPr id="8" name="Text 6"/>
           <p:cNvSpPr/>
           <p:nvPr/>
         </p:nvSpPr>
         <p:spPr>
           <a:xfrm>
-            <a:off x="731520" y="1572768"/>
-            <a:ext cx="3291840" cy="365760"/>
-          </a:xfrm>
-          <a:prstGeom prst="rect">
-            <a:avLst/>
-          </a:prstGeom>
-          <a:noFill/>
-          <a:ln/>
-        </p:spPr>
-        <p:txBody>
-          <a:bodyPr wrap="square" rtlCol="0" anchor="ctr"/>
-          <a:lstStyle/>
-          <a:p>
-            <a:pPr indent="0" marL="0">
+            <a:off x="548640" y="3063240"/>
+            <a:ext cx="2651760" cy="731520"/>
+          </a:xfrm>
+          <a:prstGeom prst="rect">
+            <a:avLst/>
+          </a:prstGeom>
+          <a:noFill/>
+          <a:ln/>
+        </p:spPr>
+        <p:txBody>
+          <a:bodyPr wrap="square" rtlCol="0" anchor="ctr"/>
+          <a:lstStyle/>
+          <a:p>
+            <a:pPr algn="ctr" indent="0" marL="0">
               <a:buNone/>
             </a:pPr>
             <a:r>
@@ -5118,7 +5032,7 @@
                 <a:ea typeface="Segoe UI" pitchFamily="34" charset="-122"/>
                 <a:cs typeface="Segoe UI" pitchFamily="34" charset="-120"/>
               </a:rPr>
-              <a:t>Personalization</a:t>
+              <a:t>✅ Personalized</a:t>
             </a:r>
             <a:endParaRPr lang="en-US" sz="1400" dirty="0"/>
           </a:p>
@@ -5126,57 +5040,18 @@
       </p:sp>
       <p:sp>
         <p:nvSpPr>
-          <p:cNvPr id="9" name="Text 7"/>
-          <p:cNvSpPr/>
-          <p:nvPr/>
-        </p:nvSpPr>
-        <p:spPr>
-          <a:xfrm>
-            <a:off x="731520" y="1965960"/>
-            <a:ext cx="3246120" cy="1417320"/>
-          </a:xfrm>
-          <a:prstGeom prst="rect">
-            <a:avLst/>
-          </a:prstGeom>
-          <a:noFill/>
-          <a:ln/>
-        </p:spPr>
-        <p:txBody>
-          <a:bodyPr wrap="square" rtlCol="0" anchor="t"/>
-          <a:lstStyle/>
-          <a:p>
-            <a:pPr indent="0" marL="0">
-              <a:buNone/>
-            </a:pPr>
-            <a:r>
-              <a:rPr lang="en-US" sz="1150" dirty="0">
-                <a:solidFill>
-                  <a:srgbClr val="1A1A2E"/>
-                </a:solidFill>
-                <a:latin typeface="Segoe UI" pitchFamily="34" charset="0"/>
-                <a:ea typeface="Segoe UI" pitchFamily="34" charset="-122"/>
-                <a:cs typeface="Segoe UI" pitchFamily="34" charset="-120"/>
-              </a:rPr>
-              <a:t>Adaptive AI tunes difficulty &amp; content</a:t>
-            </a:r>
-            <a:endParaRPr lang="en-US" sz="1150" dirty="0"/>
-          </a:p>
-        </p:txBody>
-      </p:sp>
-      <p:sp>
-        <p:nvSpPr>
-          <p:cNvPr id="10" name="Shape 8"/>
-          <p:cNvSpPr/>
-          <p:nvPr/>
-        </p:nvSpPr>
-        <p:spPr>
-          <a:xfrm>
-            <a:off x="4297680" y="1463040"/>
-            <a:ext cx="3566160" cy="2011680"/>
+          <p:cNvPr id="9" name="Shape 7"/>
+          <p:cNvSpPr/>
+          <p:nvPr/>
+        </p:nvSpPr>
+        <p:spPr>
+          <a:xfrm>
+            <a:off x="3364992" y="3063240"/>
+            <a:ext cx="2651760" cy="731520"/>
           </a:xfrm>
           <a:prstGeom prst="roundRect">
             <a:avLst>
-              <a:gd name="adj" fmla="val 3636"/>
+              <a:gd name="adj" fmla="val 50000"/>
             </a:avLst>
           </a:prstGeom>
           <a:solidFill>
@@ -5184,7 +5059,7 @@
           </a:solidFill>
           <a:ln w="12700">
             <a:solidFill>
-              <a:srgbClr val="E3E1FF"/>
+              <a:srgbClr val="6C63FF"/>
             </a:solidFill>
             <a:prstDash val="solid"/>
           </a:ln>
@@ -5192,116 +5067,57 @@
       </p:sp>
       <p:sp>
         <p:nvSpPr>
+          <p:cNvPr id="10" name="Text 8"/>
+          <p:cNvSpPr/>
+          <p:nvPr/>
+        </p:nvSpPr>
+        <p:spPr>
+          <a:xfrm>
+            <a:off x="3364992" y="3063240"/>
+            <a:ext cx="2651760" cy="731520"/>
+          </a:xfrm>
+          <a:prstGeom prst="rect">
+            <a:avLst/>
+          </a:prstGeom>
+          <a:noFill/>
+          <a:ln/>
+        </p:spPr>
+        <p:txBody>
+          <a:bodyPr wrap="square" rtlCol="0" anchor="ctr"/>
+          <a:lstStyle/>
+          <a:p>
+            <a:pPr algn="ctr" indent="0" marL="0">
+              <a:buNone/>
+            </a:pPr>
+            <a:r>
+              <a:rPr lang="en-US" sz="1400" b="1" dirty="0">
+                <a:solidFill>
+                  <a:srgbClr val="6C63FF"/>
+                </a:solidFill>
+                <a:latin typeface="Segoe UI" pitchFamily="34" charset="0"/>
+                <a:ea typeface="Segoe UI" pitchFamily="34" charset="-122"/>
+                <a:cs typeface="Segoe UI" pitchFamily="34" charset="-120"/>
+              </a:rPr>
+              <a:t>🛡️ Safe by design</a:t>
+            </a:r>
+            <a:endParaRPr lang="en-US" sz="1400" dirty="0"/>
+          </a:p>
+        </p:txBody>
+      </p:sp>
+      <p:sp>
+        <p:nvSpPr>
           <p:cNvPr id="11" name="Shape 9"/>
           <p:cNvSpPr/>
           <p:nvPr/>
         </p:nvSpPr>
         <p:spPr>
           <a:xfrm>
-            <a:off x="4297680" y="1463040"/>
-            <a:ext cx="73152" cy="2011680"/>
-          </a:xfrm>
-          <a:prstGeom prst="rect">
-            <a:avLst/>
-          </a:prstGeom>
-          <a:solidFill>
-            <a:srgbClr val="3F3D9E"/>
-          </a:solidFill>
-          <a:ln/>
-        </p:spPr>
-      </p:sp>
-      <p:sp>
-        <p:nvSpPr>
-          <p:cNvPr id="12" name="Text 10"/>
-          <p:cNvSpPr/>
-          <p:nvPr/>
-        </p:nvSpPr>
-        <p:spPr>
-          <a:xfrm>
-            <a:off x="4480560" y="1572768"/>
-            <a:ext cx="3291840" cy="365760"/>
-          </a:xfrm>
-          <a:prstGeom prst="rect">
-            <a:avLst/>
-          </a:prstGeom>
-          <a:noFill/>
-          <a:ln/>
-        </p:spPr>
-        <p:txBody>
-          <a:bodyPr wrap="square" rtlCol="0" anchor="ctr"/>
-          <a:lstStyle/>
-          <a:p>
-            <a:pPr indent="0" marL="0">
-              <a:buNone/>
-            </a:pPr>
-            <a:r>
-              <a:rPr lang="en-US" sz="1400" b="1" dirty="0">
-                <a:solidFill>
-                  <a:srgbClr val="3F3D9E"/>
-                </a:solidFill>
-                <a:latin typeface="Segoe UI" pitchFamily="34" charset="0"/>
-                <a:ea typeface="Segoe UI" pitchFamily="34" charset="-122"/>
-                <a:cs typeface="Segoe UI" pitchFamily="34" charset="-120"/>
-              </a:rPr>
-              <a:t>Engagement</a:t>
-            </a:r>
-            <a:endParaRPr lang="en-US" sz="1400" dirty="0"/>
-          </a:p>
-        </p:txBody>
-      </p:sp>
-      <p:sp>
-        <p:nvSpPr>
-          <p:cNvPr id="13" name="Text 11"/>
-          <p:cNvSpPr/>
-          <p:nvPr/>
-        </p:nvSpPr>
-        <p:spPr>
-          <a:xfrm>
-            <a:off x="4480560" y="1965960"/>
-            <a:ext cx="3246120" cy="1417320"/>
-          </a:xfrm>
-          <a:prstGeom prst="rect">
-            <a:avLst/>
-          </a:prstGeom>
-          <a:noFill/>
-          <a:ln/>
-        </p:spPr>
-        <p:txBody>
-          <a:bodyPr wrap="square" rtlCol="0" anchor="t"/>
-          <a:lstStyle/>
-          <a:p>
-            <a:pPr indent="0" marL="0">
-              <a:buNone/>
-            </a:pPr>
-            <a:r>
-              <a:rPr lang="en-US" sz="1150" dirty="0">
-                <a:solidFill>
-                  <a:srgbClr val="1A1A2E"/>
-                </a:solidFill>
-                <a:latin typeface="Segoe UI" pitchFamily="34" charset="0"/>
-                <a:ea typeface="Segoe UI" pitchFamily="34" charset="-122"/>
-                <a:cs typeface="Segoe UI" pitchFamily="34" charset="-120"/>
-              </a:rPr>
-              <a:t>XP, badges, streaks &amp; leaderboards</a:t>
-            </a:r>
-            <a:endParaRPr lang="en-US" sz="1150" dirty="0"/>
-          </a:p>
-        </p:txBody>
-      </p:sp>
-      <p:sp>
-        <p:nvSpPr>
-          <p:cNvPr id="14" name="Shape 12"/>
-          <p:cNvSpPr/>
-          <p:nvPr/>
-        </p:nvSpPr>
-        <p:spPr>
-          <a:xfrm>
-            <a:off x="8046720" y="1463040"/>
-            <a:ext cx="3566160" cy="2011680"/>
+            <a:off x="6181344" y="3063240"/>
+            <a:ext cx="2651760" cy="731520"/>
           </a:xfrm>
           <a:prstGeom prst="roundRect">
             <a:avLst>
-              <a:gd name="adj" fmla="val 3636"/>
+              <a:gd name="adj" fmla="val 50000"/>
             </a:avLst>
           </a:prstGeom>
           <a:solidFill>
@@ -5309,7 +5125,7 @@
           </a:solidFill>
           <a:ln w="12700">
             <a:solidFill>
-              <a:srgbClr val="E3E1FF"/>
+              <a:srgbClr val="6C63FF"/>
             </a:solidFill>
             <a:prstDash val="solid"/>
           </a:ln>
@@ -5317,46 +5133,26 @@
       </p:sp>
       <p:sp>
         <p:nvSpPr>
-          <p:cNvPr id="15" name="Shape 13"/>
-          <p:cNvSpPr/>
-          <p:nvPr/>
-        </p:nvSpPr>
-        <p:spPr>
-          <a:xfrm>
-            <a:off x="8046720" y="1463040"/>
-            <a:ext cx="73152" cy="2011680"/>
-          </a:xfrm>
-          <a:prstGeom prst="rect">
-            <a:avLst/>
-          </a:prstGeom>
-          <a:solidFill>
-            <a:srgbClr val="6C63FF"/>
-          </a:solidFill>
-          <a:ln/>
-        </p:spPr>
-      </p:sp>
-      <p:sp>
-        <p:nvSpPr>
-          <p:cNvPr id="16" name="Text 14"/>
-          <p:cNvSpPr/>
-          <p:nvPr/>
-        </p:nvSpPr>
-        <p:spPr>
-          <a:xfrm>
-            <a:off x="8229600" y="1572768"/>
-            <a:ext cx="3291840" cy="365760"/>
-          </a:xfrm>
-          <a:prstGeom prst="rect">
-            <a:avLst/>
-          </a:prstGeom>
-          <a:noFill/>
-          <a:ln/>
-        </p:spPr>
-        <p:txBody>
-          <a:bodyPr wrap="square" rtlCol="0" anchor="ctr"/>
-          <a:lstStyle/>
-          <a:p>
-            <a:pPr indent="0" marL="0">
+          <p:cNvPr id="12" name="Text 10"/>
+          <p:cNvSpPr/>
+          <p:nvPr/>
+        </p:nvSpPr>
+        <p:spPr>
+          <a:xfrm>
+            <a:off x="6181344" y="3063240"/>
+            <a:ext cx="2651760" cy="731520"/>
+          </a:xfrm>
+          <a:prstGeom prst="rect">
+            <a:avLst/>
+          </a:prstGeom>
+          <a:noFill/>
+          <a:ln/>
+        </p:spPr>
+        <p:txBody>
+          <a:bodyPr wrap="square" rtlCol="0" anchor="ctr"/>
+          <a:lstStyle/>
+          <a:p>
+            <a:pPr algn="ctr" indent="0" marL="0">
               <a:buNone/>
             </a:pPr>
             <a:r>
@@ -5368,7 +5164,7 @@
                 <a:ea typeface="Segoe UI" pitchFamily="34" charset="-122"/>
                 <a:cs typeface="Segoe UI" pitchFamily="34" charset="-120"/>
               </a:rPr>
-              <a:t>Safety</a:t>
+              <a:t>🤖 Truly Agentic</a:t>
             </a:r>
             <a:endParaRPr lang="en-US" sz="1400" dirty="0"/>
           </a:p>
@@ -5376,57 +5172,18 @@
       </p:sp>
       <p:sp>
         <p:nvSpPr>
-          <p:cNvPr id="17" name="Text 15"/>
-          <p:cNvSpPr/>
-          <p:nvPr/>
-        </p:nvSpPr>
-        <p:spPr>
-          <a:xfrm>
-            <a:off x="8229600" y="1965960"/>
-            <a:ext cx="3246120" cy="1417320"/>
-          </a:xfrm>
-          <a:prstGeom prst="rect">
-            <a:avLst/>
-          </a:prstGeom>
-          <a:noFill/>
-          <a:ln/>
-        </p:spPr>
-        <p:txBody>
-          <a:bodyPr wrap="square" rtlCol="0" anchor="t"/>
-          <a:lstStyle/>
-          <a:p>
-            <a:pPr indent="0" marL="0">
-              <a:buNone/>
-            </a:pPr>
-            <a:r>
-              <a:rPr lang="en-US" sz="1150" dirty="0">
-                <a:solidFill>
-                  <a:srgbClr val="1A1A2E"/>
-                </a:solidFill>
-                <a:latin typeface="Segoe UI" pitchFamily="34" charset="0"/>
-                <a:ea typeface="Segoe UI" pitchFamily="34" charset="-122"/>
-                <a:cs typeface="Segoe UI" pitchFamily="34" charset="-120"/>
-              </a:rPr>
-              <a:t>Parental control &amp; COPPA-aligned</a:t>
-            </a:r>
-            <a:endParaRPr lang="en-US" sz="1150" dirty="0"/>
-          </a:p>
-        </p:txBody>
-      </p:sp>
-      <p:sp>
-        <p:nvSpPr>
-          <p:cNvPr id="18" name="Shape 16"/>
-          <p:cNvSpPr/>
-          <p:nvPr/>
-        </p:nvSpPr>
-        <p:spPr>
-          <a:xfrm>
-            <a:off x="548640" y="3703320"/>
-            <a:ext cx="3566160" cy="2011680"/>
+          <p:cNvPr id="13" name="Shape 11"/>
+          <p:cNvSpPr/>
+          <p:nvPr/>
+        </p:nvSpPr>
+        <p:spPr>
+          <a:xfrm>
+            <a:off x="8997696" y="3063240"/>
+            <a:ext cx="2651760" cy="731520"/>
           </a:xfrm>
           <a:prstGeom prst="roundRect">
             <a:avLst>
-              <a:gd name="adj" fmla="val 3636"/>
+              <a:gd name="adj" fmla="val 50000"/>
             </a:avLst>
           </a:prstGeom>
           <a:solidFill>
@@ -5434,7 +5191,7 @@
           </a:solidFill>
           <a:ln w="12700">
             <a:solidFill>
-              <a:srgbClr val="E3E1FF"/>
+              <a:srgbClr val="6C63FF"/>
             </a:solidFill>
             <a:prstDash val="solid"/>
           </a:ln>
@@ -5442,58 +5199,38 @@
       </p:sp>
       <p:sp>
         <p:nvSpPr>
-          <p:cNvPr id="19" name="Shape 17"/>
-          <p:cNvSpPr/>
-          <p:nvPr/>
-        </p:nvSpPr>
-        <p:spPr>
-          <a:xfrm>
-            <a:off x="548640" y="3703320"/>
-            <a:ext cx="73152" cy="2011680"/>
-          </a:xfrm>
-          <a:prstGeom prst="rect">
-            <a:avLst/>
-          </a:prstGeom>
-          <a:solidFill>
-            <a:srgbClr val="3F3D9E"/>
-          </a:solidFill>
-          <a:ln/>
-        </p:spPr>
-      </p:sp>
-      <p:sp>
-        <p:nvSpPr>
-          <p:cNvPr id="20" name="Text 18"/>
-          <p:cNvSpPr/>
-          <p:nvPr/>
-        </p:nvSpPr>
-        <p:spPr>
-          <a:xfrm>
-            <a:off x="731520" y="3813048"/>
-            <a:ext cx="3291840" cy="365760"/>
-          </a:xfrm>
-          <a:prstGeom prst="rect">
-            <a:avLst/>
-          </a:prstGeom>
-          <a:noFill/>
-          <a:ln/>
-        </p:spPr>
-        <p:txBody>
-          <a:bodyPr wrap="square" rtlCol="0" anchor="ctr"/>
-          <a:lstStyle/>
-          <a:p>
-            <a:pPr indent="0" marL="0">
+          <p:cNvPr id="14" name="Text 12"/>
+          <p:cNvSpPr/>
+          <p:nvPr/>
+        </p:nvSpPr>
+        <p:spPr>
+          <a:xfrm>
+            <a:off x="8997696" y="3063240"/>
+            <a:ext cx="2651760" cy="731520"/>
+          </a:xfrm>
+          <a:prstGeom prst="rect">
+            <a:avLst/>
+          </a:prstGeom>
+          <a:noFill/>
+          <a:ln/>
+        </p:spPr>
+        <p:txBody>
+          <a:bodyPr wrap="square" rtlCol="0" anchor="ctr"/>
+          <a:lstStyle/>
+          <a:p>
+            <a:pPr algn="ctr" indent="0" marL="0">
               <a:buNone/>
             </a:pPr>
             <a:r>
               <a:rPr lang="en-US" sz="1400" b="1" dirty="0">
                 <a:solidFill>
-                  <a:srgbClr val="3F3D9E"/>
-                </a:solidFill>
-                <a:latin typeface="Segoe UI" pitchFamily="34" charset="0"/>
-                <a:ea typeface="Segoe UI" pitchFamily="34" charset="-122"/>
-                <a:cs typeface="Segoe UI" pitchFamily="34" charset="-120"/>
-              </a:rPr>
-              <a:t>Intelligence</a:t>
+                  <a:srgbClr val="6C63FF"/>
+                </a:solidFill>
+                <a:latin typeface="Segoe UI" pitchFamily="34" charset="0"/>
+                <a:ea typeface="Segoe UI" pitchFamily="34" charset="-122"/>
+                <a:cs typeface="Segoe UI" pitchFamily="34" charset="-120"/>
+              </a:rPr>
+              <a:t>🚀 Live &amp; deployed</a:t>
             </a:r>
             <a:endParaRPr lang="en-US" sz="1400" dirty="0"/>
           </a:p>
@@ -5501,296 +5238,68 @@
       </p:sp>
       <p:sp>
         <p:nvSpPr>
-          <p:cNvPr id="21" name="Text 19"/>
-          <p:cNvSpPr/>
-          <p:nvPr/>
-        </p:nvSpPr>
-        <p:spPr>
-          <a:xfrm>
-            <a:off x="731520" y="4206240"/>
-            <a:ext cx="3246120" cy="1417320"/>
-          </a:xfrm>
-          <a:prstGeom prst="rect">
-            <a:avLst/>
-          </a:prstGeom>
-          <a:noFill/>
-          <a:ln/>
-        </p:spPr>
-        <p:txBody>
-          <a:bodyPr wrap="square" rtlCol="0" anchor="t"/>
-          <a:lstStyle/>
-          <a:p>
-            <a:pPr indent="0" marL="0">
-              <a:buNone/>
-            </a:pPr>
-            <a:r>
-              <a:rPr lang="en-US" sz="1150" dirty="0">
-                <a:solidFill>
-                  <a:srgbClr val="1A1A2E"/>
-                </a:solidFill>
-                <a:latin typeface="Segoe UI" pitchFamily="34" charset="0"/>
-                <a:ea typeface="Segoe UI" pitchFamily="34" charset="-122"/>
-                <a:cs typeface="Segoe UI" pitchFamily="34" charset="-120"/>
-              </a:rPr>
-              <a:t>Observe → Analyze → Decide → Act → Learn</a:t>
-            </a:r>
-            <a:endParaRPr lang="en-US" sz="1150" dirty="0"/>
-          </a:p>
-        </p:txBody>
-      </p:sp>
-      <p:sp>
-        <p:nvSpPr>
-          <p:cNvPr id="22" name="Shape 20"/>
-          <p:cNvSpPr/>
-          <p:nvPr/>
-        </p:nvSpPr>
-        <p:spPr>
-          <a:xfrm>
-            <a:off x="4297680" y="3703320"/>
-            <a:ext cx="3566160" cy="2011680"/>
+          <p:cNvPr id="15" name="Shape 13"/>
+          <p:cNvSpPr/>
+          <p:nvPr/>
+        </p:nvSpPr>
+        <p:spPr>
+          <a:xfrm>
+            <a:off x="548640" y="4206240"/>
+            <a:ext cx="11064240" cy="1554480"/>
           </a:xfrm>
           <a:prstGeom prst="roundRect">
             <a:avLst>
-              <a:gd name="adj" fmla="val 3636"/>
+              <a:gd name="adj" fmla="val 7059"/>
             </a:avLst>
           </a:prstGeom>
           <a:solidFill>
-            <a:srgbClr val="F0EFFF"/>
-          </a:solidFill>
-          <a:ln w="12700">
-            <a:solidFill>
-              <a:srgbClr val="E3E1FF"/>
-            </a:solidFill>
-            <a:prstDash val="solid"/>
-          </a:ln>
-        </p:spPr>
-      </p:sp>
-      <p:sp>
-        <p:nvSpPr>
-          <p:cNvPr id="23" name="Shape 21"/>
-          <p:cNvSpPr/>
-          <p:nvPr/>
-        </p:nvSpPr>
-        <p:spPr>
-          <a:xfrm>
-            <a:off x="4297680" y="3703320"/>
-            <a:ext cx="73152" cy="2011680"/>
-          </a:xfrm>
-          <a:prstGeom prst="rect">
-            <a:avLst/>
-          </a:prstGeom>
-          <a:solidFill>
-            <a:srgbClr val="6C63FF"/>
-          </a:solidFill>
-          <a:ln/>
-        </p:spPr>
-      </p:sp>
-      <p:sp>
-        <p:nvSpPr>
-          <p:cNvPr id="24" name="Text 22"/>
-          <p:cNvSpPr/>
-          <p:nvPr/>
-        </p:nvSpPr>
-        <p:spPr>
-          <a:xfrm>
-            <a:off x="4480560" y="3813048"/>
-            <a:ext cx="3291840" cy="365760"/>
-          </a:xfrm>
-          <a:prstGeom prst="rect">
-            <a:avLst/>
-          </a:prstGeom>
-          <a:noFill/>
-          <a:ln/>
-        </p:spPr>
-        <p:txBody>
-          <a:bodyPr wrap="square" rtlCol="0" anchor="ctr"/>
-          <a:lstStyle/>
-          <a:p>
-            <a:pPr indent="0" marL="0">
-              <a:buNone/>
-            </a:pPr>
-            <a:r>
-              <a:rPr lang="en-US" sz="1400" b="1" dirty="0">
-                <a:solidFill>
-                  <a:srgbClr val="6C63FF"/>
-                </a:solidFill>
-                <a:latin typeface="Segoe UI" pitchFamily="34" charset="0"/>
-                <a:ea typeface="Segoe UI" pitchFamily="34" charset="-122"/>
-                <a:cs typeface="Segoe UI" pitchFamily="34" charset="-120"/>
-              </a:rPr>
-              <a:t>Scalability</a:t>
-            </a:r>
-            <a:endParaRPr lang="en-US" sz="1400" dirty="0"/>
-          </a:p>
-        </p:txBody>
-      </p:sp>
-      <p:sp>
-        <p:nvSpPr>
-          <p:cNvPr id="25" name="Text 23"/>
-          <p:cNvSpPr/>
-          <p:nvPr/>
-        </p:nvSpPr>
-        <p:spPr>
-          <a:xfrm>
-            <a:off x="4480560" y="4206240"/>
-            <a:ext cx="3246120" cy="1417320"/>
-          </a:xfrm>
-          <a:prstGeom prst="rect">
-            <a:avLst/>
-          </a:prstGeom>
-          <a:noFill/>
-          <a:ln/>
-        </p:spPr>
-        <p:txBody>
-          <a:bodyPr wrap="square" rtlCol="0" anchor="t"/>
-          <a:lstStyle/>
-          <a:p>
-            <a:pPr indent="0" marL="0">
-              <a:buNone/>
-            </a:pPr>
-            <a:r>
-              <a:rPr lang="en-US" sz="1150" dirty="0">
-                <a:solidFill>
-                  <a:srgbClr val="1A1A2E"/>
-                </a:solidFill>
-                <a:latin typeface="Segoe UI" pitchFamily="34" charset="0"/>
-                <a:ea typeface="Segoe UI" pitchFamily="34" charset="-122"/>
-                <a:cs typeface="Segoe UI" pitchFamily="34" charset="-120"/>
-              </a:rPr>
-              <a:t>Cloud-native, containerized deployment</a:t>
-            </a:r>
-            <a:endParaRPr lang="en-US" sz="1150" dirty="0"/>
-          </a:p>
-        </p:txBody>
-      </p:sp>
-      <p:sp>
-        <p:nvSpPr>
-          <p:cNvPr id="26" name="Shape 24"/>
-          <p:cNvSpPr/>
-          <p:nvPr/>
-        </p:nvSpPr>
-        <p:spPr>
-          <a:xfrm>
-            <a:off x="8046720" y="3703320"/>
-            <a:ext cx="3566160" cy="2011680"/>
-          </a:xfrm>
-          <a:prstGeom prst="roundRect">
-            <a:avLst>
-              <a:gd name="adj" fmla="val 3636"/>
-            </a:avLst>
-          </a:prstGeom>
-          <a:solidFill>
-            <a:srgbClr val="F0EFFF"/>
-          </a:solidFill>
-          <a:ln w="12700">
-            <a:solidFill>
-              <a:srgbClr val="E3E1FF"/>
-            </a:solidFill>
-            <a:prstDash val="solid"/>
-          </a:ln>
-        </p:spPr>
-      </p:sp>
-      <p:sp>
-        <p:nvSpPr>
-          <p:cNvPr id="27" name="Shape 25"/>
-          <p:cNvSpPr/>
-          <p:nvPr/>
-        </p:nvSpPr>
-        <p:spPr>
-          <a:xfrm>
-            <a:off x="8046720" y="3703320"/>
-            <a:ext cx="73152" cy="2011680"/>
-          </a:xfrm>
-          <a:prstGeom prst="rect">
-            <a:avLst/>
-          </a:prstGeom>
-          <a:solidFill>
-            <a:srgbClr val="3F3D9E"/>
-          </a:solidFill>
-          <a:ln/>
-        </p:spPr>
-      </p:sp>
-      <p:sp>
-        <p:nvSpPr>
-          <p:cNvPr id="28" name="Text 26"/>
-          <p:cNvSpPr/>
-          <p:nvPr/>
-        </p:nvSpPr>
-        <p:spPr>
-          <a:xfrm>
-            <a:off x="8229600" y="3813048"/>
-            <a:ext cx="3291840" cy="365760"/>
-          </a:xfrm>
-          <a:prstGeom prst="rect">
-            <a:avLst/>
-          </a:prstGeom>
-          <a:noFill/>
-          <a:ln/>
-        </p:spPr>
-        <p:txBody>
-          <a:bodyPr wrap="square" rtlCol="0" anchor="ctr"/>
-          <a:lstStyle/>
-          <a:p>
-            <a:pPr indent="0" marL="0">
-              <a:buNone/>
-            </a:pPr>
-            <a:r>
-              <a:rPr lang="en-US" sz="1400" b="1" dirty="0">
-                <a:solidFill>
-                  <a:srgbClr val="3F3D9E"/>
-                </a:solidFill>
-                <a:latin typeface="Segoe UI" pitchFamily="34" charset="0"/>
-                <a:ea typeface="Segoe UI" pitchFamily="34" charset="-122"/>
-                <a:cs typeface="Segoe UI" pitchFamily="34" charset="-120"/>
-              </a:rPr>
-              <a:t>Value</a:t>
-            </a:r>
-            <a:endParaRPr lang="en-US" sz="1400" dirty="0"/>
-          </a:p>
-        </p:txBody>
-      </p:sp>
-      <p:sp>
-        <p:nvSpPr>
-          <p:cNvPr id="29" name="Text 27"/>
-          <p:cNvSpPr/>
-          <p:nvPr/>
-        </p:nvSpPr>
-        <p:spPr>
-          <a:xfrm>
-            <a:off x="8229600" y="4206240"/>
-            <a:ext cx="3246120" cy="1417320"/>
-          </a:xfrm>
-          <a:prstGeom prst="rect">
-            <a:avLst/>
-          </a:prstGeom>
-          <a:noFill/>
-          <a:ln/>
-        </p:spPr>
-        <p:txBody>
-          <a:bodyPr wrap="square" rtlCol="0" anchor="t"/>
-          <a:lstStyle/>
-          <a:p>
-            <a:pPr indent="0" marL="0">
-              <a:buNone/>
-            </a:pPr>
-            <a:r>
-              <a:rPr lang="en-US" sz="1150" dirty="0">
-                <a:solidFill>
-                  <a:srgbClr val="1A1A2E"/>
-                </a:solidFill>
-                <a:latin typeface="Segoe UI" pitchFamily="34" charset="0"/>
-                <a:ea typeface="Segoe UI" pitchFamily="34" charset="-122"/>
-                <a:cs typeface="Segoe UI" pitchFamily="34" charset="-120"/>
-              </a:rPr>
-              <a:t>A working live product — not just a prototype</a:t>
-            </a:r>
-            <a:endParaRPr lang="en-US" sz="1150" dirty="0"/>
-          </a:p>
-        </p:txBody>
-      </p:sp>
-      <p:sp>
-        <p:nvSpPr>
-          <p:cNvPr id="30" name="Text 28"/>
+            <a:srgbClr val="16152E"/>
+          </a:solidFill>
+          <a:ln/>
+        </p:spPr>
+      </p:sp>
+      <p:sp>
+        <p:nvSpPr>
+          <p:cNvPr id="16" name="Text 14"/>
+          <p:cNvSpPr/>
+          <p:nvPr/>
+        </p:nvSpPr>
+        <p:spPr>
+          <a:xfrm>
+            <a:off x="1005840" y="4206240"/>
+            <a:ext cx="10149840" cy="1554480"/>
+          </a:xfrm>
+          <a:prstGeom prst="rect">
+            <a:avLst/>
+          </a:prstGeom>
+          <a:noFill/>
+          <a:ln/>
+        </p:spPr>
+        <p:txBody>
+          <a:bodyPr wrap="square" rtlCol="0" anchor="ctr"/>
+          <a:lstStyle/>
+          <a:p>
+            <a:pPr algn="ctr" indent="0" marL="0">
+              <a:buNone/>
+            </a:pPr>
+            <a:r>
+              <a:rPr lang="en-US" sz="1800" b="1" i="1" dirty="0">
+                <a:solidFill>
+                  <a:srgbClr val="FFFFFF"/>
+                </a:solidFill>
+                <a:latin typeface="Segoe UI" pitchFamily="34" charset="0"/>
+                <a:ea typeface="Segoe UI" pitchFamily="34" charset="-122"/>
+                <a:cs typeface="Segoe UI" pitchFamily="34" charset="-120"/>
+              </a:rPr>
+              <a:t>"KIDO is not just a project — it is a deployable EdTech product built to make safe, intelligent learning accessible to every child."</a:t>
+            </a:r>
+            <a:endParaRPr lang="en-US" sz="1800" dirty="0"/>
+          </a:p>
+        </p:txBody>
+      </p:sp>
+      <p:sp>
+        <p:nvSpPr>
+          <p:cNvPr id="17" name="Text 15"/>
           <p:cNvSpPr/>
           <p:nvPr/>
         </p:nvSpPr>
@@ -5829,7 +5338,7 @@
       </p:sp>
       <p:sp>
         <p:nvSpPr>
-          <p:cNvPr id="31" name="Text 29"/>
+          <p:cNvPr id="18" name="Text 16"/>
           <p:cNvSpPr/>
           <p:nvPr/>
         </p:nvSpPr>
@@ -5871,6 +5380,9 @@
   <p:clrMapOvr>
     <a:masterClrMapping/>
   </p:clrMapOvr>
+  <p:transition xmlns:p="http://schemas.openxmlformats.org/presentationml/2006/main" spd="med">
+    <p:fade/>
+  </p:transition>
 </p:sld>
 </file>
 
@@ -6066,6 +5578,9 @@
   <p:clrMapOvr>
     <a:masterClrMapping/>
   </p:clrMapOvr>
+  <p:transition xmlns:p="http://schemas.openxmlformats.org/presentationml/2006/main" spd="med">
+    <p:fade/>
+  </p:transition>
 </p:sld>
 </file>
 
@@ -6202,7 +5717,7 @@
         <p:spPr>
           <a:xfrm>
             <a:off x="1298448" y="1097280"/>
-            <a:ext cx="2011680" cy="54864"/>
+            <a:ext cx="1828800" cy="45720"/>
           </a:xfrm>
           <a:prstGeom prst="rect">
             <a:avLst/>
@@ -6236,7 +5751,7 @@
           <a:p>
             <a:pPr marL="342900" indent="-342900">
               <a:spcAft>
-                <a:spcPts val="800"/>
+                <a:spcPts val="1000"/>
               </a:spcAft>
               <a:buSzPct val="100000"/>
               <a:buChar char="•"/>
@@ -6250,14 +5765,14 @@
                 <a:ea typeface="Segoe UI" pitchFamily="34" charset="-122"/>
                 <a:cs typeface="Segoe UI" pitchFamily="34" charset="-120"/>
               </a:rPr>
-              <a:t>One-size-fits-all curriculum ignores each child's pace, style &amp; strengths</a:t>
+              <a:t>One-size-fits-all curriculum ignores each child's pace &amp; strengths</a:t>
             </a:r>
             <a:endParaRPr lang="en-US" sz="1500" dirty="0"/>
           </a:p>
           <a:p>
             <a:pPr marL="342900" indent="-342900">
               <a:spcAft>
-                <a:spcPts val="800"/>
+                <a:spcPts val="1000"/>
               </a:spcAft>
               <a:buSzPct val="100000"/>
               <a:buChar char="•"/>
@@ -6278,7 +5793,7 @@
           <a:p>
             <a:pPr marL="342900" indent="-342900">
               <a:spcAft>
-                <a:spcPts val="800"/>
+                <a:spcPts val="1000"/>
               </a:spcAft>
               <a:buSzPct val="100000"/>
               <a:buChar char="•"/>
@@ -6299,7 +5814,7 @@
           <a:p>
             <a:pPr marL="342900" indent="-342900">
               <a:spcAft>
-                <a:spcPts val="800"/>
+                <a:spcPts val="1000"/>
               </a:spcAft>
               <a:buSzPct val="100000"/>
               <a:buChar char="•"/>
@@ -6320,7 +5835,7 @@
           <a:p>
             <a:pPr marL="342900" indent="-342900">
               <a:spcAft>
-                <a:spcPts val="800"/>
+                <a:spcPts val="1000"/>
               </a:spcAft>
               <a:buSzPct val="100000"/>
               <a:buChar char="•"/>
@@ -6823,6 +6338,9 @@
   <p:clrMapOvr>
     <a:masterClrMapping/>
   </p:clrMapOvr>
+  <p:transition xmlns:p="http://schemas.openxmlformats.org/presentationml/2006/main" spd="med">
+    <p:fade/>
+  </p:transition>
 </p:sld>
 </file>
 
@@ -6959,7 +6477,7 @@
         <p:spPr>
           <a:xfrm>
             <a:off x="1298448" y="1097280"/>
-            <a:ext cx="2011680" cy="54864"/>
+            <a:ext cx="1828800" cy="45720"/>
           </a:xfrm>
           <a:prstGeom prst="rect">
             <a:avLst/>
@@ -6978,8 +6496,8 @@
         </p:nvSpPr>
         <p:spPr>
           <a:xfrm>
-            <a:off x="548640" y="1325880"/>
-            <a:ext cx="11064240" cy="731520"/>
+            <a:off x="548640" y="1280160"/>
+            <a:ext cx="11064240" cy="548640"/>
           </a:xfrm>
           <a:prstGeom prst="rect">
             <a:avLst/>
@@ -7003,7 +6521,7 @@
                 <a:ea typeface="Segoe UI" pitchFamily="34" charset="-122"/>
                 <a:cs typeface="Segoe UI" pitchFamily="34" charset="-120"/>
               </a:rPr>
-              <a:t>A multi-layered AI platform combining adaptive learning, gamification, parental oversight, teacher tools, and autonomous AI agents — in one safe mobile + web experience.</a:t>
+              <a:t>One safe platform combining adaptive learning, gamification, parental oversight, teacher tools, and autonomous AI agents.</a:t>
             </a:r>
             <a:endParaRPr lang="en-US" sz="1500" dirty="0"/>
           </a:p>
@@ -7017,12 +6535,12 @@
         </p:nvSpPr>
         <p:spPr>
           <a:xfrm>
-            <a:off x="548640" y="2377440"/>
-            <a:ext cx="2103120" cy="3108960"/>
+            <a:off x="548640" y="2103120"/>
+            <a:ext cx="2103120" cy="3200400"/>
           </a:xfrm>
           <a:prstGeom prst="roundRect">
             <a:avLst>
-              <a:gd name="adj" fmla="val 3478"/>
+              <a:gd name="adj" fmla="val 4348"/>
             </a:avLst>
           </a:prstGeom>
           <a:solidFill>
@@ -7044,8 +6562,8 @@
         </p:nvSpPr>
         <p:spPr>
           <a:xfrm>
-            <a:off x="548640" y="2377440"/>
-            <a:ext cx="73152" cy="3108960"/>
+            <a:off x="548640" y="2103120"/>
+            <a:ext cx="2103120" cy="109728"/>
           </a:xfrm>
           <a:prstGeom prst="rect">
             <a:avLst/>
@@ -7064,24 +6582,60 @@
         </p:nvSpPr>
         <p:spPr>
           <a:xfrm>
-            <a:off x="731520" y="2487168"/>
-            <a:ext cx="1828800" cy="365760"/>
-          </a:xfrm>
-          <a:prstGeom prst="rect">
-            <a:avLst/>
-          </a:prstGeom>
-          <a:noFill/>
-          <a:ln/>
-        </p:spPr>
-        <p:txBody>
-          <a:bodyPr wrap="square" rtlCol="0" anchor="ctr"/>
-          <a:lstStyle/>
-          <a:p>
-            <a:pPr indent="0" marL="0">
-              <a:buNone/>
-            </a:pPr>
-            <a:r>
-              <a:rPr lang="en-US" sz="1400" b="1" dirty="0">
+            <a:off x="548640" y="2423160"/>
+            <a:ext cx="2103120" cy="914400"/>
+          </a:xfrm>
+          <a:prstGeom prst="rect">
+            <a:avLst/>
+          </a:prstGeom>
+          <a:noFill/>
+          <a:ln/>
+        </p:spPr>
+        <p:txBody>
+          <a:bodyPr wrap="square" rtlCol="0" anchor="ctr"/>
+          <a:lstStyle/>
+          <a:p>
+            <a:pPr algn="ctr" indent="0" marL="0">
+              <a:buNone/>
+            </a:pPr>
+            <a:r>
+              <a:rPr lang="en-US" sz="4600" dirty="0">
+                <a:solidFill>
+                  <a:srgbClr val="000000"/>
+                </a:solidFill>
+              </a:rPr>
+              <a:t>🎯</a:t>
+            </a:r>
+            <a:endParaRPr lang="en-US" sz="4600" dirty="0"/>
+          </a:p>
+        </p:txBody>
+      </p:sp>
+      <p:sp>
+        <p:nvSpPr>
+          <p:cNvPr id="10" name="Text 8"/>
+          <p:cNvSpPr/>
+          <p:nvPr/>
+        </p:nvSpPr>
+        <p:spPr>
+          <a:xfrm>
+            <a:off x="640080" y="3474720"/>
+            <a:ext cx="1920240" cy="548640"/>
+          </a:xfrm>
+          <a:prstGeom prst="rect">
+            <a:avLst/>
+          </a:prstGeom>
+          <a:noFill/>
+          <a:ln/>
+        </p:spPr>
+        <p:txBody>
+          <a:bodyPr wrap="square" rtlCol="0" anchor="ctr"/>
+          <a:lstStyle/>
+          <a:p>
+            <a:pPr algn="ctr" indent="0" marL="0">
+              <a:buNone/>
+            </a:pPr>
+            <a:r>
+              <a:rPr lang="en-US" sz="1500" b="1" dirty="0">
                 <a:solidFill>
                   <a:srgbClr val="6C63FF"/>
                 </a:solidFill>
@@ -7089,22 +6643,22 @@
                 <a:ea typeface="Segoe UI" pitchFamily="34" charset="-122"/>
                 <a:cs typeface="Segoe UI" pitchFamily="34" charset="-120"/>
               </a:rPr>
-              <a:t>🎯 Adaptive AI</a:t>
-            </a:r>
-            <a:endParaRPr lang="en-US" sz="1400" dirty="0"/>
-          </a:p>
-        </p:txBody>
-      </p:sp>
-      <p:sp>
-        <p:nvSpPr>
-          <p:cNvPr id="10" name="Text 8"/>
-          <p:cNvSpPr/>
-          <p:nvPr/>
-        </p:nvSpPr>
-        <p:spPr>
-          <a:xfrm>
-            <a:off x="731520" y="2880360"/>
-            <a:ext cx="1783080" cy="2514600"/>
+              <a:t>Adaptive AI</a:t>
+            </a:r>
+            <a:endParaRPr lang="en-US" sz="1500" dirty="0"/>
+          </a:p>
+        </p:txBody>
+      </p:sp>
+      <p:sp>
+        <p:nvSpPr>
+          <p:cNvPr id="11" name="Text 9"/>
+          <p:cNvSpPr/>
+          <p:nvPr/>
+        </p:nvSpPr>
+        <p:spPr>
+          <a:xfrm>
+            <a:off x="713232" y="4069080"/>
+            <a:ext cx="1773936" cy="1097280"/>
           </a:xfrm>
           <a:prstGeom prst="rect">
             <a:avLst/>
@@ -7116,11 +6670,11 @@
           <a:bodyPr wrap="square" rtlCol="0" anchor="t"/>
           <a:lstStyle/>
           <a:p>
-            <a:pPr indent="0" marL="0">
-              <a:buNone/>
-            </a:pPr>
-            <a:r>
-              <a:rPr lang="en-US" sz="1150" dirty="0">
+            <a:pPr algn="ctr" indent="0" marL="0">
+              <a:buNone/>
+            </a:pPr>
+            <a:r>
+              <a:rPr lang="en-US" sz="1200" dirty="0">
                 <a:solidFill>
                   <a:srgbClr val="1A1A2E"/>
                 </a:solidFill>
@@ -7128,26 +6682,26 @@
                 <a:ea typeface="Segoe UI" pitchFamily="34" charset="-122"/>
                 <a:cs typeface="Segoe UI" pitchFamily="34" charset="-120"/>
               </a:rPr>
-              <a:t>ML adjusts difficulty &amp; content in real time</a:t>
-            </a:r>
-            <a:endParaRPr lang="en-US" sz="1150" dirty="0"/>
-          </a:p>
-        </p:txBody>
-      </p:sp>
-      <p:sp>
-        <p:nvSpPr>
-          <p:cNvPr id="11" name="Shape 9"/>
-          <p:cNvSpPr/>
-          <p:nvPr/>
-        </p:nvSpPr>
-        <p:spPr>
-          <a:xfrm>
-            <a:off x="2788920" y="2377440"/>
-            <a:ext cx="2103120" cy="3108960"/>
+              <a:t>ML tunes difficulty &amp; content in real time</a:t>
+            </a:r>
+            <a:endParaRPr lang="en-US" sz="1200" dirty="0"/>
+          </a:p>
+        </p:txBody>
+      </p:sp>
+      <p:sp>
+        <p:nvSpPr>
+          <p:cNvPr id="12" name="Shape 10"/>
+          <p:cNvSpPr/>
+          <p:nvPr/>
+        </p:nvSpPr>
+        <p:spPr>
+          <a:xfrm>
+            <a:off x="2798064" y="2103120"/>
+            <a:ext cx="2103120" cy="3200400"/>
           </a:xfrm>
           <a:prstGeom prst="roundRect">
             <a:avLst>
-              <a:gd name="adj" fmla="val 3478"/>
+              <a:gd name="adj" fmla="val 4348"/>
             </a:avLst>
           </a:prstGeom>
           <a:solidFill>
@@ -7163,14 +6717,14 @@
       </p:sp>
       <p:sp>
         <p:nvSpPr>
-          <p:cNvPr id="12" name="Shape 10"/>
-          <p:cNvSpPr/>
-          <p:nvPr/>
-        </p:nvSpPr>
-        <p:spPr>
-          <a:xfrm>
-            <a:off x="2788920" y="2377440"/>
-            <a:ext cx="73152" cy="3108960"/>
+          <p:cNvPr id="13" name="Shape 11"/>
+          <p:cNvSpPr/>
+          <p:nvPr/>
+        </p:nvSpPr>
+        <p:spPr>
+          <a:xfrm>
+            <a:off x="2798064" y="2103120"/>
+            <a:ext cx="2103120" cy="109728"/>
           </a:xfrm>
           <a:prstGeom prst="rect">
             <a:avLst/>
@@ -7183,30 +6737,66 @@
       </p:sp>
       <p:sp>
         <p:nvSpPr>
-          <p:cNvPr id="13" name="Text 11"/>
-          <p:cNvSpPr/>
-          <p:nvPr/>
-        </p:nvSpPr>
-        <p:spPr>
-          <a:xfrm>
-            <a:off x="2971800" y="2487168"/>
-            <a:ext cx="1828800" cy="365760"/>
-          </a:xfrm>
-          <a:prstGeom prst="rect">
-            <a:avLst/>
-          </a:prstGeom>
-          <a:noFill/>
-          <a:ln/>
-        </p:spPr>
-        <p:txBody>
-          <a:bodyPr wrap="square" rtlCol="0" anchor="ctr"/>
-          <a:lstStyle/>
-          <a:p>
-            <a:pPr indent="0" marL="0">
-              <a:buNone/>
-            </a:pPr>
-            <a:r>
-              <a:rPr lang="en-US" sz="1400" b="1" dirty="0">
+          <p:cNvPr id="14" name="Text 12"/>
+          <p:cNvSpPr/>
+          <p:nvPr/>
+        </p:nvSpPr>
+        <p:spPr>
+          <a:xfrm>
+            <a:off x="2798064" y="2423160"/>
+            <a:ext cx="2103120" cy="914400"/>
+          </a:xfrm>
+          <a:prstGeom prst="rect">
+            <a:avLst/>
+          </a:prstGeom>
+          <a:noFill/>
+          <a:ln/>
+        </p:spPr>
+        <p:txBody>
+          <a:bodyPr wrap="square" rtlCol="0" anchor="ctr"/>
+          <a:lstStyle/>
+          <a:p>
+            <a:pPr algn="ctr" indent="0" marL="0">
+              <a:buNone/>
+            </a:pPr>
+            <a:r>
+              <a:rPr lang="en-US" sz="4600" dirty="0">
+                <a:solidFill>
+                  <a:srgbClr val="000000"/>
+                </a:solidFill>
+              </a:rPr>
+              <a:t>🏆</a:t>
+            </a:r>
+            <a:endParaRPr lang="en-US" sz="4600" dirty="0"/>
+          </a:p>
+        </p:txBody>
+      </p:sp>
+      <p:sp>
+        <p:nvSpPr>
+          <p:cNvPr id="15" name="Text 13"/>
+          <p:cNvSpPr/>
+          <p:nvPr/>
+        </p:nvSpPr>
+        <p:spPr>
+          <a:xfrm>
+            <a:off x="2889504" y="3474720"/>
+            <a:ext cx="1920240" cy="548640"/>
+          </a:xfrm>
+          <a:prstGeom prst="rect">
+            <a:avLst/>
+          </a:prstGeom>
+          <a:noFill/>
+          <a:ln/>
+        </p:spPr>
+        <p:txBody>
+          <a:bodyPr wrap="square" rtlCol="0" anchor="ctr"/>
+          <a:lstStyle/>
+          <a:p>
+            <a:pPr algn="ctr" indent="0" marL="0">
+              <a:buNone/>
+            </a:pPr>
+            <a:r>
+              <a:rPr lang="en-US" sz="1500" b="1" dirty="0">
                 <a:solidFill>
                   <a:srgbClr val="3F3D9E"/>
                 </a:solidFill>
@@ -7214,22 +6804,22 @@
                 <a:ea typeface="Segoe UI" pitchFamily="34" charset="-122"/>
                 <a:cs typeface="Segoe UI" pitchFamily="34" charset="-120"/>
               </a:rPr>
-              <a:t>🏆 Gamification</a:t>
-            </a:r>
-            <a:endParaRPr lang="en-US" sz="1400" dirty="0"/>
-          </a:p>
-        </p:txBody>
-      </p:sp>
-      <p:sp>
-        <p:nvSpPr>
-          <p:cNvPr id="14" name="Text 12"/>
-          <p:cNvSpPr/>
-          <p:nvPr/>
-        </p:nvSpPr>
-        <p:spPr>
-          <a:xfrm>
-            <a:off x="2971800" y="2880360"/>
-            <a:ext cx="1783080" cy="2514600"/>
+              <a:t>Gamification</a:t>
+            </a:r>
+            <a:endParaRPr lang="en-US" sz="1500" dirty="0"/>
+          </a:p>
+        </p:txBody>
+      </p:sp>
+      <p:sp>
+        <p:nvSpPr>
+          <p:cNvPr id="16" name="Text 14"/>
+          <p:cNvSpPr/>
+          <p:nvPr/>
+        </p:nvSpPr>
+        <p:spPr>
+          <a:xfrm>
+            <a:off x="2962656" y="4069080"/>
+            <a:ext cx="1773936" cy="1097280"/>
           </a:xfrm>
           <a:prstGeom prst="rect">
             <a:avLst/>
@@ -7241,11 +6831,11 @@
           <a:bodyPr wrap="square" rtlCol="0" anchor="t"/>
           <a:lstStyle/>
           <a:p>
-            <a:pPr indent="0" marL="0">
-              <a:buNone/>
-            </a:pPr>
-            <a:r>
-              <a:rPr lang="en-US" sz="1150" dirty="0">
+            <a:pPr algn="ctr" indent="0" marL="0">
+              <a:buNone/>
+            </a:pPr>
+            <a:r>
+              <a:rPr lang="en-US" sz="1200" dirty="0">
                 <a:solidFill>
                   <a:srgbClr val="1A1A2E"/>
                 </a:solidFill>
@@ -7255,24 +6845,24 @@
               </a:rPr>
               <a:t>XP, levels, badges, streaks &amp; leaderboards</a:t>
             </a:r>
-            <a:endParaRPr lang="en-US" sz="1150" dirty="0"/>
-          </a:p>
-        </p:txBody>
-      </p:sp>
-      <p:sp>
-        <p:nvSpPr>
-          <p:cNvPr id="15" name="Shape 13"/>
-          <p:cNvSpPr/>
-          <p:nvPr/>
-        </p:nvSpPr>
-        <p:spPr>
-          <a:xfrm>
-            <a:off x="5029200" y="2377440"/>
-            <a:ext cx="2103120" cy="3108960"/>
+            <a:endParaRPr lang="en-US" sz="1200" dirty="0"/>
+          </a:p>
+        </p:txBody>
+      </p:sp>
+      <p:sp>
+        <p:nvSpPr>
+          <p:cNvPr id="17" name="Shape 15"/>
+          <p:cNvSpPr/>
+          <p:nvPr/>
+        </p:nvSpPr>
+        <p:spPr>
+          <a:xfrm>
+            <a:off x="5047488" y="2103120"/>
+            <a:ext cx="2103120" cy="3200400"/>
           </a:xfrm>
           <a:prstGeom prst="roundRect">
             <a:avLst>
-              <a:gd name="adj" fmla="val 3478"/>
+              <a:gd name="adj" fmla="val 4348"/>
             </a:avLst>
           </a:prstGeom>
           <a:solidFill>
@@ -7288,14 +6878,14 @@
       </p:sp>
       <p:sp>
         <p:nvSpPr>
-          <p:cNvPr id="16" name="Shape 14"/>
-          <p:cNvSpPr/>
-          <p:nvPr/>
-        </p:nvSpPr>
-        <p:spPr>
-          <a:xfrm>
-            <a:off x="5029200" y="2377440"/>
-            <a:ext cx="73152" cy="3108960"/>
+          <p:cNvPr id="18" name="Shape 16"/>
+          <p:cNvSpPr/>
+          <p:nvPr/>
+        </p:nvSpPr>
+        <p:spPr>
+          <a:xfrm>
+            <a:off x="5047488" y="2103120"/>
+            <a:ext cx="2103120" cy="109728"/>
           </a:xfrm>
           <a:prstGeom prst="rect">
             <a:avLst/>
@@ -7308,30 +6898,66 @@
       </p:sp>
       <p:sp>
         <p:nvSpPr>
-          <p:cNvPr id="17" name="Text 15"/>
-          <p:cNvSpPr/>
-          <p:nvPr/>
-        </p:nvSpPr>
-        <p:spPr>
-          <a:xfrm>
-            <a:off x="5212080" y="2487168"/>
-            <a:ext cx="1828800" cy="365760"/>
-          </a:xfrm>
-          <a:prstGeom prst="rect">
-            <a:avLst/>
-          </a:prstGeom>
-          <a:noFill/>
-          <a:ln/>
-        </p:spPr>
-        <p:txBody>
-          <a:bodyPr wrap="square" rtlCol="0" anchor="ctr"/>
-          <a:lstStyle/>
-          <a:p>
-            <a:pPr indent="0" marL="0">
-              <a:buNone/>
-            </a:pPr>
-            <a:r>
-              <a:rPr lang="en-US" sz="1400" b="1" dirty="0">
+          <p:cNvPr id="19" name="Text 17"/>
+          <p:cNvSpPr/>
+          <p:nvPr/>
+        </p:nvSpPr>
+        <p:spPr>
+          <a:xfrm>
+            <a:off x="5047488" y="2423160"/>
+            <a:ext cx="2103120" cy="914400"/>
+          </a:xfrm>
+          <a:prstGeom prst="rect">
+            <a:avLst/>
+          </a:prstGeom>
+          <a:noFill/>
+          <a:ln/>
+        </p:spPr>
+        <p:txBody>
+          <a:bodyPr wrap="square" rtlCol="0" anchor="ctr"/>
+          <a:lstStyle/>
+          <a:p>
+            <a:pPr algn="ctr" indent="0" marL="0">
+              <a:buNone/>
+            </a:pPr>
+            <a:r>
+              <a:rPr lang="en-US" sz="4600" dirty="0">
+                <a:solidFill>
+                  <a:srgbClr val="000000"/>
+                </a:solidFill>
+              </a:rPr>
+              <a:t>🛡️</a:t>
+            </a:r>
+            <a:endParaRPr lang="en-US" sz="4600" dirty="0"/>
+          </a:p>
+        </p:txBody>
+      </p:sp>
+      <p:sp>
+        <p:nvSpPr>
+          <p:cNvPr id="20" name="Text 18"/>
+          <p:cNvSpPr/>
+          <p:nvPr/>
+        </p:nvSpPr>
+        <p:spPr>
+          <a:xfrm>
+            <a:off x="5138928" y="3474720"/>
+            <a:ext cx="1920240" cy="548640"/>
+          </a:xfrm>
+          <a:prstGeom prst="rect">
+            <a:avLst/>
+          </a:prstGeom>
+          <a:noFill/>
+          <a:ln/>
+        </p:spPr>
+        <p:txBody>
+          <a:bodyPr wrap="square" rtlCol="0" anchor="ctr"/>
+          <a:lstStyle/>
+          <a:p>
+            <a:pPr algn="ctr" indent="0" marL="0">
+              <a:buNone/>
+            </a:pPr>
+            <a:r>
+              <a:rPr lang="en-US" sz="1500" b="1" dirty="0">
                 <a:solidFill>
                   <a:srgbClr val="6C63FF"/>
                 </a:solidFill>
@@ -7339,22 +6965,22 @@
                 <a:ea typeface="Segoe UI" pitchFamily="34" charset="-122"/>
                 <a:cs typeface="Segoe UI" pitchFamily="34" charset="-120"/>
               </a:rPr>
-              <a:t>🛡️ Parent Control</a:t>
-            </a:r>
-            <a:endParaRPr lang="en-US" sz="1400" dirty="0"/>
-          </a:p>
-        </p:txBody>
-      </p:sp>
-      <p:sp>
-        <p:nvSpPr>
-          <p:cNvPr id="18" name="Text 16"/>
-          <p:cNvSpPr/>
-          <p:nvPr/>
-        </p:nvSpPr>
-        <p:spPr>
-          <a:xfrm>
-            <a:off x="5212080" y="2880360"/>
-            <a:ext cx="1783080" cy="2514600"/>
+              <a:t>Parent Control</a:t>
+            </a:r>
+            <a:endParaRPr lang="en-US" sz="1500" dirty="0"/>
+          </a:p>
+        </p:txBody>
+      </p:sp>
+      <p:sp>
+        <p:nvSpPr>
+          <p:cNvPr id="21" name="Text 19"/>
+          <p:cNvSpPr/>
+          <p:nvPr/>
+        </p:nvSpPr>
+        <p:spPr>
+          <a:xfrm>
+            <a:off x="5212080" y="4069080"/>
+            <a:ext cx="1773936" cy="1097280"/>
           </a:xfrm>
           <a:prstGeom prst="rect">
             <a:avLst/>
@@ -7366,11 +6992,11 @@
           <a:bodyPr wrap="square" rtlCol="0" anchor="t"/>
           <a:lstStyle/>
           <a:p>
-            <a:pPr indent="0" marL="0">
-              <a:buNone/>
-            </a:pPr>
-            <a:r>
-              <a:rPr lang="en-US" sz="1150" dirty="0">
+            <a:pPr algn="ctr" indent="0" marL="0">
+              <a:buNone/>
+            </a:pPr>
+            <a:r>
+              <a:rPr lang="en-US" sz="1200" dirty="0">
                 <a:solidFill>
                   <a:srgbClr val="1A1A2E"/>
                 </a:solidFill>
@@ -7380,24 +7006,24 @@
               </a:rPr>
               <a:t>Consent, screen-time &amp; content oversight</a:t>
             </a:r>
-            <a:endParaRPr lang="en-US" sz="1150" dirty="0"/>
-          </a:p>
-        </p:txBody>
-      </p:sp>
-      <p:sp>
-        <p:nvSpPr>
-          <p:cNvPr id="19" name="Shape 17"/>
-          <p:cNvSpPr/>
-          <p:nvPr/>
-        </p:nvSpPr>
-        <p:spPr>
-          <a:xfrm>
-            <a:off x="7269480" y="2377440"/>
-            <a:ext cx="2103120" cy="3108960"/>
+            <a:endParaRPr lang="en-US" sz="1200" dirty="0"/>
+          </a:p>
+        </p:txBody>
+      </p:sp>
+      <p:sp>
+        <p:nvSpPr>
+          <p:cNvPr id="22" name="Shape 20"/>
+          <p:cNvSpPr/>
+          <p:nvPr/>
+        </p:nvSpPr>
+        <p:spPr>
+          <a:xfrm>
+            <a:off x="7296912" y="2103120"/>
+            <a:ext cx="2103120" cy="3200400"/>
           </a:xfrm>
           <a:prstGeom prst="roundRect">
             <a:avLst>
-              <a:gd name="adj" fmla="val 3478"/>
+              <a:gd name="adj" fmla="val 4348"/>
             </a:avLst>
           </a:prstGeom>
           <a:solidFill>
@@ -7413,14 +7039,14 @@
       </p:sp>
       <p:sp>
         <p:nvSpPr>
-          <p:cNvPr id="20" name="Shape 18"/>
-          <p:cNvSpPr/>
-          <p:nvPr/>
-        </p:nvSpPr>
-        <p:spPr>
-          <a:xfrm>
-            <a:off x="7269480" y="2377440"/>
-            <a:ext cx="73152" cy="3108960"/>
+          <p:cNvPr id="23" name="Shape 21"/>
+          <p:cNvSpPr/>
+          <p:nvPr/>
+        </p:nvSpPr>
+        <p:spPr>
+          <a:xfrm>
+            <a:off x="7296912" y="2103120"/>
+            <a:ext cx="2103120" cy="109728"/>
           </a:xfrm>
           <a:prstGeom prst="rect">
             <a:avLst/>
@@ -7433,30 +7059,66 @@
       </p:sp>
       <p:sp>
         <p:nvSpPr>
-          <p:cNvPr id="21" name="Text 19"/>
-          <p:cNvSpPr/>
-          <p:nvPr/>
-        </p:nvSpPr>
-        <p:spPr>
-          <a:xfrm>
-            <a:off x="7452360" y="2487168"/>
-            <a:ext cx="1828800" cy="365760"/>
-          </a:xfrm>
-          <a:prstGeom prst="rect">
-            <a:avLst/>
-          </a:prstGeom>
-          <a:noFill/>
-          <a:ln/>
-        </p:spPr>
-        <p:txBody>
-          <a:bodyPr wrap="square" rtlCol="0" anchor="ctr"/>
-          <a:lstStyle/>
-          <a:p>
-            <a:pPr indent="0" marL="0">
-              <a:buNone/>
-            </a:pPr>
-            <a:r>
-              <a:rPr lang="en-US" sz="1400" b="1" dirty="0">
+          <p:cNvPr id="24" name="Text 22"/>
+          <p:cNvSpPr/>
+          <p:nvPr/>
+        </p:nvSpPr>
+        <p:spPr>
+          <a:xfrm>
+            <a:off x="7296912" y="2423160"/>
+            <a:ext cx="2103120" cy="914400"/>
+          </a:xfrm>
+          <a:prstGeom prst="rect">
+            <a:avLst/>
+          </a:prstGeom>
+          <a:noFill/>
+          <a:ln/>
+        </p:spPr>
+        <p:txBody>
+          <a:bodyPr wrap="square" rtlCol="0" anchor="ctr"/>
+          <a:lstStyle/>
+          <a:p>
+            <a:pPr algn="ctr" indent="0" marL="0">
+              <a:buNone/>
+            </a:pPr>
+            <a:r>
+              <a:rPr lang="en-US" sz="4600" dirty="0">
+                <a:solidFill>
+                  <a:srgbClr val="000000"/>
+                </a:solidFill>
+              </a:rPr>
+              <a:t>👩‍🏫</a:t>
+            </a:r>
+            <a:endParaRPr lang="en-US" sz="4600" dirty="0"/>
+          </a:p>
+        </p:txBody>
+      </p:sp>
+      <p:sp>
+        <p:nvSpPr>
+          <p:cNvPr id="25" name="Text 23"/>
+          <p:cNvSpPr/>
+          <p:nvPr/>
+        </p:nvSpPr>
+        <p:spPr>
+          <a:xfrm>
+            <a:off x="7388352" y="3474720"/>
+            <a:ext cx="1920240" cy="548640"/>
+          </a:xfrm>
+          <a:prstGeom prst="rect">
+            <a:avLst/>
+          </a:prstGeom>
+          <a:noFill/>
+          <a:ln/>
+        </p:spPr>
+        <p:txBody>
+          <a:bodyPr wrap="square" rtlCol="0" anchor="ctr"/>
+          <a:lstStyle/>
+          <a:p>
+            <a:pPr algn="ctr" indent="0" marL="0">
+              <a:buNone/>
+            </a:pPr>
+            <a:r>
+              <a:rPr lang="en-US" sz="1500" b="1" dirty="0">
                 <a:solidFill>
                   <a:srgbClr val="3F3D9E"/>
                 </a:solidFill>
@@ -7464,22 +7126,22 @@
                 <a:ea typeface="Segoe UI" pitchFamily="34" charset="-122"/>
                 <a:cs typeface="Segoe UI" pitchFamily="34" charset="-120"/>
               </a:rPr>
-              <a:t>👩‍🏫 Teacher Tools</a:t>
-            </a:r>
-            <a:endParaRPr lang="en-US" sz="1400" dirty="0"/>
-          </a:p>
-        </p:txBody>
-      </p:sp>
-      <p:sp>
-        <p:nvSpPr>
-          <p:cNvPr id="22" name="Text 20"/>
-          <p:cNvSpPr/>
-          <p:nvPr/>
-        </p:nvSpPr>
-        <p:spPr>
-          <a:xfrm>
-            <a:off x="7452360" y="2880360"/>
-            <a:ext cx="1783080" cy="2514600"/>
+              <a:t>Teacher Tools</a:t>
+            </a:r>
+            <a:endParaRPr lang="en-US" sz="1500" dirty="0"/>
+          </a:p>
+        </p:txBody>
+      </p:sp>
+      <p:sp>
+        <p:nvSpPr>
+          <p:cNvPr id="26" name="Text 24"/>
+          <p:cNvSpPr/>
+          <p:nvPr/>
+        </p:nvSpPr>
+        <p:spPr>
+          <a:xfrm>
+            <a:off x="7461504" y="4069080"/>
+            <a:ext cx="1773936" cy="1097280"/>
           </a:xfrm>
           <a:prstGeom prst="rect">
             <a:avLst/>
@@ -7491,11 +7153,11 @@
           <a:bodyPr wrap="square" rtlCol="0" anchor="t"/>
           <a:lstStyle/>
           <a:p>
-            <a:pPr indent="0" marL="0">
-              <a:buNone/>
-            </a:pPr>
-            <a:r>
-              <a:rPr lang="en-US" sz="1150" dirty="0">
+            <a:pPr algn="ctr" indent="0" marL="0">
+              <a:buNone/>
+            </a:pPr>
+            <a:r>
+              <a:rPr lang="en-US" sz="1200" dirty="0">
                 <a:solidFill>
                   <a:srgbClr val="1A1A2E"/>
                 </a:solidFill>
@@ -7505,24 +7167,24 @@
               </a:rPr>
               <a:t>Classrooms, lessons &amp; progress tracking</a:t>
             </a:r>
-            <a:endParaRPr lang="en-US" sz="1150" dirty="0"/>
-          </a:p>
-        </p:txBody>
-      </p:sp>
-      <p:sp>
-        <p:nvSpPr>
-          <p:cNvPr id="23" name="Shape 21"/>
-          <p:cNvSpPr/>
-          <p:nvPr/>
-        </p:nvSpPr>
-        <p:spPr>
-          <a:xfrm>
-            <a:off x="9509760" y="2377440"/>
-            <a:ext cx="2103120" cy="3108960"/>
+            <a:endParaRPr lang="en-US" sz="1200" dirty="0"/>
+          </a:p>
+        </p:txBody>
+      </p:sp>
+      <p:sp>
+        <p:nvSpPr>
+          <p:cNvPr id="27" name="Shape 25"/>
+          <p:cNvSpPr/>
+          <p:nvPr/>
+        </p:nvSpPr>
+        <p:spPr>
+          <a:xfrm>
+            <a:off x="9546336" y="2103120"/>
+            <a:ext cx="2103120" cy="3200400"/>
           </a:xfrm>
           <a:prstGeom prst="roundRect">
             <a:avLst>
-              <a:gd name="adj" fmla="val 3478"/>
+              <a:gd name="adj" fmla="val 4348"/>
             </a:avLst>
           </a:prstGeom>
           <a:solidFill>
@@ -7538,14 +7200,14 @@
       </p:sp>
       <p:sp>
         <p:nvSpPr>
-          <p:cNvPr id="24" name="Shape 22"/>
-          <p:cNvSpPr/>
-          <p:nvPr/>
-        </p:nvSpPr>
-        <p:spPr>
-          <a:xfrm>
-            <a:off x="9509760" y="2377440"/>
-            <a:ext cx="73152" cy="3108960"/>
+          <p:cNvPr id="28" name="Shape 26"/>
+          <p:cNvSpPr/>
+          <p:nvPr/>
+        </p:nvSpPr>
+        <p:spPr>
+          <a:xfrm>
+            <a:off x="9546336" y="2103120"/>
+            <a:ext cx="2103120" cy="109728"/>
           </a:xfrm>
           <a:prstGeom prst="rect">
             <a:avLst/>
@@ -7558,30 +7220,66 @@
       </p:sp>
       <p:sp>
         <p:nvSpPr>
-          <p:cNvPr id="25" name="Text 23"/>
-          <p:cNvSpPr/>
-          <p:nvPr/>
-        </p:nvSpPr>
-        <p:spPr>
-          <a:xfrm>
-            <a:off x="9692640" y="2487168"/>
-            <a:ext cx="1828800" cy="365760"/>
-          </a:xfrm>
-          <a:prstGeom prst="rect">
-            <a:avLst/>
-          </a:prstGeom>
-          <a:noFill/>
-          <a:ln/>
-        </p:spPr>
-        <p:txBody>
-          <a:bodyPr wrap="square" rtlCol="0" anchor="ctr"/>
-          <a:lstStyle/>
-          <a:p>
-            <a:pPr indent="0" marL="0">
-              <a:buNone/>
-            </a:pPr>
-            <a:r>
-              <a:rPr lang="en-US" sz="1400" b="1" dirty="0">
+          <p:cNvPr id="29" name="Text 27"/>
+          <p:cNvSpPr/>
+          <p:nvPr/>
+        </p:nvSpPr>
+        <p:spPr>
+          <a:xfrm>
+            <a:off x="9546336" y="2423160"/>
+            <a:ext cx="2103120" cy="914400"/>
+          </a:xfrm>
+          <a:prstGeom prst="rect">
+            <a:avLst/>
+          </a:prstGeom>
+          <a:noFill/>
+          <a:ln/>
+        </p:spPr>
+        <p:txBody>
+          <a:bodyPr wrap="square" rtlCol="0" anchor="ctr"/>
+          <a:lstStyle/>
+          <a:p>
+            <a:pPr algn="ctr" indent="0" marL="0">
+              <a:buNone/>
+            </a:pPr>
+            <a:r>
+              <a:rPr lang="en-US" sz="4600" dirty="0">
+                <a:solidFill>
+                  <a:srgbClr val="000000"/>
+                </a:solidFill>
+              </a:rPr>
+              <a:t>🤖</a:t>
+            </a:r>
+            <a:endParaRPr lang="en-US" sz="4600" dirty="0"/>
+          </a:p>
+        </p:txBody>
+      </p:sp>
+      <p:sp>
+        <p:nvSpPr>
+          <p:cNvPr id="30" name="Text 28"/>
+          <p:cNvSpPr/>
+          <p:nvPr/>
+        </p:nvSpPr>
+        <p:spPr>
+          <a:xfrm>
+            <a:off x="9637776" y="3474720"/>
+            <a:ext cx="1920240" cy="548640"/>
+          </a:xfrm>
+          <a:prstGeom prst="rect">
+            <a:avLst/>
+          </a:prstGeom>
+          <a:noFill/>
+          <a:ln/>
+        </p:spPr>
+        <p:txBody>
+          <a:bodyPr wrap="square" rtlCol="0" anchor="ctr"/>
+          <a:lstStyle/>
+          <a:p>
+            <a:pPr algn="ctr" indent="0" marL="0">
+              <a:buNone/>
+            </a:pPr>
+            <a:r>
+              <a:rPr lang="en-US" sz="1500" b="1" dirty="0">
                 <a:solidFill>
                   <a:srgbClr val="6C63FF"/>
                 </a:solidFill>
@@ -7589,22 +7287,22 @@
                 <a:ea typeface="Segoe UI" pitchFamily="34" charset="-122"/>
                 <a:cs typeface="Segoe UI" pitchFamily="34" charset="-120"/>
               </a:rPr>
-              <a:t>🤖 Agentic AI</a:t>
-            </a:r>
-            <a:endParaRPr lang="en-US" sz="1400" dirty="0"/>
-          </a:p>
-        </p:txBody>
-      </p:sp>
-      <p:sp>
-        <p:nvSpPr>
-          <p:cNvPr id="26" name="Text 24"/>
-          <p:cNvSpPr/>
-          <p:nvPr/>
-        </p:nvSpPr>
-        <p:spPr>
-          <a:xfrm>
-            <a:off x="9692640" y="2880360"/>
-            <a:ext cx="1783080" cy="2514600"/>
+              <a:t>Agentic AI</a:t>
+            </a:r>
+            <a:endParaRPr lang="en-US" sz="1500" dirty="0"/>
+          </a:p>
+        </p:txBody>
+      </p:sp>
+      <p:sp>
+        <p:nvSpPr>
+          <p:cNvPr id="31" name="Text 29"/>
+          <p:cNvSpPr/>
+          <p:nvPr/>
+        </p:nvSpPr>
+        <p:spPr>
+          <a:xfrm>
+            <a:off x="9710928" y="4069080"/>
+            <a:ext cx="1773936" cy="1097280"/>
           </a:xfrm>
           <a:prstGeom prst="rect">
             <a:avLst/>
@@ -7616,11 +7314,11 @@
           <a:bodyPr wrap="square" rtlCol="0" anchor="t"/>
           <a:lstStyle/>
           <a:p>
-            <a:pPr indent="0" marL="0">
-              <a:buNone/>
-            </a:pPr>
-            <a:r>
-              <a:rPr lang="en-US" sz="1150" dirty="0">
+            <a:pPr algn="ctr" indent="0" marL="0">
+              <a:buNone/>
+            </a:pPr>
+            <a:r>
+              <a:rPr lang="en-US" sz="1200" dirty="0">
                 <a:solidFill>
                   <a:srgbClr val="1A1A2E"/>
                 </a:solidFill>
@@ -7628,15 +7326,15 @@
                 <a:ea typeface="Segoe UI" pitchFamily="34" charset="-122"/>
                 <a:cs typeface="Segoe UI" pitchFamily="34" charset="-120"/>
               </a:rPr>
-              <a:t>Autonomous agents observe → act → learn</a:t>
-            </a:r>
-            <a:endParaRPr lang="en-US" sz="1150" dirty="0"/>
-          </a:p>
-        </p:txBody>
-      </p:sp>
-      <p:sp>
-        <p:nvSpPr>
-          <p:cNvPr id="27" name="Text 25"/>
+              <a:t>Autonomous agents: observe → act → learn</a:t>
+            </a:r>
+            <a:endParaRPr lang="en-US" sz="1200" dirty="0"/>
+          </a:p>
+        </p:txBody>
+      </p:sp>
+      <p:sp>
+        <p:nvSpPr>
+          <p:cNvPr id="32" name="Text 30"/>
           <p:cNvSpPr/>
           <p:nvPr/>
         </p:nvSpPr>
@@ -7675,7 +7373,7 @@
       </p:sp>
       <p:sp>
         <p:nvSpPr>
-          <p:cNvPr id="28" name="Text 26"/>
+          <p:cNvPr id="33" name="Text 31"/>
           <p:cNvSpPr/>
           <p:nvPr/>
         </p:nvSpPr>
@@ -7717,6 +7415,9 @@
   <p:clrMapOvr>
     <a:masterClrMapping/>
   </p:clrMapOvr>
+  <p:transition xmlns:p="http://schemas.openxmlformats.org/presentationml/2006/main" spd="med">
+    <p:fade/>
+  </p:transition>
 </p:sld>
 </file>
 
@@ -7853,7 +7554,7 @@
         <p:spPr>
           <a:xfrm>
             <a:off x="1298448" y="1097280"/>
-            <a:ext cx="2011680" cy="54864"/>
+            <a:ext cx="1828800" cy="45720"/>
           </a:xfrm>
           <a:prstGeom prst="rect">
             <a:avLst/>
@@ -7872,12 +7573,12 @@
         </p:nvSpPr>
         <p:spPr>
           <a:xfrm>
-            <a:off x="548640" y="1463040"/>
-            <a:ext cx="3566160" cy="2103120"/>
+            <a:off x="548640" y="1508760"/>
+            <a:ext cx="3566160" cy="1554480"/>
           </a:xfrm>
           <a:prstGeom prst="roundRect">
             <a:avLst>
-              <a:gd name="adj" fmla="val 3478"/>
+              <a:gd name="adj" fmla="val 4706"/>
             </a:avLst>
           </a:prstGeom>
           <a:solidFill>
@@ -7899,8 +7600,8 @@
         </p:nvSpPr>
         <p:spPr>
           <a:xfrm>
-            <a:off x="548640" y="1463040"/>
-            <a:ext cx="73152" cy="2103120"/>
+            <a:off x="548640" y="1508760"/>
+            <a:ext cx="73152" cy="1554480"/>
           </a:xfrm>
           <a:prstGeom prst="rect">
             <a:avLst/>
@@ -7919,8 +7620,8 @@
         </p:nvSpPr>
         <p:spPr>
           <a:xfrm>
-            <a:off x="731520" y="1572768"/>
-            <a:ext cx="3291840" cy="365760"/>
+            <a:off x="749808" y="1600200"/>
+            <a:ext cx="3236976" cy="1371600"/>
           </a:xfrm>
           <a:prstGeom prst="rect">
             <a:avLst/>
@@ -7933,10 +7634,13 @@
           <a:lstStyle/>
           <a:p>
             <a:pPr indent="0" marL="0">
-              <a:buNone/>
-            </a:pPr>
-            <a:r>
-              <a:rPr lang="en-US" sz="1400" b="1" dirty="0">
+              <a:lnSpc>
+                <a:spcPct val="105000"/>
+              </a:lnSpc>
+              <a:buNone/>
+            </a:pPr>
+            <a:r>
+              <a:rPr lang="en-US" sz="1350" b="1" dirty="0">
                 <a:solidFill>
                   <a:srgbClr val="6C63FF"/>
                 </a:solidFill>
@@ -7944,34 +7648,16 @@
                 <a:ea typeface="Segoe UI" pitchFamily="34" charset="-122"/>
                 <a:cs typeface="Segoe UI" pitchFamily="34" charset="-120"/>
               </a:rPr>
-              <a:t>📚 Adaptive Quizzes</a:t>
-            </a:r>
-            <a:endParaRPr lang="en-US" sz="1400" dirty="0"/>
-          </a:p>
-        </p:txBody>
-      </p:sp>
-      <p:sp>
-        <p:nvSpPr>
-          <p:cNvPr id="9" name="Text 7"/>
-          <p:cNvSpPr/>
-          <p:nvPr/>
-        </p:nvSpPr>
-        <p:spPr>
-          <a:xfrm>
-            <a:off x="731520" y="1965960"/>
-            <a:ext cx="3246120" cy="1508760"/>
-          </a:xfrm>
-          <a:prstGeom prst="rect">
-            <a:avLst/>
-          </a:prstGeom>
-          <a:noFill/>
-          <a:ln/>
-        </p:spPr>
-        <p:txBody>
-          <a:bodyPr wrap="square" rtlCol="0" anchor="t"/>
-          <a:lstStyle/>
+              <a:t>📚 Adaptive Quizzes
+</a:t>
+            </a:r>
+            <a:endParaRPr lang="en-US" sz="1350" dirty="0"/>
+          </a:p>
           <a:p>
             <a:pPr indent="0" marL="0">
+              <a:lnSpc>
+                <a:spcPct val="105000"/>
+              </a:lnSpc>
               <a:buNone/>
             </a:pPr>
             <a:r>
@@ -7983,26 +7669,26 @@
                 <a:ea typeface="Segoe UI" pitchFamily="34" charset="-122"/>
                 <a:cs typeface="Segoe UI" pitchFamily="34" charset="-120"/>
               </a:rPr>
-              <a:t>AI-generated, difficulty scales with score</a:t>
-            </a:r>
-            <a:endParaRPr lang="en-US" sz="1150" dirty="0"/>
-          </a:p>
-        </p:txBody>
-      </p:sp>
-      <p:sp>
-        <p:nvSpPr>
-          <p:cNvPr id="10" name="Shape 8"/>
-          <p:cNvSpPr/>
-          <p:nvPr/>
-        </p:nvSpPr>
-        <p:spPr>
-          <a:xfrm>
-            <a:off x="4297680" y="1463040"/>
-            <a:ext cx="3566160" cy="2103120"/>
+              <a:t>AI-generated; difficulty scales with score</a:t>
+            </a:r>
+            <a:endParaRPr lang="en-US" sz="1350" dirty="0"/>
+          </a:p>
+        </p:txBody>
+      </p:sp>
+      <p:sp>
+        <p:nvSpPr>
+          <p:cNvPr id="9" name="Shape 7"/>
+          <p:cNvSpPr/>
+          <p:nvPr/>
+        </p:nvSpPr>
+        <p:spPr>
+          <a:xfrm>
+            <a:off x="4297680" y="1508760"/>
+            <a:ext cx="3566160" cy="1554480"/>
           </a:xfrm>
           <a:prstGeom prst="roundRect">
             <a:avLst>
-              <a:gd name="adj" fmla="val 3478"/>
+              <a:gd name="adj" fmla="val 4706"/>
             </a:avLst>
           </a:prstGeom>
           <a:solidFill>
@@ -8018,14 +7704,14 @@
       </p:sp>
       <p:sp>
         <p:nvSpPr>
-          <p:cNvPr id="11" name="Shape 9"/>
-          <p:cNvSpPr/>
-          <p:nvPr/>
-        </p:nvSpPr>
-        <p:spPr>
-          <a:xfrm>
-            <a:off x="4297680" y="1463040"/>
-            <a:ext cx="73152" cy="2103120"/>
+          <p:cNvPr id="10" name="Shape 8"/>
+          <p:cNvSpPr/>
+          <p:nvPr/>
+        </p:nvSpPr>
+        <p:spPr>
+          <a:xfrm>
+            <a:off x="4297680" y="1508760"/>
+            <a:ext cx="73152" cy="1554480"/>
           </a:xfrm>
           <a:prstGeom prst="rect">
             <a:avLst/>
@@ -8038,14 +7724,14 @@
       </p:sp>
       <p:sp>
         <p:nvSpPr>
-          <p:cNvPr id="12" name="Text 10"/>
-          <p:cNvSpPr/>
-          <p:nvPr/>
-        </p:nvSpPr>
-        <p:spPr>
-          <a:xfrm>
-            <a:off x="4480560" y="1572768"/>
-            <a:ext cx="3291840" cy="365760"/>
+          <p:cNvPr id="11" name="Text 9"/>
+          <p:cNvSpPr/>
+          <p:nvPr/>
+        </p:nvSpPr>
+        <p:spPr>
+          <a:xfrm>
+            <a:off x="4498848" y="1600200"/>
+            <a:ext cx="3236976" cy="1371600"/>
           </a:xfrm>
           <a:prstGeom prst="rect">
             <a:avLst/>
@@ -8058,10 +7744,13 @@
           <a:lstStyle/>
           <a:p>
             <a:pPr indent="0" marL="0">
-              <a:buNone/>
-            </a:pPr>
-            <a:r>
-              <a:rPr lang="en-US" sz="1400" b="1" dirty="0">
+              <a:lnSpc>
+                <a:spcPct val="105000"/>
+              </a:lnSpc>
+              <a:buNone/>
+            </a:pPr>
+            <a:r>
+              <a:rPr lang="en-US" sz="1350" b="1" dirty="0">
                 <a:solidFill>
                   <a:srgbClr val="3F3D9E"/>
                 </a:solidFill>
@@ -8069,34 +7758,16 @@
                 <a:ea typeface="Segoe UI" pitchFamily="34" charset="-122"/>
                 <a:cs typeface="Segoe UI" pitchFamily="34" charset="-120"/>
               </a:rPr>
-              <a:t>💬 AI Tutor</a:t>
-            </a:r>
-            <a:endParaRPr lang="en-US" sz="1400" dirty="0"/>
-          </a:p>
-        </p:txBody>
-      </p:sp>
-      <p:sp>
-        <p:nvSpPr>
-          <p:cNvPr id="13" name="Text 11"/>
-          <p:cNvSpPr/>
-          <p:nvPr/>
-        </p:nvSpPr>
-        <p:spPr>
-          <a:xfrm>
-            <a:off x="4480560" y="1965960"/>
-            <a:ext cx="3246120" cy="1508760"/>
-          </a:xfrm>
-          <a:prstGeom prst="rect">
-            <a:avLst/>
-          </a:prstGeom>
-          <a:noFill/>
-          <a:ln/>
-        </p:spPr>
-        <p:txBody>
-          <a:bodyPr wrap="square" rtlCol="0" anchor="t"/>
-          <a:lstStyle/>
+              <a:t>💬 AI Tutor
+</a:t>
+            </a:r>
+            <a:endParaRPr lang="en-US" sz="1350" dirty="0"/>
+          </a:p>
           <a:p>
             <a:pPr indent="0" marL="0">
+              <a:lnSpc>
+                <a:spcPct val="105000"/>
+              </a:lnSpc>
               <a:buNone/>
             </a:pPr>
             <a:r>
@@ -8110,24 +7781,24 @@
               </a:rPr>
               <a:t>Multi-session, step-by-step, age-tuned</a:t>
             </a:r>
-            <a:endParaRPr lang="en-US" sz="1150" dirty="0"/>
-          </a:p>
-        </p:txBody>
-      </p:sp>
-      <p:sp>
-        <p:nvSpPr>
-          <p:cNvPr id="14" name="Shape 12"/>
-          <p:cNvSpPr/>
-          <p:nvPr/>
-        </p:nvSpPr>
-        <p:spPr>
-          <a:xfrm>
-            <a:off x="8046720" y="1463040"/>
-            <a:ext cx="3566160" cy="2103120"/>
+            <a:endParaRPr lang="en-US" sz="1350" dirty="0"/>
+          </a:p>
+        </p:txBody>
+      </p:sp>
+      <p:sp>
+        <p:nvSpPr>
+          <p:cNvPr id="12" name="Shape 10"/>
+          <p:cNvSpPr/>
+          <p:nvPr/>
+        </p:nvSpPr>
+        <p:spPr>
+          <a:xfrm>
+            <a:off x="8046720" y="1508760"/>
+            <a:ext cx="3566160" cy="1554480"/>
           </a:xfrm>
           <a:prstGeom prst="roundRect">
             <a:avLst>
-              <a:gd name="adj" fmla="val 3478"/>
+              <a:gd name="adj" fmla="val 4706"/>
             </a:avLst>
           </a:prstGeom>
           <a:solidFill>
@@ -8143,116 +7814,101 @@
       </p:sp>
       <p:sp>
         <p:nvSpPr>
+          <p:cNvPr id="13" name="Shape 11"/>
+          <p:cNvSpPr/>
+          <p:nvPr/>
+        </p:nvSpPr>
+        <p:spPr>
+          <a:xfrm>
+            <a:off x="8046720" y="1508760"/>
+            <a:ext cx="73152" cy="1554480"/>
+          </a:xfrm>
+          <a:prstGeom prst="rect">
+            <a:avLst/>
+          </a:prstGeom>
+          <a:solidFill>
+            <a:srgbClr val="6C63FF"/>
+          </a:solidFill>
+          <a:ln/>
+        </p:spPr>
+      </p:sp>
+      <p:sp>
+        <p:nvSpPr>
+          <p:cNvPr id="14" name="Text 12"/>
+          <p:cNvSpPr/>
+          <p:nvPr/>
+        </p:nvSpPr>
+        <p:spPr>
+          <a:xfrm>
+            <a:off x="8247888" y="1600200"/>
+            <a:ext cx="3236976" cy="1371600"/>
+          </a:xfrm>
+          <a:prstGeom prst="rect">
+            <a:avLst/>
+          </a:prstGeom>
+          <a:noFill/>
+          <a:ln/>
+        </p:spPr>
+        <p:txBody>
+          <a:bodyPr wrap="square" rtlCol="0" anchor="ctr"/>
+          <a:lstStyle/>
+          <a:p>
+            <a:pPr indent="0" marL="0">
+              <a:lnSpc>
+                <a:spcPct val="105000"/>
+              </a:lnSpc>
+              <a:buNone/>
+            </a:pPr>
+            <a:r>
+              <a:rPr lang="en-US" sz="1350" b="1" dirty="0">
+                <a:solidFill>
+                  <a:srgbClr val="6C63FF"/>
+                </a:solidFill>
+                <a:latin typeface="Segoe UI" pitchFamily="34" charset="0"/>
+                <a:ea typeface="Segoe UI" pitchFamily="34" charset="-122"/>
+                <a:cs typeface="Segoe UI" pitchFamily="34" charset="-120"/>
+              </a:rPr>
+              <a:t>🎮 AI Games
+</a:t>
+            </a:r>
+            <a:endParaRPr lang="en-US" sz="1350" dirty="0"/>
+          </a:p>
+          <a:p>
+            <a:pPr indent="0" marL="0">
+              <a:lnSpc>
+                <a:spcPct val="105000"/>
+              </a:lnSpc>
+              <a:buNone/>
+            </a:pPr>
+            <a:r>
+              <a:rPr lang="en-US" sz="1150" dirty="0">
+                <a:solidFill>
+                  <a:srgbClr val="1A1A2E"/>
+                </a:solidFill>
+                <a:latin typeface="Segoe UI" pitchFamily="34" charset="0"/>
+                <a:ea typeface="Segoe UI" pitchFamily="34" charset="-122"/>
+                <a:cs typeface="Segoe UI" pitchFamily="34" charset="-120"/>
+              </a:rPr>
+              <a:t>Word, story &amp; math challenges</a:t>
+            </a:r>
+            <a:endParaRPr lang="en-US" sz="1350" dirty="0"/>
+          </a:p>
+        </p:txBody>
+      </p:sp>
+      <p:sp>
+        <p:nvSpPr>
           <p:cNvPr id="15" name="Shape 13"/>
           <p:cNvSpPr/>
           <p:nvPr/>
         </p:nvSpPr>
         <p:spPr>
           <a:xfrm>
-            <a:off x="8046720" y="1463040"/>
-            <a:ext cx="73152" cy="2103120"/>
-          </a:xfrm>
-          <a:prstGeom prst="rect">
-            <a:avLst/>
-          </a:prstGeom>
-          <a:solidFill>
-            <a:srgbClr val="6C63FF"/>
-          </a:solidFill>
-          <a:ln/>
-        </p:spPr>
-      </p:sp>
-      <p:sp>
-        <p:nvSpPr>
-          <p:cNvPr id="16" name="Text 14"/>
-          <p:cNvSpPr/>
-          <p:nvPr/>
-        </p:nvSpPr>
-        <p:spPr>
-          <a:xfrm>
-            <a:off x="8229600" y="1572768"/>
-            <a:ext cx="3291840" cy="365760"/>
-          </a:xfrm>
-          <a:prstGeom prst="rect">
-            <a:avLst/>
-          </a:prstGeom>
-          <a:noFill/>
-          <a:ln/>
-        </p:spPr>
-        <p:txBody>
-          <a:bodyPr wrap="square" rtlCol="0" anchor="ctr"/>
-          <a:lstStyle/>
-          <a:p>
-            <a:pPr indent="0" marL="0">
-              <a:buNone/>
-            </a:pPr>
-            <a:r>
-              <a:rPr lang="en-US" sz="1400" b="1" dirty="0">
-                <a:solidFill>
-                  <a:srgbClr val="6C63FF"/>
-                </a:solidFill>
-                <a:latin typeface="Segoe UI" pitchFamily="34" charset="0"/>
-                <a:ea typeface="Segoe UI" pitchFamily="34" charset="-122"/>
-                <a:cs typeface="Segoe UI" pitchFamily="34" charset="-120"/>
-              </a:rPr>
-              <a:t>🎮 AI Games</a:t>
-            </a:r>
-            <a:endParaRPr lang="en-US" sz="1400" dirty="0"/>
-          </a:p>
-        </p:txBody>
-      </p:sp>
-      <p:sp>
-        <p:nvSpPr>
-          <p:cNvPr id="17" name="Text 15"/>
-          <p:cNvSpPr/>
-          <p:nvPr/>
-        </p:nvSpPr>
-        <p:spPr>
-          <a:xfrm>
-            <a:off x="8229600" y="1965960"/>
-            <a:ext cx="3246120" cy="1508760"/>
-          </a:xfrm>
-          <a:prstGeom prst="rect">
-            <a:avLst/>
-          </a:prstGeom>
-          <a:noFill/>
-          <a:ln/>
-        </p:spPr>
-        <p:txBody>
-          <a:bodyPr wrap="square" rtlCol="0" anchor="t"/>
-          <a:lstStyle/>
-          <a:p>
-            <a:pPr indent="0" marL="0">
-              <a:buNone/>
-            </a:pPr>
-            <a:r>
-              <a:rPr lang="en-US" sz="1150" dirty="0">
-                <a:solidFill>
-                  <a:srgbClr val="1A1A2E"/>
-                </a:solidFill>
-                <a:latin typeface="Segoe UI" pitchFamily="34" charset="0"/>
-                <a:ea typeface="Segoe UI" pitchFamily="34" charset="-122"/>
-                <a:cs typeface="Segoe UI" pitchFamily="34" charset="-120"/>
-              </a:rPr>
-              <a:t>Word, story &amp; math challenges</a:t>
-            </a:r>
-            <a:endParaRPr lang="en-US" sz="1150" dirty="0"/>
-          </a:p>
-        </p:txBody>
-      </p:sp>
-      <p:sp>
-        <p:nvSpPr>
-          <p:cNvPr id="18" name="Shape 16"/>
-          <p:cNvSpPr/>
-          <p:nvPr/>
-        </p:nvSpPr>
-        <p:spPr>
-          <a:xfrm>
-            <a:off x="548640" y="3794760"/>
-            <a:ext cx="3566160" cy="2103120"/>
+            <a:off x="548640" y="3291840"/>
+            <a:ext cx="3566160" cy="1554480"/>
           </a:xfrm>
           <a:prstGeom prst="roundRect">
             <a:avLst>
-              <a:gd name="adj" fmla="val 3478"/>
+              <a:gd name="adj" fmla="val 4706"/>
             </a:avLst>
           </a:prstGeom>
           <a:solidFill>
@@ -8268,14 +7924,14 @@
       </p:sp>
       <p:sp>
         <p:nvSpPr>
-          <p:cNvPr id="19" name="Shape 17"/>
-          <p:cNvSpPr/>
-          <p:nvPr/>
-        </p:nvSpPr>
-        <p:spPr>
-          <a:xfrm>
-            <a:off x="548640" y="3794760"/>
-            <a:ext cx="73152" cy="2103120"/>
+          <p:cNvPr id="16" name="Shape 14"/>
+          <p:cNvSpPr/>
+          <p:nvPr/>
+        </p:nvSpPr>
+        <p:spPr>
+          <a:xfrm>
+            <a:off x="548640" y="3291840"/>
+            <a:ext cx="73152" cy="1554480"/>
           </a:xfrm>
           <a:prstGeom prst="rect">
             <a:avLst/>
@@ -8288,14 +7944,14 @@
       </p:sp>
       <p:sp>
         <p:nvSpPr>
-          <p:cNvPr id="20" name="Text 18"/>
-          <p:cNvSpPr/>
-          <p:nvPr/>
-        </p:nvSpPr>
-        <p:spPr>
-          <a:xfrm>
-            <a:off x="731520" y="3904488"/>
-            <a:ext cx="3291840" cy="365760"/>
+          <p:cNvPr id="17" name="Text 15"/>
+          <p:cNvSpPr/>
+          <p:nvPr/>
+        </p:nvSpPr>
+        <p:spPr>
+          <a:xfrm>
+            <a:off x="749808" y="3383280"/>
+            <a:ext cx="3236976" cy="1371600"/>
           </a:xfrm>
           <a:prstGeom prst="rect">
             <a:avLst/>
@@ -8308,10 +7964,13 @@
           <a:lstStyle/>
           <a:p>
             <a:pPr indent="0" marL="0">
-              <a:buNone/>
-            </a:pPr>
-            <a:r>
-              <a:rPr lang="en-US" sz="1400" b="1" dirty="0">
+              <a:lnSpc>
+                <a:spcPct val="105000"/>
+              </a:lnSpc>
+              <a:buNone/>
+            </a:pPr>
+            <a:r>
+              <a:rPr lang="en-US" sz="1350" b="1" dirty="0">
                 <a:solidFill>
                   <a:srgbClr val="3F3D9E"/>
                 </a:solidFill>
@@ -8319,34 +7978,16 @@
                 <a:ea typeface="Segoe UI" pitchFamily="34" charset="-122"/>
                 <a:cs typeface="Segoe UI" pitchFamily="34" charset="-120"/>
               </a:rPr>
-              <a:t>▶️ Safe Video Library</a:t>
-            </a:r>
-            <a:endParaRPr lang="en-US" sz="1400" dirty="0"/>
-          </a:p>
-        </p:txBody>
-      </p:sp>
-      <p:sp>
-        <p:nvSpPr>
-          <p:cNvPr id="21" name="Text 19"/>
-          <p:cNvSpPr/>
-          <p:nvPr/>
-        </p:nvSpPr>
-        <p:spPr>
-          <a:xfrm>
-            <a:off x="731520" y="4297680"/>
-            <a:ext cx="3246120" cy="1508760"/>
-          </a:xfrm>
-          <a:prstGeom prst="rect">
-            <a:avLst/>
-          </a:prstGeom>
-          <a:noFill/>
-          <a:ln/>
-        </p:spPr>
-        <p:txBody>
-          <a:bodyPr wrap="square" rtlCol="0" anchor="t"/>
-          <a:lstStyle/>
+              <a:t>▶️ Safe Video Library
+</a:t>
+            </a:r>
+            <a:endParaRPr lang="en-US" sz="1350" dirty="0"/>
+          </a:p>
           <a:p>
             <a:pPr indent="0" marL="0">
+              <a:lnSpc>
+                <a:spcPct val="105000"/>
+              </a:lnSpc>
               <a:buNone/>
             </a:pPr>
             <a:r>
@@ -8360,24 +8001,24 @@
               </a:rPr>
               <a:t>Age-gated, searchable, parent-safe</a:t>
             </a:r>
-            <a:endParaRPr lang="en-US" sz="1150" dirty="0"/>
-          </a:p>
-        </p:txBody>
-      </p:sp>
-      <p:sp>
-        <p:nvSpPr>
-          <p:cNvPr id="22" name="Shape 20"/>
-          <p:cNvSpPr/>
-          <p:nvPr/>
-        </p:nvSpPr>
-        <p:spPr>
-          <a:xfrm>
-            <a:off x="4297680" y="3794760"/>
-            <a:ext cx="3566160" cy="2103120"/>
+            <a:endParaRPr lang="en-US" sz="1350" dirty="0"/>
+          </a:p>
+        </p:txBody>
+      </p:sp>
+      <p:sp>
+        <p:nvSpPr>
+          <p:cNvPr id="18" name="Shape 16"/>
+          <p:cNvSpPr/>
+          <p:nvPr/>
+        </p:nvSpPr>
+        <p:spPr>
+          <a:xfrm>
+            <a:off x="4297680" y="3291840"/>
+            <a:ext cx="3566160" cy="1554480"/>
           </a:xfrm>
           <a:prstGeom prst="roundRect">
             <a:avLst>
-              <a:gd name="adj" fmla="val 3478"/>
+              <a:gd name="adj" fmla="val 4706"/>
             </a:avLst>
           </a:prstGeom>
           <a:solidFill>
@@ -8393,14 +8034,14 @@
       </p:sp>
       <p:sp>
         <p:nvSpPr>
-          <p:cNvPr id="23" name="Shape 21"/>
-          <p:cNvSpPr/>
-          <p:nvPr/>
-        </p:nvSpPr>
-        <p:spPr>
-          <a:xfrm>
-            <a:off x="4297680" y="3794760"/>
-            <a:ext cx="73152" cy="2103120"/>
+          <p:cNvPr id="19" name="Shape 17"/>
+          <p:cNvSpPr/>
+          <p:nvPr/>
+        </p:nvSpPr>
+        <p:spPr>
+          <a:xfrm>
+            <a:off x="4297680" y="3291840"/>
+            <a:ext cx="73152" cy="1554480"/>
           </a:xfrm>
           <a:prstGeom prst="rect">
             <a:avLst/>
@@ -8413,14 +8054,14 @@
       </p:sp>
       <p:sp>
         <p:nvSpPr>
-          <p:cNvPr id="24" name="Text 22"/>
-          <p:cNvSpPr/>
-          <p:nvPr/>
-        </p:nvSpPr>
-        <p:spPr>
-          <a:xfrm>
-            <a:off x="4480560" y="3904488"/>
-            <a:ext cx="3291840" cy="365760"/>
+          <p:cNvPr id="20" name="Text 18"/>
+          <p:cNvSpPr/>
+          <p:nvPr/>
+        </p:nvSpPr>
+        <p:spPr>
+          <a:xfrm>
+            <a:off x="4498848" y="3383280"/>
+            <a:ext cx="3236976" cy="1371600"/>
           </a:xfrm>
           <a:prstGeom prst="rect">
             <a:avLst/>
@@ -8433,10 +8074,13 @@
           <a:lstStyle/>
           <a:p>
             <a:pPr indent="0" marL="0">
-              <a:buNone/>
-            </a:pPr>
-            <a:r>
-              <a:rPr lang="en-US" sz="1400" b="1" dirty="0">
+              <a:lnSpc>
+                <a:spcPct val="105000"/>
+              </a:lnSpc>
+              <a:buNone/>
+            </a:pPr>
+            <a:r>
+              <a:rPr lang="en-US" sz="1350" b="1" dirty="0">
                 <a:solidFill>
                   <a:srgbClr val="6C63FF"/>
                 </a:solidFill>
@@ -8444,34 +8088,16 @@
                 <a:ea typeface="Segoe UI" pitchFamily="34" charset="-122"/>
                 <a:cs typeface="Segoe UI" pitchFamily="34" charset="-120"/>
               </a:rPr>
-              <a:t>👥 Approved Friends</a:t>
-            </a:r>
-            <a:endParaRPr lang="en-US" sz="1400" dirty="0"/>
-          </a:p>
-        </p:txBody>
-      </p:sp>
-      <p:sp>
-        <p:nvSpPr>
-          <p:cNvPr id="25" name="Text 23"/>
-          <p:cNvSpPr/>
-          <p:nvPr/>
-        </p:nvSpPr>
-        <p:spPr>
-          <a:xfrm>
-            <a:off x="4480560" y="4297680"/>
-            <a:ext cx="3246120" cy="1508760"/>
-          </a:xfrm>
-          <a:prstGeom prst="rect">
-            <a:avLst/>
-          </a:prstGeom>
-          <a:noFill/>
-          <a:ln/>
-        </p:spPr>
-        <p:txBody>
-          <a:bodyPr wrap="square" rtlCol="0" anchor="t"/>
-          <a:lstStyle/>
+              <a:t>👥 Approved Friends
+</a:t>
+            </a:r>
+            <a:endParaRPr lang="en-US" sz="1350" dirty="0"/>
+          </a:p>
           <a:p>
             <a:pPr indent="0" marL="0">
+              <a:lnSpc>
+                <a:spcPct val="105000"/>
+              </a:lnSpc>
               <a:buNone/>
             </a:pPr>
             <a:r>
@@ -8485,24 +8111,24 @@
               </a:rPr>
               <a:t>Social only after parent consent</a:t>
             </a:r>
-            <a:endParaRPr lang="en-US" sz="1150" dirty="0"/>
-          </a:p>
-        </p:txBody>
-      </p:sp>
-      <p:sp>
-        <p:nvSpPr>
-          <p:cNvPr id="26" name="Shape 24"/>
-          <p:cNvSpPr/>
-          <p:nvPr/>
-        </p:nvSpPr>
-        <p:spPr>
-          <a:xfrm>
-            <a:off x="8046720" y="3794760"/>
-            <a:ext cx="3566160" cy="2103120"/>
+            <a:endParaRPr lang="en-US" sz="1350" dirty="0"/>
+          </a:p>
+        </p:txBody>
+      </p:sp>
+      <p:sp>
+        <p:nvSpPr>
+          <p:cNvPr id="21" name="Shape 19"/>
+          <p:cNvSpPr/>
+          <p:nvPr/>
+        </p:nvSpPr>
+        <p:spPr>
+          <a:xfrm>
+            <a:off x="8046720" y="3291840"/>
+            <a:ext cx="3566160" cy="1554480"/>
           </a:xfrm>
           <a:prstGeom prst="roundRect">
             <a:avLst>
-              <a:gd name="adj" fmla="val 3478"/>
+              <a:gd name="adj" fmla="val 4706"/>
             </a:avLst>
           </a:prstGeom>
           <a:solidFill>
@@ -8518,14 +8144,14 @@
       </p:sp>
       <p:sp>
         <p:nvSpPr>
-          <p:cNvPr id="27" name="Shape 25"/>
-          <p:cNvSpPr/>
-          <p:nvPr/>
-        </p:nvSpPr>
-        <p:spPr>
-          <a:xfrm>
-            <a:off x="8046720" y="3794760"/>
-            <a:ext cx="73152" cy="2103120"/>
+          <p:cNvPr id="22" name="Shape 20"/>
+          <p:cNvSpPr/>
+          <p:nvPr/>
+        </p:nvSpPr>
+        <p:spPr>
+          <a:xfrm>
+            <a:off x="8046720" y="3291840"/>
+            <a:ext cx="73152" cy="1554480"/>
           </a:xfrm>
           <a:prstGeom prst="rect">
             <a:avLst/>
@@ -8538,14 +8164,14 @@
       </p:sp>
       <p:sp>
         <p:nvSpPr>
-          <p:cNvPr id="28" name="Text 26"/>
-          <p:cNvSpPr/>
-          <p:nvPr/>
-        </p:nvSpPr>
-        <p:spPr>
-          <a:xfrm>
-            <a:off x="8229600" y="3904488"/>
-            <a:ext cx="3291840" cy="365760"/>
+          <p:cNvPr id="23" name="Text 21"/>
+          <p:cNvSpPr/>
+          <p:nvPr/>
+        </p:nvSpPr>
+        <p:spPr>
+          <a:xfrm>
+            <a:off x="8247888" y="3383280"/>
+            <a:ext cx="3236976" cy="1371600"/>
           </a:xfrm>
           <a:prstGeom prst="rect">
             <a:avLst/>
@@ -8558,10 +8184,13 @@
           <a:lstStyle/>
           <a:p>
             <a:pPr indent="0" marL="0">
-              <a:buNone/>
-            </a:pPr>
-            <a:r>
-              <a:rPr lang="en-US" sz="1400" b="1" dirty="0">
+              <a:lnSpc>
+                <a:spcPct val="105000"/>
+              </a:lnSpc>
+              <a:buNone/>
+            </a:pPr>
+            <a:r>
+              <a:rPr lang="en-US" sz="1350" b="1" dirty="0">
                 <a:solidFill>
                   <a:srgbClr val="3F3D9E"/>
                 </a:solidFill>
@@ -8569,34 +8198,16 @@
                 <a:ea typeface="Segoe UI" pitchFamily="34" charset="-122"/>
                 <a:cs typeface="Segoe UI" pitchFamily="34" charset="-120"/>
               </a:rPr>
-              <a:t>📊 Progress Dashboards</a:t>
-            </a:r>
-            <a:endParaRPr lang="en-US" sz="1400" dirty="0"/>
-          </a:p>
-        </p:txBody>
-      </p:sp>
-      <p:sp>
-        <p:nvSpPr>
-          <p:cNvPr id="29" name="Text 27"/>
-          <p:cNvSpPr/>
-          <p:nvPr/>
-        </p:nvSpPr>
-        <p:spPr>
-          <a:xfrm>
-            <a:off x="8229600" y="4297680"/>
-            <a:ext cx="3246120" cy="1508760"/>
-          </a:xfrm>
-          <a:prstGeom prst="rect">
-            <a:avLst/>
-          </a:prstGeom>
-          <a:noFill/>
-          <a:ln/>
-        </p:spPr>
-        <p:txBody>
-          <a:bodyPr wrap="square" rtlCol="0" anchor="t"/>
-          <a:lstStyle/>
+              <a:t>📊 Progress Dashboards
+</a:t>
+            </a:r>
+            <a:endParaRPr lang="en-US" sz="1350" dirty="0"/>
+          </a:p>
           <a:p>
             <a:pPr indent="0" marL="0">
+              <a:lnSpc>
+                <a:spcPct val="105000"/>
+              </a:lnSpc>
               <a:buNone/>
             </a:pPr>
             <a:r>
@@ -8608,15 +8219,15 @@
                 <a:ea typeface="Segoe UI" pitchFamily="34" charset="-122"/>
                 <a:cs typeface="Segoe UI" pitchFamily="34" charset="-120"/>
               </a:rPr>
-              <a:t>Real-time for kids, parents, teachers</a:t>
-            </a:r>
-            <a:endParaRPr lang="en-US" sz="1150" dirty="0"/>
-          </a:p>
-        </p:txBody>
-      </p:sp>
-      <p:sp>
-        <p:nvSpPr>
-          <p:cNvPr id="30" name="Text 28"/>
+              <a:t>Real-time for kids, parents &amp; teachers</a:t>
+            </a:r>
+            <a:endParaRPr lang="en-US" sz="1350" dirty="0"/>
+          </a:p>
+        </p:txBody>
+      </p:sp>
+      <p:sp>
+        <p:nvSpPr>
+          <p:cNvPr id="24" name="Text 22"/>
           <p:cNvSpPr/>
           <p:nvPr/>
         </p:nvSpPr>
@@ -8655,7 +8266,7 @@
       </p:sp>
       <p:sp>
         <p:nvSpPr>
-          <p:cNvPr id="31" name="Text 29"/>
+          <p:cNvPr id="25" name="Text 23"/>
           <p:cNvSpPr/>
           <p:nvPr/>
         </p:nvSpPr>
@@ -8697,6 +8308,9 @@
   <p:clrMapOvr>
     <a:masterClrMapping/>
   </p:clrMapOvr>
+  <p:transition xmlns:p="http://schemas.openxmlformats.org/presentationml/2006/main" spd="med">
+    <p:fade/>
+  </p:transition>
 </p:sld>
 </file>
 
@@ -8833,7 +8447,7 @@
         <p:spPr>
           <a:xfrm>
             <a:off x="1298448" y="1097280"/>
-            <a:ext cx="2011680" cy="54864"/>
+            <a:ext cx="1828800" cy="45720"/>
           </a:xfrm>
           <a:prstGeom prst="rect">
             <a:avLst/>
@@ -8852,7 +8466,7 @@
         </p:nvSpPr>
         <p:spPr>
           <a:xfrm>
-            <a:off x="548640" y="1325880"/>
+            <a:off x="548640" y="1280160"/>
             <a:ext cx="10972800" cy="365760"/>
           </a:xfrm>
           <a:prstGeom prst="rect">
@@ -8891,12 +8505,12 @@
         </p:nvSpPr>
         <p:spPr>
           <a:xfrm>
-            <a:off x="640080" y="1828800"/>
-            <a:ext cx="2011680" cy="822960"/>
+            <a:off x="640080" y="1783080"/>
+            <a:ext cx="2011680" cy="777240"/>
           </a:xfrm>
           <a:prstGeom prst="roundRect">
             <a:avLst>
-              <a:gd name="adj" fmla="val 11111"/>
+              <a:gd name="adj" fmla="val 11765"/>
             </a:avLst>
           </a:prstGeom>
           <a:solidFill>
@@ -8913,8 +8527,8 @@
         </p:nvSpPr>
         <p:spPr>
           <a:xfrm>
-            <a:off x="640080" y="1828800"/>
-            <a:ext cx="2011680" cy="822960"/>
+            <a:off x="640080" y="1783080"/>
+            <a:ext cx="2011680" cy="777240"/>
           </a:xfrm>
           <a:prstGeom prst="rect">
             <a:avLst/>
@@ -8952,8 +8566,8 @@
         </p:nvSpPr>
         <p:spPr>
           <a:xfrm>
-            <a:off x="2633472" y="1828800"/>
-            <a:ext cx="310896" cy="822960"/>
+            <a:off x="2633472" y="1783080"/>
+            <a:ext cx="310896" cy="777240"/>
           </a:xfrm>
           <a:prstGeom prst="rect">
             <a:avLst/>
@@ -8991,12 +8605,12 @@
         </p:nvSpPr>
         <p:spPr>
           <a:xfrm>
-            <a:off x="2926080" y="1828800"/>
-            <a:ext cx="2011680" cy="822960"/>
+            <a:off x="2926080" y="1783080"/>
+            <a:ext cx="2011680" cy="777240"/>
           </a:xfrm>
           <a:prstGeom prst="roundRect">
             <a:avLst>
-              <a:gd name="adj" fmla="val 11111"/>
+              <a:gd name="adj" fmla="val 11765"/>
             </a:avLst>
           </a:prstGeom>
           <a:solidFill>
@@ -9013,8 +8627,8 @@
         </p:nvSpPr>
         <p:spPr>
           <a:xfrm>
-            <a:off x="2926080" y="1828800"/>
-            <a:ext cx="2011680" cy="822960"/>
+            <a:off x="2926080" y="1783080"/>
+            <a:ext cx="2011680" cy="777240"/>
           </a:xfrm>
           <a:prstGeom prst="rect">
             <a:avLst/>
@@ -9052,8 +8666,8 @@
         </p:nvSpPr>
         <p:spPr>
           <a:xfrm>
-            <a:off x="4919472" y="1828800"/>
-            <a:ext cx="310896" cy="822960"/>
+            <a:off x="4919472" y="1783080"/>
+            <a:ext cx="310896" cy="777240"/>
           </a:xfrm>
           <a:prstGeom prst="rect">
             <a:avLst/>
@@ -9091,12 +8705,12 @@
         </p:nvSpPr>
         <p:spPr>
           <a:xfrm>
-            <a:off x="5212080" y="1828800"/>
-            <a:ext cx="2011680" cy="822960"/>
+            <a:off x="5212080" y="1783080"/>
+            <a:ext cx="2011680" cy="777240"/>
           </a:xfrm>
           <a:prstGeom prst="roundRect">
             <a:avLst>
-              <a:gd name="adj" fmla="val 11111"/>
+              <a:gd name="adj" fmla="val 11765"/>
             </a:avLst>
           </a:prstGeom>
           <a:solidFill>
@@ -9113,8 +8727,8 @@
         </p:nvSpPr>
         <p:spPr>
           <a:xfrm>
-            <a:off x="5212080" y="1828800"/>
-            <a:ext cx="2011680" cy="822960"/>
+            <a:off x="5212080" y="1783080"/>
+            <a:ext cx="2011680" cy="777240"/>
           </a:xfrm>
           <a:prstGeom prst="rect">
             <a:avLst/>
@@ -9152,8 +8766,8 @@
         </p:nvSpPr>
         <p:spPr>
           <a:xfrm>
-            <a:off x="7205472" y="1828800"/>
-            <a:ext cx="310896" cy="822960"/>
+            <a:off x="7205472" y="1783080"/>
+            <a:ext cx="310896" cy="777240"/>
           </a:xfrm>
           <a:prstGeom prst="rect">
             <a:avLst/>
@@ -9191,12 +8805,12 @@
         </p:nvSpPr>
         <p:spPr>
           <a:xfrm>
-            <a:off x="7498080" y="1828800"/>
-            <a:ext cx="2011680" cy="822960"/>
+            <a:off x="7498080" y="1783080"/>
+            <a:ext cx="2011680" cy="777240"/>
           </a:xfrm>
           <a:prstGeom prst="roundRect">
             <a:avLst>
-              <a:gd name="adj" fmla="val 11111"/>
+              <a:gd name="adj" fmla="val 11765"/>
             </a:avLst>
           </a:prstGeom>
           <a:solidFill>
@@ -9213,8 +8827,8 @@
         </p:nvSpPr>
         <p:spPr>
           <a:xfrm>
-            <a:off x="7498080" y="1828800"/>
-            <a:ext cx="2011680" cy="822960"/>
+            <a:off x="7498080" y="1783080"/>
+            <a:ext cx="2011680" cy="777240"/>
           </a:xfrm>
           <a:prstGeom prst="rect">
             <a:avLst/>
@@ -9252,8 +8866,8 @@
         </p:nvSpPr>
         <p:spPr>
           <a:xfrm>
-            <a:off x="9491472" y="1828800"/>
-            <a:ext cx="310896" cy="822960"/>
+            <a:off x="9491472" y="1783080"/>
+            <a:ext cx="310896" cy="777240"/>
           </a:xfrm>
           <a:prstGeom prst="rect">
             <a:avLst/>
@@ -9291,12 +8905,12 @@
         </p:nvSpPr>
         <p:spPr>
           <a:xfrm>
-            <a:off x="9784080" y="1828800"/>
-            <a:ext cx="2011680" cy="822960"/>
+            <a:off x="9784080" y="1783080"/>
+            <a:ext cx="2011680" cy="777240"/>
           </a:xfrm>
           <a:prstGeom prst="roundRect">
             <a:avLst>
-              <a:gd name="adj" fmla="val 11111"/>
+              <a:gd name="adj" fmla="val 11765"/>
             </a:avLst>
           </a:prstGeom>
           <a:solidFill>
@@ -9313,8 +8927,8 @@
         </p:nvSpPr>
         <p:spPr>
           <a:xfrm>
-            <a:off x="9784080" y="1828800"/>
-            <a:ext cx="2011680" cy="822960"/>
+            <a:off x="9784080" y="1783080"/>
+            <a:ext cx="2011680" cy="777240"/>
           </a:xfrm>
           <a:prstGeom prst="rect">
             <a:avLst/>
@@ -9352,12 +8966,12 @@
         </p:nvSpPr>
         <p:spPr>
           <a:xfrm>
-            <a:off x="548640" y="3017520"/>
-            <a:ext cx="3566160" cy="1234440"/>
+            <a:off x="548640" y="2880360"/>
+            <a:ext cx="3566160" cy="1280160"/>
           </a:xfrm>
           <a:prstGeom prst="roundRect">
             <a:avLst>
-              <a:gd name="adj" fmla="val 5926"/>
+              <a:gd name="adj" fmla="val 5714"/>
             </a:avLst>
           </a:prstGeom>
           <a:solidFill>
@@ -9379,8 +8993,8 @@
         </p:nvSpPr>
         <p:spPr>
           <a:xfrm>
-            <a:off x="548640" y="3017520"/>
-            <a:ext cx="73152" cy="1234440"/>
+            <a:off x="548640" y="2880360"/>
+            <a:ext cx="73152" cy="1280160"/>
           </a:xfrm>
           <a:prstGeom prst="rect">
             <a:avLst/>
@@ -9399,8 +9013,8 @@
         </p:nvSpPr>
         <p:spPr>
           <a:xfrm>
-            <a:off x="731520" y="3127248"/>
-            <a:ext cx="3291840" cy="365760"/>
+            <a:off x="749808" y="2971800"/>
+            <a:ext cx="3236976" cy="1097280"/>
           </a:xfrm>
           <a:prstGeom prst="rect">
             <a:avLst/>
@@ -9413,10 +9027,13 @@
           <a:lstStyle/>
           <a:p>
             <a:pPr indent="0" marL="0">
-              <a:buNone/>
-            </a:pPr>
-            <a:r>
-              <a:rPr lang="en-US" sz="1400" b="1" dirty="0">
+              <a:lnSpc>
+                <a:spcPct val="105000"/>
+              </a:lnSpc>
+              <a:buNone/>
+            </a:pPr>
+            <a:r>
+              <a:rPr lang="en-US" sz="1350" b="1" dirty="0">
                 <a:solidFill>
                   <a:srgbClr val="6C63FF"/>
                 </a:solidFill>
@@ -9424,34 +9041,16 @@
                 <a:ea typeface="Segoe UI" pitchFamily="34" charset="-122"/>
                 <a:cs typeface="Segoe UI" pitchFamily="34" charset="-120"/>
               </a:rPr>
-              <a:t>Learning Agent</a:t>
-            </a:r>
-            <a:endParaRPr lang="en-US" sz="1400" dirty="0"/>
-          </a:p>
-        </p:txBody>
-      </p:sp>
-      <p:sp>
-        <p:nvSpPr>
-          <p:cNvPr id="24" name="Text 22"/>
-          <p:cNvSpPr/>
-          <p:nvPr/>
-        </p:nvSpPr>
-        <p:spPr>
-          <a:xfrm>
-            <a:off x="731520" y="3520440"/>
-            <a:ext cx="3246120" cy="640080"/>
-          </a:xfrm>
-          <a:prstGeom prst="rect">
-            <a:avLst/>
-          </a:prstGeom>
-          <a:noFill/>
-          <a:ln/>
-        </p:spPr>
-        <p:txBody>
-          <a:bodyPr wrap="square" rtlCol="0" anchor="t"/>
-          <a:lstStyle/>
+              <a:t>Learning Agent
+</a:t>
+            </a:r>
+            <a:endParaRPr lang="en-US" sz="1350" dirty="0"/>
+          </a:p>
           <a:p>
             <a:pPr indent="0" marL="0">
+              <a:lnSpc>
+                <a:spcPct val="105000"/>
+              </a:lnSpc>
               <a:buNone/>
             </a:pPr>
             <a:r>
@@ -9465,24 +9064,24 @@
               </a:rPr>
               <a:t>Tracks mastery, builds learning paths</a:t>
             </a:r>
-            <a:endParaRPr lang="en-US" sz="1150" dirty="0"/>
-          </a:p>
-        </p:txBody>
-      </p:sp>
-      <p:sp>
-        <p:nvSpPr>
-          <p:cNvPr id="25" name="Shape 23"/>
-          <p:cNvSpPr/>
-          <p:nvPr/>
-        </p:nvSpPr>
-        <p:spPr>
-          <a:xfrm>
-            <a:off x="4297680" y="3017520"/>
-            <a:ext cx="3566160" cy="1234440"/>
+            <a:endParaRPr lang="en-US" sz="1350" dirty="0"/>
+          </a:p>
+        </p:txBody>
+      </p:sp>
+      <p:sp>
+        <p:nvSpPr>
+          <p:cNvPr id="24" name="Shape 22"/>
+          <p:cNvSpPr/>
+          <p:nvPr/>
+        </p:nvSpPr>
+        <p:spPr>
+          <a:xfrm>
+            <a:off x="4297680" y="2880360"/>
+            <a:ext cx="3566160" cy="1280160"/>
           </a:xfrm>
           <a:prstGeom prst="roundRect">
             <a:avLst>
-              <a:gd name="adj" fmla="val 5926"/>
+              <a:gd name="adj" fmla="val 5714"/>
             </a:avLst>
           </a:prstGeom>
           <a:solidFill>
@@ -9498,14 +9097,14 @@
       </p:sp>
       <p:sp>
         <p:nvSpPr>
-          <p:cNvPr id="26" name="Shape 24"/>
-          <p:cNvSpPr/>
-          <p:nvPr/>
-        </p:nvSpPr>
-        <p:spPr>
-          <a:xfrm>
-            <a:off x="4297680" y="3017520"/>
-            <a:ext cx="73152" cy="1234440"/>
+          <p:cNvPr id="25" name="Shape 23"/>
+          <p:cNvSpPr/>
+          <p:nvPr/>
+        </p:nvSpPr>
+        <p:spPr>
+          <a:xfrm>
+            <a:off x="4297680" y="2880360"/>
+            <a:ext cx="73152" cy="1280160"/>
           </a:xfrm>
           <a:prstGeom prst="rect">
             <a:avLst/>
@@ -9518,14 +9117,14 @@
       </p:sp>
       <p:sp>
         <p:nvSpPr>
-          <p:cNvPr id="27" name="Text 25"/>
-          <p:cNvSpPr/>
-          <p:nvPr/>
-        </p:nvSpPr>
-        <p:spPr>
-          <a:xfrm>
-            <a:off x="4480560" y="3127248"/>
-            <a:ext cx="3291840" cy="365760"/>
+          <p:cNvPr id="26" name="Text 24"/>
+          <p:cNvSpPr/>
+          <p:nvPr/>
+        </p:nvSpPr>
+        <p:spPr>
+          <a:xfrm>
+            <a:off x="4498848" y="2971800"/>
+            <a:ext cx="3236976" cy="1097280"/>
           </a:xfrm>
           <a:prstGeom prst="rect">
             <a:avLst/>
@@ -9538,10 +9137,13 @@
           <a:lstStyle/>
           <a:p>
             <a:pPr indent="0" marL="0">
-              <a:buNone/>
-            </a:pPr>
-            <a:r>
-              <a:rPr lang="en-US" sz="1400" b="1" dirty="0">
+              <a:lnSpc>
+                <a:spcPct val="105000"/>
+              </a:lnSpc>
+              <a:buNone/>
+            </a:pPr>
+            <a:r>
+              <a:rPr lang="en-US" sz="1350" b="1" dirty="0">
                 <a:solidFill>
                   <a:srgbClr val="3F3D9E"/>
                 </a:solidFill>
@@ -9549,34 +9151,16 @@
                 <a:ea typeface="Segoe UI" pitchFamily="34" charset="-122"/>
                 <a:cs typeface="Segoe UI" pitchFamily="34" charset="-120"/>
               </a:rPr>
-              <a:t>Engagement Agent</a:t>
-            </a:r>
-            <a:endParaRPr lang="en-US" sz="1400" dirty="0"/>
-          </a:p>
-        </p:txBody>
-      </p:sp>
-      <p:sp>
-        <p:nvSpPr>
-          <p:cNvPr id="28" name="Text 26"/>
-          <p:cNvSpPr/>
-          <p:nvPr/>
-        </p:nvSpPr>
-        <p:spPr>
-          <a:xfrm>
-            <a:off x="4480560" y="3520440"/>
-            <a:ext cx="3246120" cy="640080"/>
-          </a:xfrm>
-          <a:prstGeom prst="rect">
-            <a:avLst/>
-          </a:prstGeom>
-          <a:noFill/>
-          <a:ln/>
-        </p:spPr>
-        <p:txBody>
-          <a:bodyPr wrap="square" rtlCol="0" anchor="t"/>
-          <a:lstStyle/>
+              <a:t>Engagement Agent
+</a:t>
+            </a:r>
+            <a:endParaRPr lang="en-US" sz="1350" dirty="0"/>
+          </a:p>
           <a:p>
             <a:pPr indent="0" marL="0">
+              <a:lnSpc>
+                <a:spcPct val="105000"/>
+              </a:lnSpc>
               <a:buNone/>
             </a:pPr>
             <a:r>
@@ -9590,24 +9174,24 @@
               </a:rPr>
               <a:t>Detects boredom, switches format</a:t>
             </a:r>
-            <a:endParaRPr lang="en-US" sz="1150" dirty="0"/>
-          </a:p>
-        </p:txBody>
-      </p:sp>
-      <p:sp>
-        <p:nvSpPr>
-          <p:cNvPr id="29" name="Shape 27"/>
-          <p:cNvSpPr/>
-          <p:nvPr/>
-        </p:nvSpPr>
-        <p:spPr>
-          <a:xfrm>
-            <a:off x="8046720" y="3017520"/>
-            <a:ext cx="3566160" cy="1234440"/>
+            <a:endParaRPr lang="en-US" sz="1350" dirty="0"/>
+          </a:p>
+        </p:txBody>
+      </p:sp>
+      <p:sp>
+        <p:nvSpPr>
+          <p:cNvPr id="27" name="Shape 25"/>
+          <p:cNvSpPr/>
+          <p:nvPr/>
+        </p:nvSpPr>
+        <p:spPr>
+          <a:xfrm>
+            <a:off x="8046720" y="2880360"/>
+            <a:ext cx="3566160" cy="1280160"/>
           </a:xfrm>
           <a:prstGeom prst="roundRect">
             <a:avLst>
-              <a:gd name="adj" fmla="val 5926"/>
+              <a:gd name="adj" fmla="val 5714"/>
             </a:avLst>
           </a:prstGeom>
           <a:solidFill>
@@ -9623,116 +9207,101 @@
       </p:sp>
       <p:sp>
         <p:nvSpPr>
+          <p:cNvPr id="28" name="Shape 26"/>
+          <p:cNvSpPr/>
+          <p:nvPr/>
+        </p:nvSpPr>
+        <p:spPr>
+          <a:xfrm>
+            <a:off x="8046720" y="2880360"/>
+            <a:ext cx="73152" cy="1280160"/>
+          </a:xfrm>
+          <a:prstGeom prst="rect">
+            <a:avLst/>
+          </a:prstGeom>
+          <a:solidFill>
+            <a:srgbClr val="6C63FF"/>
+          </a:solidFill>
+          <a:ln/>
+        </p:spPr>
+      </p:sp>
+      <p:sp>
+        <p:nvSpPr>
+          <p:cNvPr id="29" name="Text 27"/>
+          <p:cNvSpPr/>
+          <p:nvPr/>
+        </p:nvSpPr>
+        <p:spPr>
+          <a:xfrm>
+            <a:off x="8247888" y="2971800"/>
+            <a:ext cx="3236976" cy="1097280"/>
+          </a:xfrm>
+          <a:prstGeom prst="rect">
+            <a:avLst/>
+          </a:prstGeom>
+          <a:noFill/>
+          <a:ln/>
+        </p:spPr>
+        <p:txBody>
+          <a:bodyPr wrap="square" rtlCol="0" anchor="ctr"/>
+          <a:lstStyle/>
+          <a:p>
+            <a:pPr indent="0" marL="0">
+              <a:lnSpc>
+                <a:spcPct val="105000"/>
+              </a:lnSpc>
+              <a:buNone/>
+            </a:pPr>
+            <a:r>
+              <a:rPr lang="en-US" sz="1350" b="1" dirty="0">
+                <a:solidFill>
+                  <a:srgbClr val="6C63FF"/>
+                </a:solidFill>
+                <a:latin typeface="Segoe UI" pitchFamily="34" charset="0"/>
+                <a:ea typeface="Segoe UI" pitchFamily="34" charset="-122"/>
+                <a:cs typeface="Segoe UI" pitchFamily="34" charset="-120"/>
+              </a:rPr>
+              <a:t>Safety Agent
+</a:t>
+            </a:r>
+            <a:endParaRPr lang="en-US" sz="1350" dirty="0"/>
+          </a:p>
+          <a:p>
+            <a:pPr indent="0" marL="0">
+              <a:lnSpc>
+                <a:spcPct val="105000"/>
+              </a:lnSpc>
+              <a:buNone/>
+            </a:pPr>
+            <a:r>
+              <a:rPr lang="en-US" sz="1150" dirty="0">
+                <a:solidFill>
+                  <a:srgbClr val="1A1A2E"/>
+                </a:solidFill>
+                <a:latin typeface="Segoe UI" pitchFamily="34" charset="0"/>
+                <a:ea typeface="Segoe UI" pitchFamily="34" charset="-122"/>
+                <a:cs typeface="Segoe UI" pitchFamily="34" charset="-120"/>
+              </a:rPr>
+              <a:t>Screens messages &amp; social patterns</a:t>
+            </a:r>
+            <a:endParaRPr lang="en-US" sz="1350" dirty="0"/>
+          </a:p>
+        </p:txBody>
+      </p:sp>
+      <p:sp>
+        <p:nvSpPr>
           <p:cNvPr id="30" name="Shape 28"/>
           <p:cNvSpPr/>
           <p:nvPr/>
         </p:nvSpPr>
         <p:spPr>
           <a:xfrm>
-            <a:off x="8046720" y="3017520"/>
-            <a:ext cx="73152" cy="1234440"/>
-          </a:xfrm>
-          <a:prstGeom prst="rect">
-            <a:avLst/>
-          </a:prstGeom>
-          <a:solidFill>
-            <a:srgbClr val="6C63FF"/>
-          </a:solidFill>
-          <a:ln/>
-        </p:spPr>
-      </p:sp>
-      <p:sp>
-        <p:nvSpPr>
-          <p:cNvPr id="31" name="Text 29"/>
-          <p:cNvSpPr/>
-          <p:nvPr/>
-        </p:nvSpPr>
-        <p:spPr>
-          <a:xfrm>
-            <a:off x="8229600" y="3127248"/>
-            <a:ext cx="3291840" cy="365760"/>
-          </a:xfrm>
-          <a:prstGeom prst="rect">
-            <a:avLst/>
-          </a:prstGeom>
-          <a:noFill/>
-          <a:ln/>
-        </p:spPr>
-        <p:txBody>
-          <a:bodyPr wrap="square" rtlCol="0" anchor="ctr"/>
-          <a:lstStyle/>
-          <a:p>
-            <a:pPr indent="0" marL="0">
-              <a:buNone/>
-            </a:pPr>
-            <a:r>
-              <a:rPr lang="en-US" sz="1400" b="1" dirty="0">
-                <a:solidFill>
-                  <a:srgbClr val="6C63FF"/>
-                </a:solidFill>
-                <a:latin typeface="Segoe UI" pitchFamily="34" charset="0"/>
-                <a:ea typeface="Segoe UI" pitchFamily="34" charset="-122"/>
-                <a:cs typeface="Segoe UI" pitchFamily="34" charset="-120"/>
-              </a:rPr>
-              <a:t>Safety Agent</a:t>
-            </a:r>
-            <a:endParaRPr lang="en-US" sz="1400" dirty="0"/>
-          </a:p>
-        </p:txBody>
-      </p:sp>
-      <p:sp>
-        <p:nvSpPr>
-          <p:cNvPr id="32" name="Text 30"/>
-          <p:cNvSpPr/>
-          <p:nvPr/>
-        </p:nvSpPr>
-        <p:spPr>
-          <a:xfrm>
-            <a:off x="8229600" y="3520440"/>
-            <a:ext cx="3246120" cy="640080"/>
-          </a:xfrm>
-          <a:prstGeom prst="rect">
-            <a:avLst/>
-          </a:prstGeom>
-          <a:noFill/>
-          <a:ln/>
-        </p:spPr>
-        <p:txBody>
-          <a:bodyPr wrap="square" rtlCol="0" anchor="t"/>
-          <a:lstStyle/>
-          <a:p>
-            <a:pPr indent="0" marL="0">
-              <a:buNone/>
-            </a:pPr>
-            <a:r>
-              <a:rPr lang="en-US" sz="1150" dirty="0">
-                <a:solidFill>
-                  <a:srgbClr val="1A1A2E"/>
-                </a:solidFill>
-                <a:latin typeface="Segoe UI" pitchFamily="34" charset="0"/>
-                <a:ea typeface="Segoe UI" pitchFamily="34" charset="-122"/>
-                <a:cs typeface="Segoe UI" pitchFamily="34" charset="-120"/>
-              </a:rPr>
-              <a:t>Screens messages &amp; social patterns</a:t>
-            </a:r>
-            <a:endParaRPr lang="en-US" sz="1150" dirty="0"/>
-          </a:p>
-        </p:txBody>
-      </p:sp>
-      <p:sp>
-        <p:nvSpPr>
-          <p:cNvPr id="33" name="Shape 31"/>
-          <p:cNvSpPr/>
-          <p:nvPr/>
-        </p:nvSpPr>
-        <p:spPr>
-          <a:xfrm>
-            <a:off x="548640" y="4434840"/>
-            <a:ext cx="3566160" cy="1234440"/>
+            <a:off x="548640" y="4343400"/>
+            <a:ext cx="3566160" cy="1280160"/>
           </a:xfrm>
           <a:prstGeom prst="roundRect">
             <a:avLst>
-              <a:gd name="adj" fmla="val 5926"/>
+              <a:gd name="adj" fmla="val 5714"/>
             </a:avLst>
           </a:prstGeom>
           <a:solidFill>
@@ -9748,14 +9317,14 @@
       </p:sp>
       <p:sp>
         <p:nvSpPr>
-          <p:cNvPr id="34" name="Shape 32"/>
-          <p:cNvSpPr/>
-          <p:nvPr/>
-        </p:nvSpPr>
-        <p:spPr>
-          <a:xfrm>
-            <a:off x="548640" y="4434840"/>
-            <a:ext cx="73152" cy="1234440"/>
+          <p:cNvPr id="31" name="Shape 29"/>
+          <p:cNvSpPr/>
+          <p:nvPr/>
+        </p:nvSpPr>
+        <p:spPr>
+          <a:xfrm>
+            <a:off x="548640" y="4343400"/>
+            <a:ext cx="73152" cy="1280160"/>
           </a:xfrm>
           <a:prstGeom prst="rect">
             <a:avLst/>
@@ -9768,14 +9337,14 @@
       </p:sp>
       <p:sp>
         <p:nvSpPr>
-          <p:cNvPr id="35" name="Text 33"/>
-          <p:cNvSpPr/>
-          <p:nvPr/>
-        </p:nvSpPr>
-        <p:spPr>
-          <a:xfrm>
-            <a:off x="731520" y="4544568"/>
-            <a:ext cx="3291840" cy="365760"/>
+          <p:cNvPr id="32" name="Text 30"/>
+          <p:cNvSpPr/>
+          <p:nvPr/>
+        </p:nvSpPr>
+        <p:spPr>
+          <a:xfrm>
+            <a:off x="749808" y="4434840"/>
+            <a:ext cx="3236976" cy="1097280"/>
           </a:xfrm>
           <a:prstGeom prst="rect">
             <a:avLst/>
@@ -9788,10 +9357,13 @@
           <a:lstStyle/>
           <a:p>
             <a:pPr indent="0" marL="0">
-              <a:buNone/>
-            </a:pPr>
-            <a:r>
-              <a:rPr lang="en-US" sz="1400" b="1" dirty="0">
+              <a:lnSpc>
+                <a:spcPct val="105000"/>
+              </a:lnSpc>
+              <a:buNone/>
+            </a:pPr>
+            <a:r>
+              <a:rPr lang="en-US" sz="1350" b="1" dirty="0">
                 <a:solidFill>
                   <a:srgbClr val="3F3D9E"/>
                 </a:solidFill>
@@ -9799,34 +9371,16 @@
                 <a:ea typeface="Segoe UI" pitchFamily="34" charset="-122"/>
                 <a:cs typeface="Segoe UI" pitchFamily="34" charset="-120"/>
               </a:rPr>
-              <a:t>Behavior Analyst</a:t>
-            </a:r>
-            <a:endParaRPr lang="en-US" sz="1400" dirty="0"/>
-          </a:p>
-        </p:txBody>
-      </p:sp>
-      <p:sp>
-        <p:nvSpPr>
-          <p:cNvPr id="36" name="Text 34"/>
-          <p:cNvSpPr/>
-          <p:nvPr/>
-        </p:nvSpPr>
-        <p:spPr>
-          <a:xfrm>
-            <a:off x="731520" y="4937760"/>
-            <a:ext cx="3246120" cy="640080"/>
-          </a:xfrm>
-          <a:prstGeom prst="rect">
-            <a:avLst/>
-          </a:prstGeom>
-          <a:noFill/>
-          <a:ln/>
-        </p:spPr>
-        <p:txBody>
-          <a:bodyPr wrap="square" rtlCol="0" anchor="t"/>
-          <a:lstStyle/>
+              <a:t>Behavior Analyst
+</a:t>
+            </a:r>
+            <a:endParaRPr lang="en-US" sz="1350" dirty="0"/>
+          </a:p>
           <a:p>
             <a:pPr indent="0" marL="0">
+              <a:lnSpc>
+                <a:spcPct val="105000"/>
+              </a:lnSpc>
               <a:buNone/>
             </a:pPr>
             <a:r>
@@ -9840,24 +9394,24 @@
               </a:rPr>
               <a:t>Detects burnout &amp; mood trends</a:t>
             </a:r>
-            <a:endParaRPr lang="en-US" sz="1150" dirty="0"/>
-          </a:p>
-        </p:txBody>
-      </p:sp>
-      <p:sp>
-        <p:nvSpPr>
-          <p:cNvPr id="37" name="Shape 35"/>
-          <p:cNvSpPr/>
-          <p:nvPr/>
-        </p:nvSpPr>
-        <p:spPr>
-          <a:xfrm>
-            <a:off x="4297680" y="4434840"/>
-            <a:ext cx="3566160" cy="1234440"/>
+            <a:endParaRPr lang="en-US" sz="1350" dirty="0"/>
+          </a:p>
+        </p:txBody>
+      </p:sp>
+      <p:sp>
+        <p:nvSpPr>
+          <p:cNvPr id="33" name="Shape 31"/>
+          <p:cNvSpPr/>
+          <p:nvPr/>
+        </p:nvSpPr>
+        <p:spPr>
+          <a:xfrm>
+            <a:off x="4297680" y="4343400"/>
+            <a:ext cx="3566160" cy="1280160"/>
           </a:xfrm>
           <a:prstGeom prst="roundRect">
             <a:avLst>
-              <a:gd name="adj" fmla="val 5926"/>
+              <a:gd name="adj" fmla="val 5714"/>
             </a:avLst>
           </a:prstGeom>
           <a:solidFill>
@@ -9873,14 +9427,14 @@
       </p:sp>
       <p:sp>
         <p:nvSpPr>
-          <p:cNvPr id="38" name="Shape 36"/>
-          <p:cNvSpPr/>
-          <p:nvPr/>
-        </p:nvSpPr>
-        <p:spPr>
-          <a:xfrm>
-            <a:off x="4297680" y="4434840"/>
-            <a:ext cx="73152" cy="1234440"/>
+          <p:cNvPr id="34" name="Shape 32"/>
+          <p:cNvSpPr/>
+          <p:nvPr/>
+        </p:nvSpPr>
+        <p:spPr>
+          <a:xfrm>
+            <a:off x="4297680" y="4343400"/>
+            <a:ext cx="73152" cy="1280160"/>
           </a:xfrm>
           <a:prstGeom prst="rect">
             <a:avLst/>
@@ -9893,14 +9447,14 @@
       </p:sp>
       <p:sp>
         <p:nvSpPr>
-          <p:cNvPr id="39" name="Text 37"/>
-          <p:cNvSpPr/>
-          <p:nvPr/>
-        </p:nvSpPr>
-        <p:spPr>
-          <a:xfrm>
-            <a:off x="4480560" y="4544568"/>
-            <a:ext cx="3291840" cy="365760"/>
+          <p:cNvPr id="35" name="Text 33"/>
+          <p:cNvSpPr/>
+          <p:nvPr/>
+        </p:nvSpPr>
+        <p:spPr>
+          <a:xfrm>
+            <a:off x="4498848" y="4434840"/>
+            <a:ext cx="3236976" cy="1097280"/>
           </a:xfrm>
           <a:prstGeom prst="rect">
             <a:avLst/>
@@ -9913,10 +9467,13 @@
           <a:lstStyle/>
           <a:p>
             <a:pPr indent="0" marL="0">
-              <a:buNone/>
-            </a:pPr>
-            <a:r>
-              <a:rPr lang="en-US" sz="1400" b="1" dirty="0">
+              <a:lnSpc>
+                <a:spcPct val="105000"/>
+              </a:lnSpc>
+              <a:buNone/>
+            </a:pPr>
+            <a:r>
+              <a:rPr lang="en-US" sz="1350" b="1" dirty="0">
                 <a:solidFill>
                   <a:srgbClr val="6C63FF"/>
                 </a:solidFill>
@@ -9924,34 +9481,16 @@
                 <a:ea typeface="Segoe UI" pitchFamily="34" charset="-122"/>
                 <a:cs typeface="Segoe UI" pitchFamily="34" charset="-120"/>
               </a:rPr>
-              <a:t>Parent Assistant</a:t>
-            </a:r>
-            <a:endParaRPr lang="en-US" sz="1400" dirty="0"/>
-          </a:p>
-        </p:txBody>
-      </p:sp>
-      <p:sp>
-        <p:nvSpPr>
-          <p:cNvPr id="40" name="Text 38"/>
-          <p:cNvSpPr/>
-          <p:nvPr/>
-        </p:nvSpPr>
-        <p:spPr>
-          <a:xfrm>
-            <a:off x="4480560" y="4937760"/>
-            <a:ext cx="3246120" cy="640080"/>
-          </a:xfrm>
-          <a:prstGeom prst="rect">
-            <a:avLst/>
-          </a:prstGeom>
-          <a:noFill/>
-          <a:ln/>
-        </p:spPr>
-        <p:txBody>
-          <a:bodyPr wrap="square" rtlCol="0" anchor="t"/>
-          <a:lstStyle/>
+              <a:t>Parent Assistant
+</a:t>
+            </a:r>
+            <a:endParaRPr lang="en-US" sz="1350" dirty="0"/>
+          </a:p>
           <a:p>
             <a:pPr indent="0" marL="0">
+              <a:lnSpc>
+                <a:spcPct val="105000"/>
+              </a:lnSpc>
               <a:buNone/>
             </a:pPr>
             <a:r>
@@ -9965,24 +9504,24 @@
               </a:rPr>
               <a:t>Weekly insights &amp; smart alerts</a:t>
             </a:r>
-            <a:endParaRPr lang="en-US" sz="1150" dirty="0"/>
-          </a:p>
-        </p:txBody>
-      </p:sp>
-      <p:sp>
-        <p:nvSpPr>
-          <p:cNvPr id="41" name="Shape 39"/>
-          <p:cNvSpPr/>
-          <p:nvPr/>
-        </p:nvSpPr>
-        <p:spPr>
-          <a:xfrm>
-            <a:off x="8046720" y="4434840"/>
-            <a:ext cx="3566160" cy="1234440"/>
+            <a:endParaRPr lang="en-US" sz="1350" dirty="0"/>
+          </a:p>
+        </p:txBody>
+      </p:sp>
+      <p:sp>
+        <p:nvSpPr>
+          <p:cNvPr id="36" name="Shape 34"/>
+          <p:cNvSpPr/>
+          <p:nvPr/>
+        </p:nvSpPr>
+        <p:spPr>
+          <a:xfrm>
+            <a:off x="8046720" y="4343400"/>
+            <a:ext cx="3566160" cy="1280160"/>
           </a:xfrm>
           <a:prstGeom prst="roundRect">
             <a:avLst>
-              <a:gd name="adj" fmla="val 5926"/>
+              <a:gd name="adj" fmla="val 5714"/>
             </a:avLst>
           </a:prstGeom>
           <a:solidFill>
@@ -9998,14 +9537,14 @@
       </p:sp>
       <p:sp>
         <p:nvSpPr>
-          <p:cNvPr id="42" name="Shape 40"/>
-          <p:cNvSpPr/>
-          <p:nvPr/>
-        </p:nvSpPr>
-        <p:spPr>
-          <a:xfrm>
-            <a:off x="8046720" y="4434840"/>
-            <a:ext cx="73152" cy="1234440"/>
+          <p:cNvPr id="37" name="Shape 35"/>
+          <p:cNvSpPr/>
+          <p:nvPr/>
+        </p:nvSpPr>
+        <p:spPr>
+          <a:xfrm>
+            <a:off x="8046720" y="4343400"/>
+            <a:ext cx="73152" cy="1280160"/>
           </a:xfrm>
           <a:prstGeom prst="rect">
             <a:avLst/>
@@ -10018,14 +9557,14 @@
       </p:sp>
       <p:sp>
         <p:nvSpPr>
-          <p:cNvPr id="43" name="Text 41"/>
-          <p:cNvSpPr/>
-          <p:nvPr/>
-        </p:nvSpPr>
-        <p:spPr>
-          <a:xfrm>
-            <a:off x="8229600" y="4544568"/>
-            <a:ext cx="3291840" cy="365760"/>
+          <p:cNvPr id="38" name="Text 36"/>
+          <p:cNvSpPr/>
+          <p:nvPr/>
+        </p:nvSpPr>
+        <p:spPr>
+          <a:xfrm>
+            <a:off x="8247888" y="4434840"/>
+            <a:ext cx="3236976" cy="1097280"/>
           </a:xfrm>
           <a:prstGeom prst="rect">
             <a:avLst/>
@@ -10038,10 +9577,13 @@
           <a:lstStyle/>
           <a:p>
             <a:pPr indent="0" marL="0">
-              <a:buNone/>
-            </a:pPr>
-            <a:r>
-              <a:rPr lang="en-US" sz="1400" b="1" dirty="0">
+              <a:lnSpc>
+                <a:spcPct val="105000"/>
+              </a:lnSpc>
+              <a:buNone/>
+            </a:pPr>
+            <a:r>
+              <a:rPr lang="en-US" sz="1350" b="1" dirty="0">
                 <a:solidFill>
                   <a:srgbClr val="3F3D9E"/>
                 </a:solidFill>
@@ -10049,34 +9591,16 @@
                 <a:ea typeface="Segoe UI" pitchFamily="34" charset="-122"/>
                 <a:cs typeface="Segoe UI" pitchFamily="34" charset="-120"/>
               </a:rPr>
-              <a:t>Content Moderation</a:t>
-            </a:r>
-            <a:endParaRPr lang="en-US" sz="1400" dirty="0"/>
-          </a:p>
-        </p:txBody>
-      </p:sp>
-      <p:sp>
-        <p:nvSpPr>
-          <p:cNvPr id="44" name="Text 42"/>
-          <p:cNvSpPr/>
-          <p:nvPr/>
-        </p:nvSpPr>
-        <p:spPr>
-          <a:xfrm>
-            <a:off x="8229600" y="4937760"/>
-            <a:ext cx="3246120" cy="640080"/>
-          </a:xfrm>
-          <a:prstGeom prst="rect">
-            <a:avLst/>
-          </a:prstGeom>
-          <a:noFill/>
-          <a:ln/>
-        </p:spPr>
-        <p:txBody>
-          <a:bodyPr wrap="square" rtlCol="0" anchor="t"/>
-          <a:lstStyle/>
+              <a:t>Content Moderation
+</a:t>
+            </a:r>
+            <a:endParaRPr lang="en-US" sz="1350" dirty="0"/>
+          </a:p>
           <a:p>
             <a:pPr indent="0" marL="0">
+              <a:lnSpc>
+                <a:spcPct val="105000"/>
+              </a:lnSpc>
               <a:buNone/>
             </a:pPr>
             <a:r>
@@ -10090,13 +9614,13 @@
               </a:rPr>
               <a:t>Scans content before it reaches a child</a:t>
             </a:r>
-            <a:endParaRPr lang="en-US" sz="1150" dirty="0"/>
-          </a:p>
-        </p:txBody>
-      </p:sp>
-      <p:sp>
-        <p:nvSpPr>
-          <p:cNvPr id="45" name="Text 43"/>
+            <a:endParaRPr lang="en-US" sz="1350" dirty="0"/>
+          </a:p>
+        </p:txBody>
+      </p:sp>
+      <p:sp>
+        <p:nvSpPr>
+          <p:cNvPr id="39" name="Text 37"/>
           <p:cNvSpPr/>
           <p:nvPr/>
         </p:nvSpPr>
@@ -10135,7 +9659,7 @@
       </p:sp>
       <p:sp>
         <p:nvSpPr>
-          <p:cNvPr id="46" name="Text 44"/>
+          <p:cNvPr id="40" name="Text 38"/>
           <p:cNvSpPr/>
           <p:nvPr/>
         </p:nvSpPr>
@@ -10177,6 +9701,9 @@
   <p:clrMapOvr>
     <a:masterClrMapping/>
   </p:clrMapOvr>
+  <p:transition xmlns:p="http://schemas.openxmlformats.org/presentationml/2006/main" spd="med">
+    <p:fade/>
+  </p:transition>
 </p:sld>
 </file>
 
@@ -10313,7 +9840,7 @@
         <p:spPr>
           <a:xfrm>
             <a:off x="1298448" y="1097280"/>
-            <a:ext cx="2011680" cy="54864"/>
+            <a:ext cx="1828800" cy="45720"/>
           </a:xfrm>
           <a:prstGeom prst="rect">
             <a:avLst/>
@@ -11017,6 +10544,9 @@
   <p:clrMapOvr>
     <a:masterClrMapping/>
   </p:clrMapOvr>
+  <p:transition xmlns:p="http://schemas.openxmlformats.org/presentationml/2006/main" spd="med">
+    <p:fade/>
+  </p:transition>
 </p:sld>
 </file>
 
@@ -11153,7 +10683,7 @@
         <p:spPr>
           <a:xfrm>
             <a:off x="1298448" y="1097280"/>
-            <a:ext cx="2011680" cy="54864"/>
+            <a:ext cx="1828800" cy="45720"/>
           </a:xfrm>
           <a:prstGeom prst="rect">
             <a:avLst/>
@@ -12720,6 +12250,9 @@
   <p:clrMapOvr>
     <a:masterClrMapping/>
   </p:clrMapOvr>
+  <p:transition xmlns:p="http://schemas.openxmlformats.org/presentationml/2006/main" spd="med">
+    <p:fade/>
+  </p:transition>
 </p:sld>
 </file>
 
@@ -12856,7 +12389,7 @@
         <p:spPr>
           <a:xfrm>
             <a:off x="1298448" y="1097280"/>
-            <a:ext cx="2011680" cy="54864"/>
+            <a:ext cx="1828800" cy="45720"/>
           </a:xfrm>
           <a:prstGeom prst="rect">
             <a:avLst/>
@@ -12875,12 +12408,12 @@
         </p:nvSpPr>
         <p:spPr>
           <a:xfrm>
-            <a:off x="548640" y="1463040"/>
-            <a:ext cx="3566160" cy="2011680"/>
+            <a:off x="548640" y="1508760"/>
+            <a:ext cx="3566160" cy="1554480"/>
           </a:xfrm>
           <a:prstGeom prst="roundRect">
             <a:avLst>
-              <a:gd name="adj" fmla="val 3636"/>
+              <a:gd name="adj" fmla="val 4706"/>
             </a:avLst>
           </a:prstGeom>
           <a:solidFill>
@@ -12902,8 +12435,8 @@
         </p:nvSpPr>
         <p:spPr>
           <a:xfrm>
-            <a:off x="548640" y="1463040"/>
-            <a:ext cx="73152" cy="2011680"/>
+            <a:off x="548640" y="1508760"/>
+            <a:ext cx="73152" cy="1554480"/>
           </a:xfrm>
           <a:prstGeom prst="rect">
             <a:avLst/>
@@ -12922,8 +12455,8 @@
         </p:nvSpPr>
         <p:spPr>
           <a:xfrm>
-            <a:off x="731520" y="1572768"/>
-            <a:ext cx="3291840" cy="365760"/>
+            <a:off x="749808" y="1600200"/>
+            <a:ext cx="3236976" cy="1371600"/>
           </a:xfrm>
           <a:prstGeom prst="rect">
             <a:avLst/>
@@ -12936,10 +12469,13 @@
           <a:lstStyle/>
           <a:p>
             <a:pPr indent="0" marL="0">
-              <a:buNone/>
-            </a:pPr>
-            <a:r>
-              <a:rPr lang="en-US" sz="1400" b="1" dirty="0">
+              <a:lnSpc>
+                <a:spcPct val="105000"/>
+              </a:lnSpc>
+              <a:buNone/>
+            </a:pPr>
+            <a:r>
+              <a:rPr lang="en-US" sz="1350" b="1" dirty="0">
                 <a:solidFill>
                   <a:srgbClr val="6C63FF"/>
                 </a:solidFill>
@@ -12947,34 +12483,16 @@
                 <a:ea typeface="Segoe UI" pitchFamily="34" charset="-122"/>
                 <a:cs typeface="Segoe UI" pitchFamily="34" charset="-120"/>
               </a:rPr>
-              <a:t>🔒 Parental Consent</a:t>
-            </a:r>
-            <a:endParaRPr lang="en-US" sz="1400" dirty="0"/>
-          </a:p>
-        </p:txBody>
-      </p:sp>
-      <p:sp>
-        <p:nvSpPr>
-          <p:cNvPr id="9" name="Text 7"/>
-          <p:cNvSpPr/>
-          <p:nvPr/>
-        </p:nvSpPr>
-        <p:spPr>
-          <a:xfrm>
-            <a:off x="731520" y="1965960"/>
-            <a:ext cx="3246120" cy="1417320"/>
-          </a:xfrm>
-          <a:prstGeom prst="rect">
-            <a:avLst/>
-          </a:prstGeom>
-          <a:noFill/>
-          <a:ln/>
-        </p:spPr>
-        <p:txBody>
-          <a:bodyPr wrap="square" rtlCol="0" anchor="t"/>
-          <a:lstStyle/>
+              <a:t>🔒 Parental Consent
+</a:t>
+            </a:r>
+            <a:endParaRPr lang="en-US" sz="1350" dirty="0"/>
+          </a:p>
           <a:p>
             <a:pPr indent="0" marL="0">
+              <a:lnSpc>
+                <a:spcPct val="105000"/>
+              </a:lnSpc>
               <a:buNone/>
             </a:pPr>
             <a:r>
@@ -12986,26 +12504,26 @@
                 <a:ea typeface="Segoe UI" pitchFamily="34" charset="-122"/>
                 <a:cs typeface="Segoe UI" pitchFamily="34" charset="-120"/>
               </a:rPr>
-              <a:t>Friends &amp; classrooms activate ONLY after a parent approves</a:t>
-            </a:r>
-            <a:endParaRPr lang="en-US" sz="1150" dirty="0"/>
-          </a:p>
-        </p:txBody>
-      </p:sp>
-      <p:sp>
-        <p:nvSpPr>
-          <p:cNvPr id="10" name="Shape 8"/>
-          <p:cNvSpPr/>
-          <p:nvPr/>
-        </p:nvSpPr>
-        <p:spPr>
-          <a:xfrm>
-            <a:off x="4297680" y="1463040"/>
-            <a:ext cx="3566160" cy="2011680"/>
+              <a:t>Friends &amp; classrooms activate only after a parent approves</a:t>
+            </a:r>
+            <a:endParaRPr lang="en-US" sz="1350" dirty="0"/>
+          </a:p>
+        </p:txBody>
+      </p:sp>
+      <p:sp>
+        <p:nvSpPr>
+          <p:cNvPr id="9" name="Shape 7"/>
+          <p:cNvSpPr/>
+          <p:nvPr/>
+        </p:nvSpPr>
+        <p:spPr>
+          <a:xfrm>
+            <a:off x="4297680" y="1508760"/>
+            <a:ext cx="3566160" cy="1554480"/>
           </a:xfrm>
           <a:prstGeom prst="roundRect">
             <a:avLst>
-              <a:gd name="adj" fmla="val 3636"/>
+              <a:gd name="adj" fmla="val 4706"/>
             </a:avLst>
           </a:prstGeom>
           <a:solidFill>
@@ -13021,14 +12539,14 @@
       </p:sp>
       <p:sp>
         <p:nvSpPr>
-          <p:cNvPr id="11" name="Shape 9"/>
-          <p:cNvSpPr/>
-          <p:nvPr/>
-        </p:nvSpPr>
-        <p:spPr>
-          <a:xfrm>
-            <a:off x="4297680" y="1463040"/>
-            <a:ext cx="73152" cy="2011680"/>
+          <p:cNvPr id="10" name="Shape 8"/>
+          <p:cNvSpPr/>
+          <p:nvPr/>
+        </p:nvSpPr>
+        <p:spPr>
+          <a:xfrm>
+            <a:off x="4297680" y="1508760"/>
+            <a:ext cx="73152" cy="1554480"/>
           </a:xfrm>
           <a:prstGeom prst="rect">
             <a:avLst/>
@@ -13041,14 +12559,14 @@
       </p:sp>
       <p:sp>
         <p:nvSpPr>
-          <p:cNvPr id="12" name="Text 10"/>
-          <p:cNvSpPr/>
-          <p:nvPr/>
-        </p:nvSpPr>
-        <p:spPr>
-          <a:xfrm>
-            <a:off x="4480560" y="1572768"/>
-            <a:ext cx="3291840" cy="365760"/>
+          <p:cNvPr id="11" name="Text 9"/>
+          <p:cNvSpPr/>
+          <p:nvPr/>
+        </p:nvSpPr>
+        <p:spPr>
+          <a:xfrm>
+            <a:off x="4498848" y="1600200"/>
+            <a:ext cx="3236976" cy="1371600"/>
           </a:xfrm>
           <a:prstGeom prst="rect">
             <a:avLst/>
@@ -13061,10 +12579,13 @@
           <a:lstStyle/>
           <a:p>
             <a:pPr indent="0" marL="0">
-              <a:buNone/>
-            </a:pPr>
-            <a:r>
-              <a:rPr lang="en-US" sz="1400" b="1" dirty="0">
+              <a:lnSpc>
+                <a:spcPct val="105000"/>
+              </a:lnSpc>
+              <a:buNone/>
+            </a:pPr>
+            <a:r>
+              <a:rPr lang="en-US" sz="1350" b="1" dirty="0">
                 <a:solidFill>
                   <a:srgbClr val="10B981"/>
                 </a:solidFill>
@@ -13072,34 +12593,16 @@
                 <a:ea typeface="Segoe UI" pitchFamily="34" charset="-122"/>
                 <a:cs typeface="Segoe UI" pitchFamily="34" charset="-120"/>
               </a:rPr>
-              <a:t>🎚️ Age-Gated Content</a:t>
-            </a:r>
-            <a:endParaRPr lang="en-US" sz="1400" dirty="0"/>
-          </a:p>
-        </p:txBody>
-      </p:sp>
-      <p:sp>
-        <p:nvSpPr>
-          <p:cNvPr id="13" name="Text 11"/>
-          <p:cNvSpPr/>
-          <p:nvPr/>
-        </p:nvSpPr>
-        <p:spPr>
-          <a:xfrm>
-            <a:off x="4480560" y="1965960"/>
-            <a:ext cx="3246120" cy="1417320"/>
-          </a:xfrm>
-          <a:prstGeom prst="rect">
-            <a:avLst/>
-          </a:prstGeom>
-          <a:noFill/>
-          <a:ln/>
-        </p:spPr>
-        <p:txBody>
-          <a:bodyPr wrap="square" rtlCol="0" anchor="t"/>
-          <a:lstStyle/>
+              <a:t>🎚️ Age-Gated Content
+</a:t>
+            </a:r>
+            <a:endParaRPr lang="en-US" sz="1350" dirty="0"/>
+          </a:p>
           <a:p>
             <a:pPr indent="0" marL="0">
+              <a:lnSpc>
+                <a:spcPct val="105000"/>
+              </a:lnSpc>
               <a:buNone/>
             </a:pPr>
             <a:r>
@@ -13113,24 +12616,24 @@
               </a:rPr>
               <a:t>Each child sees only age-appropriate material</a:t>
             </a:r>
-            <a:endParaRPr lang="en-US" sz="1150" dirty="0"/>
-          </a:p>
-        </p:txBody>
-      </p:sp>
-      <p:sp>
-        <p:nvSpPr>
-          <p:cNvPr id="14" name="Shape 12"/>
-          <p:cNvSpPr/>
-          <p:nvPr/>
-        </p:nvSpPr>
-        <p:spPr>
-          <a:xfrm>
-            <a:off x="8046720" y="1463040"/>
-            <a:ext cx="3566160" cy="2011680"/>
+            <a:endParaRPr lang="en-US" sz="1350" dirty="0"/>
+          </a:p>
+        </p:txBody>
+      </p:sp>
+      <p:sp>
+        <p:nvSpPr>
+          <p:cNvPr id="12" name="Shape 10"/>
+          <p:cNvSpPr/>
+          <p:nvPr/>
+        </p:nvSpPr>
+        <p:spPr>
+          <a:xfrm>
+            <a:off x="8046720" y="1508760"/>
+            <a:ext cx="3566160" cy="1554480"/>
           </a:xfrm>
           <a:prstGeom prst="roundRect">
             <a:avLst>
-              <a:gd name="adj" fmla="val 3636"/>
+              <a:gd name="adj" fmla="val 4706"/>
             </a:avLst>
           </a:prstGeom>
           <a:solidFill>
@@ -13146,116 +12649,101 @@
       </p:sp>
       <p:sp>
         <p:nvSpPr>
+          <p:cNvPr id="13" name="Shape 11"/>
+          <p:cNvSpPr/>
+          <p:nvPr/>
+        </p:nvSpPr>
+        <p:spPr>
+          <a:xfrm>
+            <a:off x="8046720" y="1508760"/>
+            <a:ext cx="73152" cy="1554480"/>
+          </a:xfrm>
+          <a:prstGeom prst="rect">
+            <a:avLst/>
+          </a:prstGeom>
+          <a:solidFill>
+            <a:srgbClr val="6C63FF"/>
+          </a:solidFill>
+          <a:ln/>
+        </p:spPr>
+      </p:sp>
+      <p:sp>
+        <p:nvSpPr>
+          <p:cNvPr id="14" name="Text 12"/>
+          <p:cNvSpPr/>
+          <p:nvPr/>
+        </p:nvSpPr>
+        <p:spPr>
+          <a:xfrm>
+            <a:off x="8247888" y="1600200"/>
+            <a:ext cx="3236976" cy="1371600"/>
+          </a:xfrm>
+          <a:prstGeom prst="rect">
+            <a:avLst/>
+          </a:prstGeom>
+          <a:noFill/>
+          <a:ln/>
+        </p:spPr>
+        <p:txBody>
+          <a:bodyPr wrap="square" rtlCol="0" anchor="ctr"/>
+          <a:lstStyle/>
+          <a:p>
+            <a:pPr indent="0" marL="0">
+              <a:lnSpc>
+                <a:spcPct val="105000"/>
+              </a:lnSpc>
+              <a:buNone/>
+            </a:pPr>
+            <a:r>
+              <a:rPr lang="en-US" sz="1350" b="1" dirty="0">
+                <a:solidFill>
+                  <a:srgbClr val="6C63FF"/>
+                </a:solidFill>
+                <a:latin typeface="Segoe UI" pitchFamily="34" charset="0"/>
+                <a:ea typeface="Segoe UI" pitchFamily="34" charset="-122"/>
+                <a:cs typeface="Segoe UI" pitchFamily="34" charset="-120"/>
+              </a:rPr>
+              <a:t>🧹 Content Moderation
+</a:t>
+            </a:r>
+            <a:endParaRPr lang="en-US" sz="1350" dirty="0"/>
+          </a:p>
+          <a:p>
+            <a:pPr indent="0" marL="0">
+              <a:lnSpc>
+                <a:spcPct val="105000"/>
+              </a:lnSpc>
+              <a:buNone/>
+            </a:pPr>
+            <a:r>
+              <a:rPr lang="en-US" sz="1150" dirty="0">
+                <a:solidFill>
+                  <a:srgbClr val="1A1A2E"/>
+                </a:solidFill>
+                <a:latin typeface="Segoe UI" pitchFamily="34" charset="0"/>
+                <a:ea typeface="Segoe UI" pitchFamily="34" charset="-122"/>
+                <a:cs typeface="Segoe UI" pitchFamily="34" charset="-120"/>
+              </a:rPr>
+              <a:t>Messages &amp; content screened for unsafe language</a:t>
+            </a:r>
+            <a:endParaRPr lang="en-US" sz="1350" dirty="0"/>
+          </a:p>
+        </p:txBody>
+      </p:sp>
+      <p:sp>
+        <p:nvSpPr>
           <p:cNvPr id="15" name="Shape 13"/>
           <p:cNvSpPr/>
           <p:nvPr/>
         </p:nvSpPr>
         <p:spPr>
           <a:xfrm>
-            <a:off x="8046720" y="1463040"/>
-            <a:ext cx="73152" cy="2011680"/>
-          </a:xfrm>
-          <a:prstGeom prst="rect">
-            <a:avLst/>
-          </a:prstGeom>
-          <a:solidFill>
-            <a:srgbClr val="6C63FF"/>
-          </a:solidFill>
-          <a:ln/>
-        </p:spPr>
-      </p:sp>
-      <p:sp>
-        <p:nvSpPr>
-          <p:cNvPr id="16" name="Text 14"/>
-          <p:cNvSpPr/>
-          <p:nvPr/>
-        </p:nvSpPr>
-        <p:spPr>
-          <a:xfrm>
-            <a:off x="8229600" y="1572768"/>
-            <a:ext cx="3291840" cy="365760"/>
-          </a:xfrm>
-          <a:prstGeom prst="rect">
-            <a:avLst/>
-          </a:prstGeom>
-          <a:noFill/>
-          <a:ln/>
-        </p:spPr>
-        <p:txBody>
-          <a:bodyPr wrap="square" rtlCol="0" anchor="ctr"/>
-          <a:lstStyle/>
-          <a:p>
-            <a:pPr indent="0" marL="0">
-              <a:buNone/>
-            </a:pPr>
-            <a:r>
-              <a:rPr lang="en-US" sz="1400" b="1" dirty="0">
-                <a:solidFill>
-                  <a:srgbClr val="6C63FF"/>
-                </a:solidFill>
-                <a:latin typeface="Segoe UI" pitchFamily="34" charset="0"/>
-                <a:ea typeface="Segoe UI" pitchFamily="34" charset="-122"/>
-                <a:cs typeface="Segoe UI" pitchFamily="34" charset="-120"/>
-              </a:rPr>
-              <a:t>🧹 Content Moderation</a:t>
-            </a:r>
-            <a:endParaRPr lang="en-US" sz="1400" dirty="0"/>
-          </a:p>
-        </p:txBody>
-      </p:sp>
-      <p:sp>
-        <p:nvSpPr>
-          <p:cNvPr id="17" name="Text 15"/>
-          <p:cNvSpPr/>
-          <p:nvPr/>
-        </p:nvSpPr>
-        <p:spPr>
-          <a:xfrm>
-            <a:off x="8229600" y="1965960"/>
-            <a:ext cx="3246120" cy="1417320"/>
-          </a:xfrm>
-          <a:prstGeom prst="rect">
-            <a:avLst/>
-          </a:prstGeom>
-          <a:noFill/>
-          <a:ln/>
-        </p:spPr>
-        <p:txBody>
-          <a:bodyPr wrap="square" rtlCol="0" anchor="t"/>
-          <a:lstStyle/>
-          <a:p>
-            <a:pPr indent="0" marL="0">
-              <a:buNone/>
-            </a:pPr>
-            <a:r>
-              <a:rPr lang="en-US" sz="1150" dirty="0">
-                <a:solidFill>
-                  <a:srgbClr val="1A1A2E"/>
-                </a:solidFill>
-                <a:latin typeface="Segoe UI" pitchFamily="34" charset="0"/>
-                <a:ea typeface="Segoe UI" pitchFamily="34" charset="-122"/>
-                <a:cs typeface="Segoe UI" pitchFamily="34" charset="-120"/>
-              </a:rPr>
-              <a:t>Messages &amp; content screened for unsafe language</a:t>
-            </a:r>
-            <a:endParaRPr lang="en-US" sz="1150" dirty="0"/>
-          </a:p>
-        </p:txBody>
-      </p:sp>
-      <p:sp>
-        <p:nvSpPr>
-          <p:cNvPr id="18" name="Shape 16"/>
-          <p:cNvSpPr/>
-          <p:nvPr/>
-        </p:nvSpPr>
-        <p:spPr>
-          <a:xfrm>
-            <a:off x="548640" y="3703320"/>
-            <a:ext cx="3566160" cy="2011680"/>
+            <a:off x="548640" y="3291840"/>
+            <a:ext cx="3566160" cy="1554480"/>
           </a:xfrm>
           <a:prstGeom prst="roundRect">
             <a:avLst>
-              <a:gd name="adj" fmla="val 3636"/>
+              <a:gd name="adj" fmla="val 4706"/>
             </a:avLst>
           </a:prstGeom>
           <a:solidFill>
@@ -13271,14 +12759,14 @@
       </p:sp>
       <p:sp>
         <p:nvSpPr>
-          <p:cNvPr id="19" name="Shape 17"/>
-          <p:cNvSpPr/>
-          <p:nvPr/>
-        </p:nvSpPr>
-        <p:spPr>
-          <a:xfrm>
-            <a:off x="548640" y="3703320"/>
-            <a:ext cx="73152" cy="2011680"/>
+          <p:cNvPr id="16" name="Shape 14"/>
+          <p:cNvSpPr/>
+          <p:nvPr/>
+        </p:nvSpPr>
+        <p:spPr>
+          <a:xfrm>
+            <a:off x="548640" y="3291840"/>
+            <a:ext cx="73152" cy="1554480"/>
           </a:xfrm>
           <a:prstGeom prst="rect">
             <a:avLst/>
@@ -13291,14 +12779,14 @@
       </p:sp>
       <p:sp>
         <p:nvSpPr>
-          <p:cNvPr id="20" name="Text 18"/>
-          <p:cNvSpPr/>
-          <p:nvPr/>
-        </p:nvSpPr>
-        <p:spPr>
-          <a:xfrm>
-            <a:off x="731520" y="3813048"/>
-            <a:ext cx="3291840" cy="365760"/>
+          <p:cNvPr id="17" name="Text 15"/>
+          <p:cNvSpPr/>
+          <p:nvPr/>
+        </p:nvSpPr>
+        <p:spPr>
+          <a:xfrm>
+            <a:off x="749808" y="3383280"/>
+            <a:ext cx="3236976" cy="1371600"/>
           </a:xfrm>
           <a:prstGeom prst="rect">
             <a:avLst/>
@@ -13311,10 +12799,13 @@
           <a:lstStyle/>
           <a:p>
             <a:pPr indent="0" marL="0">
-              <a:buNone/>
-            </a:pPr>
-            <a:r>
-              <a:rPr lang="en-US" sz="1400" b="1" dirty="0">
+              <a:lnSpc>
+                <a:spcPct val="105000"/>
+              </a:lnSpc>
+              <a:buNone/>
+            </a:pPr>
+            <a:r>
+              <a:rPr lang="en-US" sz="1350" b="1" dirty="0">
                 <a:solidFill>
                   <a:srgbClr val="10B981"/>
                 </a:solidFill>
@@ -13322,34 +12813,16 @@
                 <a:ea typeface="Segoe UI" pitchFamily="34" charset="-122"/>
                 <a:cs typeface="Segoe UI" pitchFamily="34" charset="-120"/>
               </a:rPr>
-              <a:t>🗄️ Data Minimization</a:t>
-            </a:r>
-            <a:endParaRPr lang="en-US" sz="1400" dirty="0"/>
-          </a:p>
-        </p:txBody>
-      </p:sp>
-      <p:sp>
-        <p:nvSpPr>
-          <p:cNvPr id="21" name="Text 19"/>
-          <p:cNvSpPr/>
-          <p:nvPr/>
-        </p:nvSpPr>
-        <p:spPr>
-          <a:xfrm>
-            <a:off x="731520" y="4206240"/>
-            <a:ext cx="3246120" cy="1417320"/>
-          </a:xfrm>
-          <a:prstGeom prst="rect">
-            <a:avLst/>
-          </a:prstGeom>
-          <a:noFill/>
-          <a:ln/>
-        </p:spPr>
-        <p:txBody>
-          <a:bodyPr wrap="square" rtlCol="0" anchor="t"/>
-          <a:lstStyle/>
+              <a:t>🗄️ Data Minimization
+</a:t>
+            </a:r>
+            <a:endParaRPr lang="en-US" sz="1350" dirty="0"/>
+          </a:p>
           <a:p>
             <a:pPr indent="0" marL="0">
+              <a:lnSpc>
+                <a:spcPct val="105000"/>
+              </a:lnSpc>
               <a:buNone/>
             </a:pPr>
             <a:r>
@@ -13363,24 +12836,24 @@
               </a:rPr>
               <a:t>Only learning data stored · no ads · no trackers</a:t>
             </a:r>
-            <a:endParaRPr lang="en-US" sz="1150" dirty="0"/>
-          </a:p>
-        </p:txBody>
-      </p:sp>
-      <p:sp>
-        <p:nvSpPr>
-          <p:cNvPr id="22" name="Shape 20"/>
-          <p:cNvSpPr/>
-          <p:nvPr/>
-        </p:nvSpPr>
-        <p:spPr>
-          <a:xfrm>
-            <a:off x="4297680" y="3703320"/>
-            <a:ext cx="3566160" cy="2011680"/>
+            <a:endParaRPr lang="en-US" sz="1350" dirty="0"/>
+          </a:p>
+        </p:txBody>
+      </p:sp>
+      <p:sp>
+        <p:nvSpPr>
+          <p:cNvPr id="18" name="Shape 16"/>
+          <p:cNvSpPr/>
+          <p:nvPr/>
+        </p:nvSpPr>
+        <p:spPr>
+          <a:xfrm>
+            <a:off x="4297680" y="3291840"/>
+            <a:ext cx="3566160" cy="1554480"/>
           </a:xfrm>
           <a:prstGeom prst="roundRect">
             <a:avLst>
-              <a:gd name="adj" fmla="val 3636"/>
+              <a:gd name="adj" fmla="val 4706"/>
             </a:avLst>
           </a:prstGeom>
           <a:solidFill>
@@ -13396,14 +12869,14 @@
       </p:sp>
       <p:sp>
         <p:nvSpPr>
-          <p:cNvPr id="23" name="Shape 21"/>
-          <p:cNvSpPr/>
-          <p:nvPr/>
-        </p:nvSpPr>
-        <p:spPr>
-          <a:xfrm>
-            <a:off x="4297680" y="3703320"/>
-            <a:ext cx="73152" cy="2011680"/>
+          <p:cNvPr id="19" name="Shape 17"/>
+          <p:cNvSpPr/>
+          <p:nvPr/>
+        </p:nvSpPr>
+        <p:spPr>
+          <a:xfrm>
+            <a:off x="4297680" y="3291840"/>
+            <a:ext cx="73152" cy="1554480"/>
           </a:xfrm>
           <a:prstGeom prst="rect">
             <a:avLst/>
@@ -13416,14 +12889,14 @@
       </p:sp>
       <p:sp>
         <p:nvSpPr>
-          <p:cNvPr id="24" name="Text 22"/>
-          <p:cNvSpPr/>
-          <p:nvPr/>
-        </p:nvSpPr>
-        <p:spPr>
-          <a:xfrm>
-            <a:off x="4480560" y="3813048"/>
-            <a:ext cx="3291840" cy="365760"/>
+          <p:cNvPr id="20" name="Text 18"/>
+          <p:cNvSpPr/>
+          <p:nvPr/>
+        </p:nvSpPr>
+        <p:spPr>
+          <a:xfrm>
+            <a:off x="4498848" y="3383280"/>
+            <a:ext cx="3236976" cy="1371600"/>
           </a:xfrm>
           <a:prstGeom prst="rect">
             <a:avLst/>
@@ -13436,10 +12909,13 @@
           <a:lstStyle/>
           <a:p>
             <a:pPr indent="0" marL="0">
-              <a:buNone/>
-            </a:pPr>
-            <a:r>
-              <a:rPr lang="en-US" sz="1400" b="1" dirty="0">
+              <a:lnSpc>
+                <a:spcPct val="105000"/>
+              </a:lnSpc>
+              <a:buNone/>
+            </a:pPr>
+            <a:r>
+              <a:rPr lang="en-US" sz="1350" b="1" dirty="0">
                 <a:solidFill>
                   <a:srgbClr val="6C63FF"/>
                 </a:solidFill>
@@ -13447,34 +12923,16 @@
                 <a:ea typeface="Segoe UI" pitchFamily="34" charset="-122"/>
                 <a:cs typeface="Segoe UI" pitchFamily="34" charset="-120"/>
               </a:rPr>
-              <a:t>🛡️ COPPA-Aligned</a:t>
-            </a:r>
-            <a:endParaRPr lang="en-US" sz="1400" dirty="0"/>
-          </a:p>
-        </p:txBody>
-      </p:sp>
-      <p:sp>
-        <p:nvSpPr>
-          <p:cNvPr id="25" name="Text 23"/>
-          <p:cNvSpPr/>
-          <p:nvPr/>
-        </p:nvSpPr>
-        <p:spPr>
-          <a:xfrm>
-            <a:off x="4480560" y="4206240"/>
-            <a:ext cx="3246120" cy="1417320"/>
-          </a:xfrm>
-          <a:prstGeom prst="rect">
-            <a:avLst/>
-          </a:prstGeom>
-          <a:noFill/>
-          <a:ln/>
-        </p:spPr>
-        <p:txBody>
-          <a:bodyPr wrap="square" rtlCol="0" anchor="t"/>
-          <a:lstStyle/>
+              <a:t>🛡️ COPPA-Aligned
+</a:t>
+            </a:r>
+            <a:endParaRPr lang="en-US" sz="1350" dirty="0"/>
+          </a:p>
           <a:p>
             <a:pPr indent="0" marL="0">
+              <a:lnSpc>
+                <a:spcPct val="105000"/>
+              </a:lnSpc>
               <a:buNone/>
             </a:pPr>
             <a:r>
@@ -13488,24 +12946,24 @@
               </a:rPr>
               <a:t>Privacy-by-design for under-15 users</a:t>
             </a:r>
-            <a:endParaRPr lang="en-US" sz="1150" dirty="0"/>
-          </a:p>
-        </p:txBody>
-      </p:sp>
-      <p:sp>
-        <p:nvSpPr>
-          <p:cNvPr id="26" name="Shape 24"/>
-          <p:cNvSpPr/>
-          <p:nvPr/>
-        </p:nvSpPr>
-        <p:spPr>
-          <a:xfrm>
-            <a:off x="8046720" y="3703320"/>
-            <a:ext cx="3566160" cy="2011680"/>
+            <a:endParaRPr lang="en-US" sz="1350" dirty="0"/>
+          </a:p>
+        </p:txBody>
+      </p:sp>
+      <p:sp>
+        <p:nvSpPr>
+          <p:cNvPr id="21" name="Shape 19"/>
+          <p:cNvSpPr/>
+          <p:nvPr/>
+        </p:nvSpPr>
+        <p:spPr>
+          <a:xfrm>
+            <a:off x="8046720" y="3291840"/>
+            <a:ext cx="3566160" cy="1554480"/>
           </a:xfrm>
           <a:prstGeom prst="roundRect">
             <a:avLst>
-              <a:gd name="adj" fmla="val 3636"/>
+              <a:gd name="adj" fmla="val 4706"/>
             </a:avLst>
           </a:prstGeom>
           <a:solidFill>
@@ -13521,14 +12979,14 @@
       </p:sp>
       <p:sp>
         <p:nvSpPr>
-          <p:cNvPr id="27" name="Shape 25"/>
-          <p:cNvSpPr/>
-          <p:nvPr/>
-        </p:nvSpPr>
-        <p:spPr>
-          <a:xfrm>
-            <a:off x="8046720" y="3703320"/>
-            <a:ext cx="73152" cy="2011680"/>
+          <p:cNvPr id="22" name="Shape 20"/>
+          <p:cNvSpPr/>
+          <p:nvPr/>
+        </p:nvSpPr>
+        <p:spPr>
+          <a:xfrm>
+            <a:off x="8046720" y="3291840"/>
+            <a:ext cx="73152" cy="1554480"/>
           </a:xfrm>
           <a:prstGeom prst="rect">
             <a:avLst/>
@@ -13541,14 +12999,14 @@
       </p:sp>
       <p:sp>
         <p:nvSpPr>
-          <p:cNvPr id="28" name="Text 26"/>
-          <p:cNvSpPr/>
-          <p:nvPr/>
-        </p:nvSpPr>
-        <p:spPr>
-          <a:xfrm>
-            <a:off x="8229600" y="3813048"/>
-            <a:ext cx="3291840" cy="365760"/>
+          <p:cNvPr id="23" name="Text 21"/>
+          <p:cNvSpPr/>
+          <p:nvPr/>
+        </p:nvSpPr>
+        <p:spPr>
+          <a:xfrm>
+            <a:off x="8247888" y="3383280"/>
+            <a:ext cx="3236976" cy="1371600"/>
           </a:xfrm>
           <a:prstGeom prst="rect">
             <a:avLst/>
@@ -13561,10 +13019,13 @@
           <a:lstStyle/>
           <a:p>
             <a:pPr indent="0" marL="0">
-              <a:buNone/>
-            </a:pPr>
-            <a:r>
-              <a:rPr lang="en-US" sz="1400" b="1" dirty="0">
+              <a:lnSpc>
+                <a:spcPct val="105000"/>
+              </a:lnSpc>
+              <a:buNone/>
+            </a:pPr>
+            <a:r>
+              <a:rPr lang="en-US" sz="1350" b="1" dirty="0">
                 <a:solidFill>
                   <a:srgbClr val="10B981"/>
                 </a:solidFill>
@@ -13572,34 +13033,16 @@
                 <a:ea typeface="Segoe UI" pitchFamily="34" charset="-122"/>
                 <a:cs typeface="Segoe UI" pitchFamily="34" charset="-120"/>
               </a:rPr>
-              <a:t>🔑 Role-Based Access</a:t>
-            </a:r>
-            <a:endParaRPr lang="en-US" sz="1400" dirty="0"/>
-          </a:p>
-        </p:txBody>
-      </p:sp>
-      <p:sp>
-        <p:nvSpPr>
-          <p:cNvPr id="29" name="Text 27"/>
-          <p:cNvSpPr/>
-          <p:nvPr/>
-        </p:nvSpPr>
-        <p:spPr>
-          <a:xfrm>
-            <a:off x="8229600" y="4206240"/>
-            <a:ext cx="3246120" cy="1417320"/>
-          </a:xfrm>
-          <a:prstGeom prst="rect">
-            <a:avLst/>
-          </a:prstGeom>
-          <a:noFill/>
-          <a:ln/>
-        </p:spPr>
-        <p:txBody>
-          <a:bodyPr wrap="square" rtlCol="0" anchor="t"/>
-          <a:lstStyle/>
+              <a:t>🔑 Role-Based Access
+</a:t>
+            </a:r>
+            <a:endParaRPr lang="en-US" sz="1350" dirty="0"/>
+          </a:p>
           <a:p>
             <a:pPr indent="0" marL="0">
+              <a:lnSpc>
+                <a:spcPct val="105000"/>
+              </a:lnSpc>
               <a:buNone/>
             </a:pPr>
             <a:r>
@@ -13613,13 +13056,13 @@
               </a:rPr>
               <a:t>Server-side guard blocks cross-account data</a:t>
             </a:r>
-            <a:endParaRPr lang="en-US" sz="1150" dirty="0"/>
-          </a:p>
-        </p:txBody>
-      </p:sp>
-      <p:sp>
-        <p:nvSpPr>
-          <p:cNvPr id="30" name="Text 28"/>
+            <a:endParaRPr lang="en-US" sz="1350" dirty="0"/>
+          </a:p>
+        </p:txBody>
+      </p:sp>
+      <p:sp>
+        <p:nvSpPr>
+          <p:cNvPr id="24" name="Text 22"/>
           <p:cNvSpPr/>
           <p:nvPr/>
         </p:nvSpPr>
@@ -13658,7 +13101,7 @@
       </p:sp>
       <p:sp>
         <p:nvSpPr>
-          <p:cNvPr id="31" name="Text 29"/>
+          <p:cNvPr id="25" name="Text 23"/>
           <p:cNvSpPr/>
           <p:nvPr/>
         </p:nvSpPr>
@@ -13700,6 +13143,9 @@
   <p:clrMapOvr>
     <a:masterClrMapping/>
   </p:clrMapOvr>
+  <p:transition xmlns:p="http://schemas.openxmlformats.org/presentationml/2006/main" spd="med">
+    <p:fade/>
+  </p:transition>
 </p:sld>
 </file>
 
@@ -13836,7 +13282,7 @@
         <p:spPr>
           <a:xfrm>
             <a:off x="1298448" y="1097280"/>
-            <a:ext cx="2011680" cy="54864"/>
+            <a:ext cx="1828800" cy="45720"/>
           </a:xfrm>
           <a:prstGeom prst="rect">
             <a:avLst/>
@@ -13855,8 +13301,8 @@
         </p:nvSpPr>
         <p:spPr>
           <a:xfrm>
-            <a:off x="548640" y="1371600"/>
-            <a:ext cx="4846320" cy="3657600"/>
+            <a:off x="548640" y="1554480"/>
+            <a:ext cx="3931920" cy="3657600"/>
           </a:xfrm>
           <a:prstGeom prst="rect">
             <a:avLst/>
@@ -13870,7 +13316,7 @@
           <a:p>
             <a:pPr marL="342900" indent="-342900">
               <a:spcAft>
-                <a:spcPts val="800"/>
+                <a:spcPts val="1000"/>
               </a:spcAft>
               <a:buSzPct val="100000"/>
               <a:buChar char="•"/>
@@ -13884,14 +13330,14 @@
                 <a:ea typeface="Segoe UI" pitchFamily="34" charset="-122"/>
                 <a:cs typeface="Segoe UI" pitchFamily="34" charset="-120"/>
               </a:rPr>
-              <a:t>Deployed &amp; live: kido-orcin.vercel.app</a:t>
+              <a:t>Live at kido-orcin.vercel.app</a:t>
             </a:r>
             <a:endParaRPr lang="en-US" sz="1500" dirty="0"/>
           </a:p>
           <a:p>
             <a:pPr marL="342900" indent="-342900">
               <a:spcAft>
-                <a:spcPts val="800"/>
+                <a:spcPts val="1000"/>
               </a:spcAft>
               <a:buSzPct val="100000"/>
               <a:buChar char="•"/>
@@ -13912,7 +13358,7 @@
           <a:p>
             <a:pPr marL="342900" indent="-342900">
               <a:spcAft>
-                <a:spcPts val="800"/>
+                <a:spcPts val="1000"/>
               </a:spcAft>
               <a:buSzPct val="100000"/>
               <a:buChar char="•"/>
@@ -13933,7 +13379,7 @@
           <a:p>
             <a:pPr marL="342900" indent="-342900">
               <a:spcAft>
-                <a:spcPts val="800"/>
+                <a:spcPts val="1000"/>
               </a:spcAft>
               <a:buSzPct val="100000"/>
               <a:buChar char="•"/>
@@ -13947,7 +13393,7 @@
                 <a:ea typeface="Segoe UI" pitchFamily="34" charset="-122"/>
                 <a:cs typeface="Segoe UI" pitchFamily="34" charset="-120"/>
               </a:rPr>
-              <a:t>Parent / teacher / child experiences</a:t>
+              <a:t>Parent · teacher · child experiences</a:t>
             </a:r>
             <a:endParaRPr lang="en-US" sz="1500" dirty="0"/>
           </a:p>
@@ -13969,89 +13415,76 @@
         </p:blipFill>
         <p:spPr>
           <a:xfrm>
-            <a:off x="5577840" y="1371600"/>
-            <a:ext cx="3017520" cy="1920240"/>
+            <a:off x="4663440" y="1417320"/>
+            <a:ext cx="6949440" cy="3931920"/>
           </a:xfrm>
           <a:prstGeom prst="rect">
             <a:avLst/>
           </a:prstGeom>
         </p:spPr>
       </p:pic>
-      <p:pic>
-        <p:nvPicPr>
-          <p:cNvPr id="8" name="Image 1" descr="docs/screenshots/tutor.png">    </p:cNvPr>
-          <p:cNvPicPr>
-            <a:picLocks noChangeAspect="1"/>
-          </p:cNvPicPr>
-          <p:nvPr/>
-        </p:nvPicPr>
-        <p:blipFill>
-          <a:blip r:embed="rId2"/>
-          <a:stretch>
-            <a:fillRect/>
-          </a:stretch>
-        </p:blipFill>
-        <p:spPr>
-          <a:xfrm>
-            <a:off x="8732520" y="1371600"/>
-            <a:ext cx="2926080" cy="1828800"/>
-          </a:xfrm>
-          <a:prstGeom prst="rect">
-            <a:avLst/>
-          </a:prstGeom>
-        </p:spPr>
-      </p:pic>
-      <p:pic>
-        <p:nvPicPr>
-          <p:cNvPr id="9" name="Image 2" descr="docs/screenshots/videos.png">    </p:cNvPr>
-          <p:cNvPicPr>
-            <a:picLocks noChangeAspect="1"/>
-          </p:cNvPicPr>
-          <p:nvPr/>
-        </p:nvPicPr>
-        <p:blipFill>
-          <a:blip r:embed="rId3"/>
-          <a:stretch>
-            <a:fillRect/>
-          </a:stretch>
-        </p:blipFill>
-        <p:spPr>
-          <a:xfrm>
-            <a:off x="5577840" y="3474720"/>
-            <a:ext cx="3017520" cy="1920240"/>
-          </a:xfrm>
-          <a:prstGeom prst="rect">
-            <a:avLst/>
-          </a:prstGeom>
-        </p:spPr>
-      </p:pic>
-      <p:pic>
-        <p:nvPicPr>
-          <p:cNvPr id="10" name="Image 3" descr="docs/screenshots/parent-dashboard.png">    </p:cNvPr>
-          <p:cNvPicPr>
-            <a:picLocks noChangeAspect="1"/>
-          </p:cNvPicPr>
-          <p:nvPr/>
-        </p:nvPicPr>
-        <p:blipFill>
-          <a:blip r:embed="rId4"/>
-          <a:stretch>
-            <a:fillRect/>
-          </a:stretch>
-        </p:blipFill>
-        <p:spPr>
-          <a:xfrm>
-            <a:off x="8732520" y="3474720"/>
-            <a:ext cx="2926080" cy="1828800"/>
-          </a:xfrm>
-          <a:prstGeom prst="rect">
-            <a:avLst/>
-          </a:prstGeom>
-        </p:spPr>
-      </p:pic>
-      <p:sp>
-        <p:nvSpPr>
-          <p:cNvPr id="11" name="Text 5"/>
+      <p:sp>
+        <p:nvSpPr>
+          <p:cNvPr id="8" name="Shape 5"/>
+          <p:cNvSpPr/>
+          <p:nvPr/>
+        </p:nvSpPr>
+        <p:spPr>
+          <a:xfrm>
+            <a:off x="4663440" y="5349240"/>
+            <a:ext cx="6949440" cy="18288"/>
+          </a:xfrm>
+          <a:prstGeom prst="rect">
+            <a:avLst/>
+          </a:prstGeom>
+          <a:solidFill>
+            <a:srgbClr val="D8D4FF"/>
+          </a:solidFill>
+          <a:ln/>
+        </p:spPr>
+      </p:sp>
+      <p:sp>
+        <p:nvSpPr>
+          <p:cNvPr id="9" name="Text 6"/>
+          <p:cNvSpPr/>
+          <p:nvPr/>
+        </p:nvSpPr>
+        <p:spPr>
+          <a:xfrm>
+            <a:off x="4663440" y="5394960"/>
+            <a:ext cx="6949440" cy="320040"/>
+          </a:xfrm>
+          <a:prstGeom prst="rect">
+            <a:avLst/>
+          </a:prstGeom>
+          <a:noFill/>
+          <a:ln/>
+        </p:spPr>
+        <p:txBody>
+          <a:bodyPr wrap="square" rtlCol="0" anchor="ctr"/>
+          <a:lstStyle/>
+          <a:p>
+            <a:pPr algn="ctr" indent="0" marL="0">
+              <a:buNone/>
+            </a:pPr>
+            <a:r>
+              <a:rPr lang="en-US" sz="1100" i="1" dirty="0">
+                <a:solidFill>
+                  <a:srgbClr val="6B7280"/>
+                </a:solidFill>
+                <a:latin typeface="Segoe UI" pitchFamily="34" charset="0"/>
+                <a:ea typeface="Segoe UI" pitchFamily="34" charset="-122"/>
+                <a:cs typeface="Segoe UI" pitchFamily="34" charset="-120"/>
+              </a:rPr>
+              <a:t>Child dashboard (live) — XP, subjects, and a parent-pending friend request</a:t>
+            </a:r>
+            <a:endParaRPr lang="en-US" sz="1100" dirty="0"/>
+          </a:p>
+        </p:txBody>
+      </p:sp>
+      <p:sp>
+        <p:nvSpPr>
+          <p:cNvPr id="10" name="Text 7"/>
           <p:cNvSpPr/>
           <p:nvPr/>
         </p:nvSpPr>
@@ -14090,7 +13523,7 @@
       </p:sp>
       <p:sp>
         <p:nvSpPr>
-          <p:cNvPr id="12" name="Text 6"/>
+          <p:cNvPr id="11" name="Text 8"/>
           <p:cNvSpPr/>
           <p:nvPr/>
         </p:nvSpPr>
@@ -14132,6 +13565,9 @@
   <p:clrMapOvr>
     <a:masterClrMapping/>
   </p:clrMapOvr>
+  <p:transition xmlns:p="http://schemas.openxmlformats.org/presentationml/2006/main" spd="med">
+    <p:fade/>
+  </p:transition>
 </p:sld>
 </file>
 
